--- a/slides/flsg/1-intro-flsg.pptx
+++ b/slides/flsg/1-intro-flsg.pptx
@@ -5,27 +5,28 @@
     <p:sldMasterId id="2147483696" r:id="rId1"/>
   </p:sldMasterIdLst>
   <p:notesMasterIdLst>
-    <p:notesMasterId r:id="rId20"/>
+    <p:notesMasterId r:id="rId21"/>
   </p:notesMasterIdLst>
   <p:sldIdLst>
     <p:sldId id="256" r:id="rId2"/>
     <p:sldId id="257" r:id="rId3"/>
-    <p:sldId id="264" r:id="rId4"/>
-    <p:sldId id="263" r:id="rId5"/>
-    <p:sldId id="265" r:id="rId6"/>
-    <p:sldId id="258" r:id="rId7"/>
-    <p:sldId id="259" r:id="rId8"/>
-    <p:sldId id="262" r:id="rId9"/>
-    <p:sldId id="266" r:id="rId10"/>
-    <p:sldId id="267" r:id="rId11"/>
-    <p:sldId id="268" r:id="rId12"/>
-    <p:sldId id="269" r:id="rId13"/>
-    <p:sldId id="270" r:id="rId14"/>
-    <p:sldId id="271" r:id="rId15"/>
-    <p:sldId id="272" r:id="rId16"/>
-    <p:sldId id="273" r:id="rId17"/>
-    <p:sldId id="261" r:id="rId18"/>
-    <p:sldId id="274" r:id="rId19"/>
+    <p:sldId id="275" r:id="rId4"/>
+    <p:sldId id="264" r:id="rId5"/>
+    <p:sldId id="263" r:id="rId6"/>
+    <p:sldId id="265" r:id="rId7"/>
+    <p:sldId id="258" r:id="rId8"/>
+    <p:sldId id="259" r:id="rId9"/>
+    <p:sldId id="262" r:id="rId10"/>
+    <p:sldId id="266" r:id="rId11"/>
+    <p:sldId id="267" r:id="rId12"/>
+    <p:sldId id="268" r:id="rId13"/>
+    <p:sldId id="269" r:id="rId14"/>
+    <p:sldId id="270" r:id="rId15"/>
+    <p:sldId id="271" r:id="rId16"/>
+    <p:sldId id="272" r:id="rId17"/>
+    <p:sldId id="273" r:id="rId18"/>
+    <p:sldId id="261" r:id="rId19"/>
+    <p:sldId id="274" r:id="rId20"/>
   </p:sldIdLst>
   <p:sldSz cx="12192000" cy="6858000"/>
   <p:notesSz cx="6858000" cy="9144000"/>
@@ -314,7 +315,7 @@
           </a:lstStyle>
           <a:p>
             <a:fld id="{2DE082D9-00CE-4FDC-82D3-FDE16CD37225}" type="datetimeFigureOut">
-              <a:t>5/8/26</a:t>
+              <a:t>5/14/26</a:t>
             </a:fld>
             <a:endParaRPr lang="en-US"/>
           </a:p>
@@ -823,7 +824,7 @@
           <a:p>
             <a:fld id="{C2D7E69D-609B-4983-96D1-38CC478AEB14}" type="slidenum">
               <a:rPr lang="en-GB" smtClean="0"/>
-              <a:t>15</a:t>
+              <a:t>16</a:t>
             </a:fld>
             <a:endParaRPr lang="en-GB"/>
           </a:p>
@@ -833,6 +834,114 @@
     <p:extLst>
       <p:ext uri="{BB962C8B-B14F-4D97-AF65-F5344CB8AC3E}">
         <p14:creationId xmlns:p14="http://schemas.microsoft.com/office/powerpoint/2010/main" val="1079868011"/>
+      </p:ext>
+    </p:extLst>
+  </p:cSld>
+  <p:clrMapOvr>
+    <a:masterClrMapping/>
+  </p:clrMapOvr>
+</p:notes>
+</file>
+
+<file path=ppt/notesSlides/notesSlide11.xml><?xml version="1.0" encoding="utf-8"?>
+<p:notes xmlns:a="http://schemas.openxmlformats.org/drawingml/2006/main" xmlns:r="http://schemas.openxmlformats.org/officeDocument/2006/relationships" xmlns:p="http://schemas.openxmlformats.org/presentationml/2006/main">
+  <p:cSld>
+    <p:spTree>
+      <p:nvGrpSpPr>
+        <p:cNvPr id="1" name="">
+          <a:extLst>
+            <a:ext uri="{FF2B5EF4-FFF2-40B4-BE49-F238E27FC236}">
+              <a16:creationId xmlns:a16="http://schemas.microsoft.com/office/drawing/2014/main" id="{AE03ABCE-18A3-AA75-919E-ABED881017B6}"/>
+            </a:ext>
+          </a:extLst>
+        </p:cNvPr>
+        <p:cNvGrpSpPr/>
+        <p:nvPr/>
+      </p:nvGrpSpPr>
+      <p:grpSpPr>
+        <a:xfrm>
+          <a:off x="0" y="0"/>
+          <a:ext cx="0" cy="0"/>
+          <a:chOff x="0" y="0"/>
+          <a:chExt cx="0" cy="0"/>
+        </a:xfrm>
+      </p:grpSpPr>
+      <p:sp>
+        <p:nvSpPr>
+          <p:cNvPr id="2" name="Slide Image Placeholder 1">
+            <a:extLst>
+              <a:ext uri="{FF2B5EF4-FFF2-40B4-BE49-F238E27FC236}">
+                <a16:creationId xmlns:a16="http://schemas.microsoft.com/office/drawing/2014/main" id="{5C070E95-BAA1-70B9-9F1D-4B619F9FE39A}"/>
+              </a:ext>
+            </a:extLst>
+          </p:cNvPr>
+          <p:cNvSpPr>
+            <a:spLocks noGrp="1" noRot="1" noChangeAspect="1"/>
+          </p:cNvSpPr>
+          <p:nvPr>
+            <p:ph type="sldImg"/>
+          </p:nvPr>
+        </p:nvSpPr>
+        <p:spPr/>
+      </p:sp>
+      <p:sp>
+        <p:nvSpPr>
+          <p:cNvPr id="3" name="Notes Placeholder 2">
+            <a:extLst>
+              <a:ext uri="{FF2B5EF4-FFF2-40B4-BE49-F238E27FC236}">
+                <a16:creationId xmlns:a16="http://schemas.microsoft.com/office/drawing/2014/main" id="{18AD6490-3F2B-1CDB-7418-180FF690C875}"/>
+              </a:ext>
+            </a:extLst>
+          </p:cNvPr>
+          <p:cNvSpPr>
+            <a:spLocks noGrp="1"/>
+          </p:cNvSpPr>
+          <p:nvPr>
+            <p:ph type="body" idx="1"/>
+          </p:nvPr>
+        </p:nvSpPr>
+        <p:spPr/>
+        <p:txBody>
+          <a:bodyPr/>
+          <a:lstStyle/>
+          <a:p>
+            <a:endParaRPr lang="en-US" dirty="0"/>
+          </a:p>
+        </p:txBody>
+      </p:sp>
+      <p:sp>
+        <p:nvSpPr>
+          <p:cNvPr id="4" name="Slide Number Placeholder 3">
+            <a:extLst>
+              <a:ext uri="{FF2B5EF4-FFF2-40B4-BE49-F238E27FC236}">
+                <a16:creationId xmlns:a16="http://schemas.microsoft.com/office/drawing/2014/main" id="{7FF861E1-843D-7C4B-81BB-BDA41388DCD5}"/>
+              </a:ext>
+            </a:extLst>
+          </p:cNvPr>
+          <p:cNvSpPr>
+            <a:spLocks noGrp="1"/>
+          </p:cNvSpPr>
+          <p:nvPr>
+            <p:ph type="sldNum" sz="quarter" idx="5"/>
+          </p:nvPr>
+        </p:nvSpPr>
+        <p:spPr/>
+        <p:txBody>
+          <a:bodyPr/>
+          <a:lstStyle/>
+          <a:p>
+            <a:fld id="{C2D7E69D-609B-4983-96D1-38CC478AEB14}" type="slidenum">
+              <a:rPr lang="en-GB" smtClean="0"/>
+              <a:t>19</a:t>
+            </a:fld>
+            <a:endParaRPr lang="en-GB"/>
+          </a:p>
+        </p:txBody>
+      </p:sp>
+    </p:spTree>
+    <p:extLst>
+      <p:ext uri="{BB962C8B-B14F-4D97-AF65-F5344CB8AC3E}">
+        <p14:creationId xmlns:p14="http://schemas.microsoft.com/office/powerpoint/2010/main" val="2586185268"/>
       </p:ext>
     </p:extLst>
   </p:cSld>
@@ -935,7 +1044,7 @@
           <a:p>
             <a:r>
               <a:rPr lang="en-US" dirty="0"/>
-              <a:t>Workshops (see in a second), AI Clinic, sections of university-wide workshops / events that are supported by us</a:t>
+              <a:t>Workshops (see in a second) and  AI Clinic</a:t>
             </a:r>
           </a:p>
           <a:p>
@@ -964,9 +1073,6 @@
               <a:rPr lang="en-US" dirty="0"/>
               <a:t>We’re finding more and more that researchers from the Humanities want to utilize machine learning methods, and we’re having to reassess what we think of as traditional science.</a:t>
             </a:r>
-          </a:p>
-          <a:p>
-            <a:endParaRPr lang="en-US" dirty="0"/>
           </a:p>
         </p:txBody>
       </p:sp>
@@ -1083,7 +1189,7 @@
           <a:p>
             <a:fld id="{C2D7E69D-609B-4983-96D1-38CC478AEB14}" type="slidenum">
               <a:rPr lang="en-GB" smtClean="0"/>
-              <a:t>3</a:t>
+              <a:t>4</a:t>
             </a:fld>
             <a:endParaRPr lang="en-GB"/>
           </a:p>
@@ -1148,7 +1254,7 @@
           <a:p>
             <a:r>
               <a:rPr lang="en-US" dirty="0"/>
-              <a:t>Allow 5 minutes</a:t>
+              <a:t>Allow 10 minutes chat</a:t>
             </a:r>
           </a:p>
         </p:txBody>
@@ -1170,7 +1276,7 @@
           <a:p>
             <a:fld id="{C2D7E69D-609B-4983-96D1-38CC478AEB14}" type="slidenum">
               <a:rPr lang="en-GB" smtClean="0"/>
-              <a:t>5</a:t>
+              <a:t>6</a:t>
             </a:fld>
             <a:endParaRPr lang="en-GB"/>
           </a:p>
@@ -1326,7 +1432,7 @@
           <a:p>
             <a:fld id="{C2D7E69D-609B-4983-96D1-38CC478AEB14}" type="slidenum">
               <a:rPr lang="en-GB" smtClean="0"/>
-              <a:t>6</a:t>
+              <a:t>7</a:t>
             </a:fld>
             <a:endParaRPr lang="en-GB"/>
           </a:p>
@@ -1449,7 +1555,7 @@
           <a:p>
             <a:fld id="{C2D7E69D-609B-4983-96D1-38CC478AEB14}" type="slidenum">
               <a:rPr lang="en-GB" smtClean="0"/>
-              <a:t>7</a:t>
+              <a:t>8</a:t>
             </a:fld>
             <a:endParaRPr lang="en-GB"/>
           </a:p>
@@ -1536,7 +1642,7 @@
           <a:p>
             <a:fld id="{C2D7E69D-609B-4983-96D1-38CC478AEB14}" type="slidenum">
               <a:rPr lang="en-GB" smtClean="0"/>
-              <a:t>9</a:t>
+              <a:t>10</a:t>
             </a:fld>
             <a:endParaRPr lang="en-GB"/>
           </a:p>
@@ -1623,7 +1729,7 @@
           <a:p>
             <a:fld id="{C2D7E69D-609B-4983-96D1-38CC478AEB14}" type="slidenum">
               <a:rPr lang="en-GB" smtClean="0"/>
-              <a:t>13</a:t>
+              <a:t>14</a:t>
             </a:fld>
             <a:endParaRPr lang="en-GB"/>
           </a:p>
@@ -1690,6 +1796,15 @@
               <a:rPr lang="en-GB" dirty="0"/>
               <a:t>The Act needs a practical, auditable way to classify and assess general purpose AI models without being able to directly test every possible capability. These indicators are its solution to that problem. </a:t>
             </a:r>
+          </a:p>
+          <a:p>
+            <a:endParaRPr lang="en-GB" dirty="0"/>
+          </a:p>
+          <a:p>
+            <a:r>
+              <a:rPr lang="en-GB" dirty="0"/>
+              <a:t>CONTINUES ON NEXT SLIDE</a:t>
+            </a:r>
             <a:endParaRPr lang="en-US" dirty="0"/>
           </a:p>
         </p:txBody>
@@ -1711,7 +1826,7 @@
           <a:p>
             <a:fld id="{C2D7E69D-609B-4983-96D1-38CC478AEB14}" type="slidenum">
               <a:rPr lang="en-GB" smtClean="0"/>
-              <a:t>14</a:t>
+              <a:t>15</a:t>
             </a:fld>
             <a:endParaRPr lang="en-GB"/>
           </a:p>
@@ -1859,7 +1974,7 @@
           <a:p>
             <a:fld id="{C764DE79-268F-4C1A-8933-263129D2AF90}" type="datetimeFigureOut">
               <a:rPr lang="en-US" dirty="0"/>
-              <a:t>5/8/26</a:t>
+              <a:t>5/14/26</a:t>
             </a:fld>
             <a:endParaRPr lang="en-US" dirty="0"/>
           </a:p>
@@ -2027,7 +2142,7 @@
           <a:p>
             <a:fld id="{C764DE79-268F-4C1A-8933-263129D2AF90}" type="datetimeFigureOut">
               <a:rPr lang="en-US" dirty="0"/>
-              <a:t>5/8/26</a:t>
+              <a:t>5/14/26</a:t>
             </a:fld>
             <a:endParaRPr lang="en-US" dirty="0"/>
           </a:p>
@@ -2205,7 +2320,7 @@
           <a:p>
             <a:fld id="{C764DE79-268F-4C1A-8933-263129D2AF90}" type="datetimeFigureOut">
               <a:rPr lang="en-US" dirty="0"/>
-              <a:t>5/8/26</a:t>
+              <a:t>5/14/26</a:t>
             </a:fld>
             <a:endParaRPr lang="en-US" dirty="0"/>
           </a:p>
@@ -2373,7 +2488,7 @@
           <a:p>
             <a:fld id="{C764DE79-268F-4C1A-8933-263129D2AF90}" type="datetimeFigureOut">
               <a:rPr lang="en-US" dirty="0"/>
-              <a:t>5/8/26</a:t>
+              <a:t>5/14/26</a:t>
             </a:fld>
             <a:endParaRPr lang="en-US" dirty="0"/>
           </a:p>
@@ -2618,7 +2733,7 @@
           <a:p>
             <a:fld id="{C764DE79-268F-4C1A-8933-263129D2AF90}" type="datetimeFigureOut">
               <a:rPr lang="en-US" dirty="0"/>
-              <a:t>5/8/26</a:t>
+              <a:t>5/14/26</a:t>
             </a:fld>
             <a:endParaRPr lang="en-US" dirty="0"/>
           </a:p>
@@ -2847,7 +2962,7 @@
           <a:p>
             <a:fld id="{C764DE79-268F-4C1A-8933-263129D2AF90}" type="datetimeFigureOut">
               <a:rPr lang="en-US" dirty="0"/>
-              <a:t>5/8/26</a:t>
+              <a:t>5/14/26</a:t>
             </a:fld>
             <a:endParaRPr lang="en-US" dirty="0"/>
           </a:p>
@@ -3211,7 +3326,7 @@
           <a:p>
             <a:fld id="{C764DE79-268F-4C1A-8933-263129D2AF90}" type="datetimeFigureOut">
               <a:rPr lang="en-US" dirty="0"/>
-              <a:t>5/8/26</a:t>
+              <a:t>5/14/26</a:t>
             </a:fld>
             <a:endParaRPr lang="en-US" dirty="0"/>
           </a:p>
@@ -3328,7 +3443,7 @@
           <a:p>
             <a:fld id="{C764DE79-268F-4C1A-8933-263129D2AF90}" type="datetimeFigureOut">
               <a:rPr lang="en-US" dirty="0"/>
-              <a:t>5/8/26</a:t>
+              <a:t>5/14/26</a:t>
             </a:fld>
             <a:endParaRPr lang="en-US" dirty="0"/>
           </a:p>
@@ -3423,7 +3538,7 @@
           <a:p>
             <a:fld id="{C764DE79-268F-4C1A-8933-263129D2AF90}" type="datetimeFigureOut">
               <a:rPr lang="en-US" dirty="0"/>
-              <a:t>5/8/26</a:t>
+              <a:t>5/14/26</a:t>
             </a:fld>
             <a:endParaRPr lang="en-US" dirty="0"/>
           </a:p>
@@ -3698,7 +3813,7 @@
           <a:p>
             <a:fld id="{C764DE79-268F-4C1A-8933-263129D2AF90}" type="datetimeFigureOut">
               <a:rPr lang="en-US" dirty="0"/>
-              <a:t>5/8/26</a:t>
+              <a:t>5/14/26</a:t>
             </a:fld>
             <a:endParaRPr lang="en-US" dirty="0"/>
           </a:p>
@@ -3950,7 +4065,7 @@
           <a:p>
             <a:fld id="{C764DE79-268F-4C1A-8933-263129D2AF90}" type="datetimeFigureOut">
               <a:rPr lang="en-US" dirty="0"/>
-              <a:t>5/8/26</a:t>
+              <a:t>5/14/26</a:t>
             </a:fld>
             <a:endParaRPr lang="en-US" dirty="0"/>
           </a:p>
@@ -4015,9 +4130,18 @@
 <p:sldMaster xmlns:a="http://schemas.openxmlformats.org/drawingml/2006/main" xmlns:r="http://schemas.openxmlformats.org/officeDocument/2006/relationships" xmlns:p="http://schemas.openxmlformats.org/presentationml/2006/main">
   <p:cSld>
     <p:bg>
-      <p:bgRef idx="1001">
-        <a:schemeClr val="bg1"/>
-      </p:bgRef>
+      <p:bgPr>
+        <a:blipFill dpi="0" rotWithShape="1">
+          <a:blip r:embed="rId13">
+            <a:lum/>
+          </a:blip>
+          <a:srcRect/>
+          <a:stretch>
+            <a:fillRect/>
+          </a:stretch>
+        </a:blipFill>
+        <a:effectLst/>
+      </p:bgPr>
     </p:bg>
     <p:spTree>
       <p:nvGrpSpPr>
@@ -4161,7 +4285,7 @@
           <a:p>
             <a:fld id="{C764DE79-268F-4C1A-8933-263129D2AF90}" type="datetimeFigureOut">
               <a:rPr lang="en-US" dirty="0"/>
-              <a:t>5/8/26</a:t>
+              <a:t>5/14/26</a:t>
             </a:fld>
             <a:endParaRPr lang="en-US" dirty="0"/>
           </a:p>
@@ -4583,10 +4707,18 @@
           <a:p>
             <a:pPr algn="l"/>
             <a:r>
-              <a:rPr lang="en-US" dirty="0"/>
+              <a:rPr lang="en-US" dirty="0">
+                <a:latin typeface="CMU Serif Roman" panose="02000603000000000000" pitchFamily="2" charset="0"/>
+                <a:ea typeface="CMU Serif Roman" panose="02000603000000000000" pitchFamily="2" charset="0"/>
+                <a:cs typeface="CMU Serif Roman" panose="02000603000000000000" pitchFamily="2" charset="0"/>
+              </a:rPr>
               <a:t>Introduction to LLMs</a:t>
             </a:r>
-            <a:endParaRPr lang="en-US"/>
+            <a:endParaRPr lang="en-US">
+              <a:latin typeface="CMU Serif Roman" panose="02000603000000000000" pitchFamily="2" charset="0"/>
+              <a:ea typeface="CMU Serif Roman" panose="02000603000000000000" pitchFamily="2" charset="0"/>
+              <a:cs typeface="CMU Serif Roman" panose="02000603000000000000" pitchFamily="2" charset="0"/>
+            </a:endParaRPr>
           </a:p>
         </p:txBody>
       </p:sp>
@@ -4609,10 +4741,18 @@
           <a:p>
             <a:pPr algn="l"/>
             <a:r>
-              <a:rPr lang="en-US" dirty="0"/>
+              <a:rPr lang="en-US" dirty="0">
+                <a:latin typeface="CMU Serif Roman" panose="02000603000000000000" pitchFamily="2" charset="0"/>
+                <a:ea typeface="CMU Serif Roman" panose="02000603000000000000" pitchFamily="2" charset="0"/>
+                <a:cs typeface="CMU Serif Roman" panose="02000603000000000000" pitchFamily="2" charset="0"/>
+              </a:rPr>
               <a:t>Accelerate Programme for Scientific Discovery</a:t>
             </a:r>
-            <a:endParaRPr lang="en-US" dirty="0" err="1"/>
+            <a:endParaRPr lang="en-US" dirty="0" err="1">
+              <a:latin typeface="CMU Serif Roman" panose="02000603000000000000" pitchFamily="2" charset="0"/>
+              <a:ea typeface="CMU Serif Roman" panose="02000603000000000000" pitchFamily="2" charset="0"/>
+              <a:cs typeface="CMU Serif Roman" panose="02000603000000000000" pitchFamily="2" charset="0"/>
+            </a:endParaRPr>
           </a:p>
         </p:txBody>
       </p:sp>
@@ -4630,6 +4770,164 @@
 </file>
 
 <file path=ppt/slides/slide10.xml><?xml version="1.0" encoding="utf-8"?>
+<p:sld xmlns:a="http://schemas.openxmlformats.org/drawingml/2006/main" xmlns:r="http://schemas.openxmlformats.org/officeDocument/2006/relationships" xmlns:p="http://schemas.openxmlformats.org/presentationml/2006/main">
+  <p:cSld>
+    <p:spTree>
+      <p:nvGrpSpPr>
+        <p:cNvPr id="1" name=""/>
+        <p:cNvGrpSpPr/>
+        <p:nvPr/>
+      </p:nvGrpSpPr>
+      <p:grpSpPr>
+        <a:xfrm>
+          <a:off x="0" y="0"/>
+          <a:ext cx="0" cy="0"/>
+          <a:chOff x="0" y="0"/>
+          <a:chExt cx="0" cy="0"/>
+        </a:xfrm>
+      </p:grpSpPr>
+      <p:sp>
+        <p:nvSpPr>
+          <p:cNvPr id="2" name="Title 1">
+            <a:extLst>
+              <a:ext uri="{FF2B5EF4-FFF2-40B4-BE49-F238E27FC236}">
+                <a16:creationId xmlns:a16="http://schemas.microsoft.com/office/drawing/2014/main" id="{7C33511F-8565-6D41-02BF-6E9296DCF3B4}"/>
+              </a:ext>
+            </a:extLst>
+          </p:cNvPr>
+          <p:cNvSpPr>
+            <a:spLocks noGrp="1"/>
+          </p:cNvSpPr>
+          <p:nvPr>
+            <p:ph type="title"/>
+          </p:nvPr>
+        </p:nvSpPr>
+        <p:spPr/>
+        <p:txBody>
+          <a:bodyPr/>
+          <a:lstStyle/>
+          <a:p>
+            <a:r>
+              <a:rPr lang="en-US" dirty="0">
+                <a:latin typeface="CMU Serif Roman" panose="02000603000000000000" pitchFamily="2" charset="0"/>
+                <a:ea typeface="CMU Serif Roman" panose="02000603000000000000" pitchFamily="2" charset="0"/>
+                <a:cs typeface="CMU Serif Roman" panose="02000603000000000000" pitchFamily="2" charset="0"/>
+              </a:rPr>
+              <a:t>EU AI Act </a:t>
+            </a:r>
+            <a:r>
+              <a:rPr lang="en-US" i="1" dirty="0">
+                <a:solidFill>
+                  <a:schemeClr val="bg2">
+                    <a:lumMod val="50000"/>
+                  </a:schemeClr>
+                </a:solidFill>
+                <a:latin typeface="CMU SERIF ROMAN" panose="02000603000000000000" pitchFamily="2" charset="0"/>
+                <a:ea typeface="CMU SERIF ROMAN" panose="02000603000000000000" pitchFamily="2" charset="0"/>
+                <a:cs typeface="CMU SERIF ROMAN" panose="02000603000000000000" pitchFamily="2" charset="0"/>
+              </a:rPr>
+              <a:t>(</a:t>
+            </a:r>
+            <a:r>
+              <a:rPr lang="en-GB" i="1" dirty="0">
+                <a:solidFill>
+                  <a:schemeClr val="bg2">
+                    <a:lumMod val="50000"/>
+                  </a:schemeClr>
+                </a:solidFill>
+                <a:latin typeface="CMU SERIF ROMAN" panose="02000603000000000000" pitchFamily="2" charset="0"/>
+                <a:ea typeface="CMU SERIF ROMAN" panose="02000603000000000000" pitchFamily="2" charset="0"/>
+                <a:cs typeface="CMU SERIF ROMAN" panose="02000603000000000000" pitchFamily="2" charset="0"/>
+              </a:rPr>
+              <a:t>August 2024</a:t>
+            </a:r>
+            <a:r>
+              <a:rPr lang="en-US" i="1" dirty="0">
+                <a:solidFill>
+                  <a:schemeClr val="bg2">
+                    <a:lumMod val="50000"/>
+                  </a:schemeClr>
+                </a:solidFill>
+                <a:latin typeface="CMU SERIF ROMAN" panose="02000603000000000000" pitchFamily="2" charset="0"/>
+                <a:ea typeface="CMU SERIF ROMAN" panose="02000603000000000000" pitchFamily="2" charset="0"/>
+                <a:cs typeface="CMU SERIF ROMAN" panose="02000603000000000000" pitchFamily="2" charset="0"/>
+              </a:rPr>
+              <a:t>)</a:t>
+            </a:r>
+          </a:p>
+        </p:txBody>
+      </p:sp>
+      <p:sp>
+        <p:nvSpPr>
+          <p:cNvPr id="3" name="Content Placeholder 2">
+            <a:extLst>
+              <a:ext uri="{FF2B5EF4-FFF2-40B4-BE49-F238E27FC236}">
+                <a16:creationId xmlns:a16="http://schemas.microsoft.com/office/drawing/2014/main" id="{C10ABB8D-3273-0866-F725-70CD2E52915C}"/>
+              </a:ext>
+            </a:extLst>
+          </p:cNvPr>
+          <p:cNvSpPr>
+            <a:spLocks noGrp="1"/>
+          </p:cNvSpPr>
+          <p:nvPr>
+            <p:ph idx="1"/>
+          </p:nvPr>
+        </p:nvSpPr>
+        <p:spPr/>
+        <p:txBody>
+          <a:bodyPr vert="horz" lIns="91440" tIns="45720" rIns="91440" bIns="45720" rtlCol="0" anchor="t">
+            <a:normAutofit/>
+          </a:bodyPr>
+          <a:lstStyle/>
+          <a:p>
+            <a:pPr marL="0" indent="0">
+              <a:buNone/>
+            </a:pPr>
+            <a:r>
+              <a:rPr lang="en-US" dirty="0">
+                <a:latin typeface="CMU Serif Roman" panose="02000603000000000000" pitchFamily="2" charset="0"/>
+                <a:ea typeface="CMU Serif Roman" panose="02000603000000000000" pitchFamily="2" charset="0"/>
+                <a:cs typeface="CMU Serif Roman" panose="02000603000000000000" pitchFamily="2" charset="0"/>
+              </a:rPr>
+              <a:t>How does the AI Act define things...?</a:t>
+            </a:r>
+          </a:p>
+          <a:p>
+            <a:pPr marL="0" indent="0">
+              <a:buNone/>
+            </a:pPr>
+            <a:endParaRPr lang="en-US" dirty="0">
+              <a:latin typeface="CMU Serif Roman" panose="02000603000000000000" pitchFamily="2" charset="0"/>
+              <a:ea typeface="CMU Serif Roman" panose="02000603000000000000" pitchFamily="2" charset="0"/>
+              <a:cs typeface="CMU Serif Roman" panose="02000603000000000000" pitchFamily="2" charset="0"/>
+            </a:endParaRPr>
+          </a:p>
+          <a:p>
+            <a:pPr marL="0" indent="0">
+              <a:buNone/>
+            </a:pPr>
+            <a:endParaRPr lang="en-US" dirty="0">
+              <a:latin typeface="CMU Serif Roman" panose="02000603000000000000" pitchFamily="2" charset="0"/>
+              <a:ea typeface="CMU Serif Roman" panose="02000603000000000000" pitchFamily="2" charset="0"/>
+              <a:cs typeface="CMU Serif Roman" panose="02000603000000000000" pitchFamily="2" charset="0"/>
+            </a:endParaRPr>
+          </a:p>
+        </p:txBody>
+      </p:sp>
+    </p:spTree>
+    <p:extLst>
+      <p:ext uri="{BB962C8B-B14F-4D97-AF65-F5344CB8AC3E}">
+        <p14:creationId xmlns:p14="http://schemas.microsoft.com/office/powerpoint/2010/main" val="1865729139"/>
+      </p:ext>
+    </p:extLst>
+  </p:cSld>
+  <p:clrMapOvr>
+    <a:masterClrMapping/>
+  </p:clrMapOvr>
+</p:sld>
+</file>
+
+<file path=ppt/slides/slide11.xml><?xml version="1.0" encoding="utf-8"?>
 <p:sld xmlns:a="http://schemas.openxmlformats.org/drawingml/2006/main" xmlns:r="http://schemas.openxmlformats.org/officeDocument/2006/relationships" xmlns:p="http://schemas.openxmlformats.org/presentationml/2006/main">
   <p:cSld>
     <p:spTree>
@@ -4679,7 +4977,11 @@
               <a:buNone/>
             </a:pPr>
             <a:r>
-              <a:rPr lang="en-US" dirty="0"/>
+              <a:rPr lang="en-US" dirty="0">
+                <a:latin typeface="CMU Serif Roman" panose="02000603000000000000" pitchFamily="2" charset="0"/>
+                <a:ea typeface="CMU Serif Roman" panose="02000603000000000000" pitchFamily="2" charset="0"/>
+                <a:cs typeface="CMU Serif Roman" panose="02000603000000000000" pitchFamily="2" charset="0"/>
+              </a:rPr>
               <a:t>How does the AI Act define things...?</a:t>
             </a:r>
           </a:p>
@@ -4687,7 +4989,11 @@
             <a:pPr marL="0" indent="0">
               <a:buNone/>
             </a:pPr>
-            <a:endParaRPr lang="en-US" dirty="0"/>
+            <a:endParaRPr lang="en-US" dirty="0">
+              <a:latin typeface="CMU Serif Roman" panose="02000603000000000000" pitchFamily="2" charset="0"/>
+              <a:ea typeface="CMU Serif Roman" panose="02000603000000000000" pitchFamily="2" charset="0"/>
+              <a:cs typeface="CMU Serif Roman" panose="02000603000000000000" pitchFamily="2" charset="0"/>
+            </a:endParaRPr>
           </a:p>
           <a:p>
             <a:pPr marL="0" indent="0">
@@ -4696,21 +5002,33 @@
             <a:r>
               <a:rPr lang="en-US" b="1" dirty="0">
                 <a:solidFill>
-                  <a:srgbClr val="7030A0"/>
+                  <a:srgbClr val="1B55EB"/>
                 </a:solidFill>
-                <a:ea typeface="+mn-lt"/>
-                <a:cs typeface="+mn-lt"/>
+                <a:latin typeface="CMU SERIF ROMAN" panose="02000603000000000000" pitchFamily="2" charset="0"/>
+                <a:ea typeface="CMU SERIF ROMAN" panose="02000603000000000000" pitchFamily="2" charset="0"/>
+                <a:cs typeface="CMU SERIF ROMAN" panose="02000603000000000000" pitchFamily="2" charset="0"/>
               </a:rPr>
               <a:t>general-purpose AI model</a:t>
             </a:r>
             <a:r>
               <a:rPr lang="en-US" dirty="0">
-                <a:ea typeface="+mn-lt"/>
-                <a:cs typeface="+mn-lt"/>
-              </a:rPr>
-              <a:t> ... an AI model</a:t>
-            </a:r>
-            <a:endParaRPr lang="en-US" dirty="0"/>
+                <a:solidFill>
+                  <a:srgbClr val="1B55EB"/>
+                </a:solidFill>
+                <a:latin typeface="CMU Serif Roman" panose="02000603000000000000" pitchFamily="2" charset="0"/>
+                <a:ea typeface="CMU Serif Roman" panose="02000603000000000000" pitchFamily="2" charset="0"/>
+                <a:cs typeface="CMU Serif Roman" panose="02000603000000000000" pitchFamily="2" charset="0"/>
+              </a:rPr>
+              <a:t> </a:t>
+            </a:r>
+            <a:r>
+              <a:rPr lang="en-US" dirty="0">
+                <a:latin typeface="CMU Serif Roman" panose="02000603000000000000" pitchFamily="2" charset="0"/>
+                <a:ea typeface="CMU Serif Roman" panose="02000603000000000000" pitchFamily="2" charset="0"/>
+                <a:cs typeface="CMU Serif Roman" panose="02000603000000000000" pitchFamily="2" charset="0"/>
+              </a:rPr>
+              <a:t>... an AI model</a:t>
+            </a:r>
           </a:p>
         </p:txBody>
       </p:sp>
@@ -4736,7 +5054,11 @@
           <a:lstStyle/>
           <a:p>
             <a:r>
-              <a:rPr lang="en-US" dirty="0"/>
+              <a:rPr lang="en-US" dirty="0">
+                <a:latin typeface="CMU Serif Roman" panose="02000603000000000000" pitchFamily="2" charset="0"/>
+                <a:ea typeface="CMU Serif Roman" panose="02000603000000000000" pitchFamily="2" charset="0"/>
+                <a:cs typeface="CMU Serif Roman" panose="02000603000000000000" pitchFamily="2" charset="0"/>
+              </a:rPr>
               <a:t>EU AI Act </a:t>
             </a:r>
             <a:r>
@@ -4746,6 +5068,9 @@
                     <a:lumMod val="50000"/>
                   </a:schemeClr>
                 </a:solidFill>
+                <a:latin typeface="CMU SERIF ROMAN" panose="02000603000000000000" pitchFamily="2" charset="0"/>
+                <a:ea typeface="CMU SERIF ROMAN" panose="02000603000000000000" pitchFamily="2" charset="0"/>
+                <a:cs typeface="CMU SERIF ROMAN" panose="02000603000000000000" pitchFamily="2" charset="0"/>
               </a:rPr>
               <a:t>(</a:t>
             </a:r>
@@ -4756,6 +5081,9 @@
                     <a:lumMod val="50000"/>
                   </a:schemeClr>
                 </a:solidFill>
+                <a:latin typeface="CMU SERIF ROMAN" panose="02000603000000000000" pitchFamily="2" charset="0"/>
+                <a:ea typeface="CMU SERIF ROMAN" panose="02000603000000000000" pitchFamily="2" charset="0"/>
+                <a:cs typeface="CMU SERIF ROMAN" panose="02000603000000000000" pitchFamily="2" charset="0"/>
               </a:rPr>
               <a:t>August 2024</a:t>
             </a:r>
@@ -4766,10 +5094,17 @@
                     <a:lumMod val="50000"/>
                   </a:schemeClr>
                 </a:solidFill>
+                <a:latin typeface="CMU SERIF ROMAN" panose="02000603000000000000" pitchFamily="2" charset="0"/>
+                <a:ea typeface="CMU SERIF ROMAN" panose="02000603000000000000" pitchFamily="2" charset="0"/>
+                <a:cs typeface="CMU SERIF ROMAN" panose="02000603000000000000" pitchFamily="2" charset="0"/>
               </a:rPr>
               <a:t>)</a:t>
             </a:r>
-            <a:endParaRPr lang="en-US" dirty="0"/>
+            <a:endParaRPr lang="en-US" dirty="0">
+              <a:latin typeface="CMU Serif Roman" panose="02000603000000000000" pitchFamily="2" charset="0"/>
+              <a:ea typeface="CMU Serif Roman" panose="02000603000000000000" pitchFamily="2" charset="0"/>
+              <a:cs typeface="CMU Serif Roman" panose="02000603000000000000" pitchFamily="2" charset="0"/>
+            </a:endParaRPr>
           </a:p>
         </p:txBody>
       </p:sp>
@@ -4786,7 +5121,7 @@
 </p:sld>
 </file>
 
-<file path=ppt/slides/slide11.xml><?xml version="1.0" encoding="utf-8"?>
+<file path=ppt/slides/slide12.xml><?xml version="1.0" encoding="utf-8"?>
 <p:sld xmlns:a="http://schemas.openxmlformats.org/drawingml/2006/main" xmlns:r="http://schemas.openxmlformats.org/officeDocument/2006/relationships" xmlns:p="http://schemas.openxmlformats.org/presentationml/2006/main">
   <p:cSld>
     <p:spTree>
@@ -4831,7 +5166,11 @@
           <a:lstStyle/>
           <a:p>
             <a:r>
-              <a:rPr lang="en-US" dirty="0"/>
+              <a:rPr lang="en-US" dirty="0">
+                <a:latin typeface="CMU Serif Roman" panose="02000603000000000000" pitchFamily="2" charset="0"/>
+                <a:ea typeface="CMU Serif Roman" panose="02000603000000000000" pitchFamily="2" charset="0"/>
+                <a:cs typeface="CMU Serif Roman" panose="02000603000000000000" pitchFamily="2" charset="0"/>
+              </a:rPr>
               <a:t>EU AI Act </a:t>
             </a:r>
             <a:r>
@@ -4841,6 +5180,9 @@
                     <a:lumMod val="50000"/>
                   </a:schemeClr>
                 </a:solidFill>
+                <a:latin typeface="CMU SERIF ROMAN" panose="02000603000000000000" pitchFamily="2" charset="0"/>
+                <a:ea typeface="CMU SERIF ROMAN" panose="02000603000000000000" pitchFamily="2" charset="0"/>
+                <a:cs typeface="CMU SERIF ROMAN" panose="02000603000000000000" pitchFamily="2" charset="0"/>
               </a:rPr>
               <a:t>(</a:t>
             </a:r>
@@ -4851,6 +5193,9 @@
                     <a:lumMod val="50000"/>
                   </a:schemeClr>
                 </a:solidFill>
+                <a:latin typeface="CMU SERIF ROMAN" panose="02000603000000000000" pitchFamily="2" charset="0"/>
+                <a:ea typeface="CMU SERIF ROMAN" panose="02000603000000000000" pitchFamily="2" charset="0"/>
+                <a:cs typeface="CMU SERIF ROMAN" panose="02000603000000000000" pitchFamily="2" charset="0"/>
               </a:rPr>
               <a:t>August 2024</a:t>
             </a:r>
@@ -4861,10 +5206,17 @@
                     <a:lumMod val="50000"/>
                   </a:schemeClr>
                 </a:solidFill>
+                <a:latin typeface="CMU SERIF ROMAN" panose="02000603000000000000" pitchFamily="2" charset="0"/>
+                <a:ea typeface="CMU SERIF ROMAN" panose="02000603000000000000" pitchFamily="2" charset="0"/>
+                <a:cs typeface="CMU SERIF ROMAN" panose="02000603000000000000" pitchFamily="2" charset="0"/>
               </a:rPr>
               <a:t>)</a:t>
             </a:r>
-            <a:endParaRPr lang="en-US" dirty="0"/>
+            <a:endParaRPr lang="en-US" dirty="0">
+              <a:latin typeface="CMU Serif Roman" panose="02000603000000000000" pitchFamily="2" charset="0"/>
+              <a:ea typeface="CMU Serif Roman" panose="02000603000000000000" pitchFamily="2" charset="0"/>
+              <a:cs typeface="CMU Serif Roman" panose="02000603000000000000" pitchFamily="2" charset="0"/>
+            </a:endParaRPr>
           </a:p>
         </p:txBody>
       </p:sp>
@@ -4895,7 +5247,11 @@
               <a:buNone/>
             </a:pPr>
             <a:r>
-              <a:rPr lang="en-US" dirty="0"/>
+              <a:rPr lang="en-US" dirty="0">
+                <a:latin typeface="CMU Serif Roman" panose="02000603000000000000" pitchFamily="2" charset="0"/>
+                <a:ea typeface="CMU Serif Roman" panose="02000603000000000000" pitchFamily="2" charset="0"/>
+                <a:cs typeface="CMU Serif Roman" panose="02000603000000000000" pitchFamily="2" charset="0"/>
+              </a:rPr>
               <a:t>How does the AI Act define things...?</a:t>
             </a:r>
           </a:p>
@@ -4903,7 +5259,11 @@
             <a:pPr marL="0" indent="0">
               <a:buNone/>
             </a:pPr>
-            <a:endParaRPr lang="en-US" dirty="0"/>
+            <a:endParaRPr lang="en-US" dirty="0">
+              <a:latin typeface="CMU Serif Roman" panose="02000603000000000000" pitchFamily="2" charset="0"/>
+              <a:ea typeface="CMU Serif Roman" panose="02000603000000000000" pitchFamily="2" charset="0"/>
+              <a:cs typeface="CMU Serif Roman" panose="02000603000000000000" pitchFamily="2" charset="0"/>
+            </a:endParaRPr>
           </a:p>
           <a:p>
             <a:pPr marL="0" indent="0">
@@ -4912,21 +5272,33 @@
             <a:r>
               <a:rPr lang="en-US" b="1" dirty="0">
                 <a:solidFill>
-                  <a:srgbClr val="7030A0"/>
+                  <a:srgbClr val="1B55EB"/>
                 </a:solidFill>
-                <a:ea typeface="+mn-lt"/>
-                <a:cs typeface="+mn-lt"/>
+                <a:latin typeface="CMU SERIF ROMAN" panose="02000603000000000000" pitchFamily="2" charset="0"/>
+                <a:ea typeface="CMU SERIF ROMAN" panose="02000603000000000000" pitchFamily="2" charset="0"/>
+                <a:cs typeface="CMU SERIF ROMAN" panose="02000603000000000000" pitchFamily="2" charset="0"/>
               </a:rPr>
               <a:t>general-purpose AI model</a:t>
             </a:r>
             <a:r>
               <a:rPr lang="en-US" dirty="0">
-                <a:ea typeface="+mn-lt"/>
-                <a:cs typeface="+mn-lt"/>
-              </a:rPr>
-              <a:t> ... an AI model … trained with a large amount of data using self-supervision at scale, that displays significant generality and is capable of competently performing a wide range of distinct tasks</a:t>
-            </a:r>
-            <a:endParaRPr lang="en-US" dirty="0"/>
+                <a:solidFill>
+                  <a:srgbClr val="1B55EB"/>
+                </a:solidFill>
+                <a:latin typeface="CMU Serif Roman" panose="02000603000000000000" pitchFamily="2" charset="0"/>
+                <a:ea typeface="CMU Serif Roman" panose="02000603000000000000" pitchFamily="2" charset="0"/>
+                <a:cs typeface="CMU Serif Roman" panose="02000603000000000000" pitchFamily="2" charset="0"/>
+              </a:rPr>
+              <a:t> </a:t>
+            </a:r>
+            <a:r>
+              <a:rPr lang="en-US" dirty="0">
+                <a:latin typeface="CMU Serif Roman" panose="02000603000000000000" pitchFamily="2" charset="0"/>
+                <a:ea typeface="CMU Serif Roman" panose="02000603000000000000" pitchFamily="2" charset="0"/>
+                <a:cs typeface="CMU Serif Roman" panose="02000603000000000000" pitchFamily="2" charset="0"/>
+              </a:rPr>
+              <a:t>... an AI model … trained with a large amount of data using self-supervision at scale, that displays significant generality and is capable of competently performing a wide range of distinct tasks</a:t>
+            </a:r>
           </a:p>
         </p:txBody>
       </p:sp>
@@ -4943,7 +5315,7 @@
 </p:sld>
 </file>
 
-<file path=ppt/slides/slide12.xml><?xml version="1.0" encoding="utf-8"?>
+<file path=ppt/slides/slide13.xml><?xml version="1.0" encoding="utf-8"?>
 <p:sld xmlns:a="http://schemas.openxmlformats.org/drawingml/2006/main" xmlns:r="http://schemas.openxmlformats.org/officeDocument/2006/relationships" xmlns:p="http://schemas.openxmlformats.org/presentationml/2006/main">
   <p:cSld>
     <p:spTree>
@@ -4988,7 +5360,11 @@
           <a:lstStyle/>
           <a:p>
             <a:r>
-              <a:rPr lang="en-US" dirty="0"/>
+              <a:rPr lang="en-US" dirty="0">
+                <a:latin typeface="CMU Serif Roman" panose="02000603000000000000" pitchFamily="2" charset="0"/>
+                <a:ea typeface="CMU Serif Roman" panose="02000603000000000000" pitchFamily="2" charset="0"/>
+                <a:cs typeface="CMU Serif Roman" panose="02000603000000000000" pitchFamily="2" charset="0"/>
+              </a:rPr>
               <a:t>EU AI Act </a:t>
             </a:r>
             <a:r>
@@ -4998,6 +5374,9 @@
                     <a:lumMod val="50000"/>
                   </a:schemeClr>
                 </a:solidFill>
+                <a:latin typeface="CMU SERIF ROMAN" panose="02000603000000000000" pitchFamily="2" charset="0"/>
+                <a:ea typeface="CMU SERIF ROMAN" panose="02000603000000000000" pitchFamily="2" charset="0"/>
+                <a:cs typeface="CMU SERIF ROMAN" panose="02000603000000000000" pitchFamily="2" charset="0"/>
               </a:rPr>
               <a:t>(</a:t>
             </a:r>
@@ -5008,6 +5387,9 @@
                     <a:lumMod val="50000"/>
                   </a:schemeClr>
                 </a:solidFill>
+                <a:latin typeface="CMU SERIF ROMAN" panose="02000603000000000000" pitchFamily="2" charset="0"/>
+                <a:ea typeface="CMU SERIF ROMAN" panose="02000603000000000000" pitchFamily="2" charset="0"/>
+                <a:cs typeface="CMU SERIF ROMAN" panose="02000603000000000000" pitchFamily="2" charset="0"/>
               </a:rPr>
               <a:t>August 2024</a:t>
             </a:r>
@@ -5018,10 +5400,17 @@
                     <a:lumMod val="50000"/>
                   </a:schemeClr>
                 </a:solidFill>
+                <a:latin typeface="CMU SERIF ROMAN" panose="02000603000000000000" pitchFamily="2" charset="0"/>
+                <a:ea typeface="CMU SERIF ROMAN" panose="02000603000000000000" pitchFamily="2" charset="0"/>
+                <a:cs typeface="CMU SERIF ROMAN" panose="02000603000000000000" pitchFamily="2" charset="0"/>
               </a:rPr>
               <a:t>)</a:t>
             </a:r>
-            <a:endParaRPr lang="en-US" dirty="0"/>
+            <a:endParaRPr lang="en-US" dirty="0">
+              <a:latin typeface="CMU Serif Roman" panose="02000603000000000000" pitchFamily="2" charset="0"/>
+              <a:ea typeface="CMU Serif Roman" panose="02000603000000000000" pitchFamily="2" charset="0"/>
+              <a:cs typeface="CMU Serif Roman" panose="02000603000000000000" pitchFamily="2" charset="0"/>
+            </a:endParaRPr>
           </a:p>
         </p:txBody>
       </p:sp>
@@ -5052,7 +5441,11 @@
               <a:buNone/>
             </a:pPr>
             <a:r>
-              <a:rPr lang="en-US" dirty="0"/>
+              <a:rPr lang="en-US" dirty="0">
+                <a:latin typeface="CMU Serif Roman" panose="02000603000000000000" pitchFamily="2" charset="0"/>
+                <a:ea typeface="CMU Serif Roman" panose="02000603000000000000" pitchFamily="2" charset="0"/>
+                <a:cs typeface="CMU Serif Roman" panose="02000603000000000000" pitchFamily="2" charset="0"/>
+              </a:rPr>
               <a:t>How does the AI Act define things...?</a:t>
             </a:r>
           </a:p>
@@ -5060,7 +5453,11 @@
             <a:pPr marL="0" indent="0">
               <a:buNone/>
             </a:pPr>
-            <a:endParaRPr lang="en-US" dirty="0"/>
+            <a:endParaRPr lang="en-US" dirty="0">
+              <a:latin typeface="CMU Serif Roman" panose="02000603000000000000" pitchFamily="2" charset="0"/>
+              <a:ea typeface="CMU Serif Roman" panose="02000603000000000000" pitchFamily="2" charset="0"/>
+              <a:cs typeface="CMU Serif Roman" panose="02000603000000000000" pitchFamily="2" charset="0"/>
+            </a:endParaRPr>
           </a:p>
           <a:p>
             <a:pPr marL="0" indent="0">
@@ -5069,21 +5466,33 @@
             <a:r>
               <a:rPr lang="en-US" b="1" dirty="0">
                 <a:solidFill>
-                  <a:srgbClr val="7030A0"/>
+                  <a:srgbClr val="1B55EB"/>
                 </a:solidFill>
-                <a:ea typeface="+mn-lt"/>
-                <a:cs typeface="+mn-lt"/>
+                <a:latin typeface="CMU SERIF ROMAN" panose="02000603000000000000" pitchFamily="2" charset="0"/>
+                <a:ea typeface="CMU SERIF ROMAN" panose="02000603000000000000" pitchFamily="2" charset="0"/>
+                <a:cs typeface="CMU SERIF ROMAN" panose="02000603000000000000" pitchFamily="2" charset="0"/>
               </a:rPr>
               <a:t>general-purpose AI model</a:t>
             </a:r>
             <a:r>
               <a:rPr lang="en-US" dirty="0">
-                <a:ea typeface="+mn-lt"/>
-                <a:cs typeface="+mn-lt"/>
-              </a:rPr>
-              <a:t> ... an AI model … trained with a large amount of data using self-supervision at scale, that displays significant generality and is capable of competently performing a wide range of distinct tasks ... that can be integrated into a variety of downstream systems or applications ...</a:t>
-            </a:r>
-            <a:endParaRPr lang="en-US" dirty="0"/>
+                <a:solidFill>
+                  <a:srgbClr val="1B55EB"/>
+                </a:solidFill>
+                <a:latin typeface="CMU Serif Roman" panose="02000603000000000000" pitchFamily="2" charset="0"/>
+                <a:ea typeface="CMU Serif Roman" panose="02000603000000000000" pitchFamily="2" charset="0"/>
+                <a:cs typeface="CMU Serif Roman" panose="02000603000000000000" pitchFamily="2" charset="0"/>
+              </a:rPr>
+              <a:t> </a:t>
+            </a:r>
+            <a:r>
+              <a:rPr lang="en-US" dirty="0">
+                <a:latin typeface="CMU Serif Roman" panose="02000603000000000000" pitchFamily="2" charset="0"/>
+                <a:ea typeface="CMU Serif Roman" panose="02000603000000000000" pitchFamily="2" charset="0"/>
+                <a:cs typeface="CMU Serif Roman" panose="02000603000000000000" pitchFamily="2" charset="0"/>
+              </a:rPr>
+              <a:t>... an AI model … trained with a large amount of data using self-supervision at scale, that displays significant generality and is capable of competently performing a wide range of distinct tasks ... that can be integrated into a variety of downstream systems or applications ...</a:t>
+            </a:r>
           </a:p>
         </p:txBody>
       </p:sp>
@@ -5100,7 +5509,7 @@
 </p:sld>
 </file>
 
-<file path=ppt/slides/slide13.xml><?xml version="1.0" encoding="utf-8"?>
+<file path=ppt/slides/slide14.xml><?xml version="1.0" encoding="utf-8"?>
 <p:sld xmlns:a="http://schemas.openxmlformats.org/drawingml/2006/main" xmlns:r="http://schemas.openxmlformats.org/officeDocument/2006/relationships" xmlns:p="http://schemas.openxmlformats.org/presentationml/2006/main">
   <p:cSld>
     <p:spTree>
@@ -5145,7 +5554,11 @@
           <a:lstStyle/>
           <a:p>
             <a:r>
-              <a:rPr lang="en-US" dirty="0"/>
+              <a:rPr lang="en-US" dirty="0">
+                <a:latin typeface="CMU Serif Roman" panose="02000603000000000000" pitchFamily="2" charset="0"/>
+                <a:ea typeface="CMU Serif Roman" panose="02000603000000000000" pitchFamily="2" charset="0"/>
+                <a:cs typeface="CMU Serif Roman" panose="02000603000000000000" pitchFamily="2" charset="0"/>
+              </a:rPr>
               <a:t>EU AI Act </a:t>
             </a:r>
             <a:r>
@@ -5155,6 +5568,9 @@
                     <a:lumMod val="50000"/>
                   </a:schemeClr>
                 </a:solidFill>
+                <a:latin typeface="CMU SERIF ROMAN" panose="02000603000000000000" pitchFamily="2" charset="0"/>
+                <a:ea typeface="CMU SERIF ROMAN" panose="02000603000000000000" pitchFamily="2" charset="0"/>
+                <a:cs typeface="CMU SERIF ROMAN" panose="02000603000000000000" pitchFamily="2" charset="0"/>
               </a:rPr>
               <a:t>(</a:t>
             </a:r>
@@ -5165,6 +5581,9 @@
                     <a:lumMod val="50000"/>
                   </a:schemeClr>
                 </a:solidFill>
+                <a:latin typeface="CMU SERIF ROMAN" panose="02000603000000000000" pitchFamily="2" charset="0"/>
+                <a:ea typeface="CMU SERIF ROMAN" panose="02000603000000000000" pitchFamily="2" charset="0"/>
+                <a:cs typeface="CMU SERIF ROMAN" panose="02000603000000000000" pitchFamily="2" charset="0"/>
               </a:rPr>
               <a:t>August 2024</a:t>
             </a:r>
@@ -5175,10 +5594,17 @@
                     <a:lumMod val="50000"/>
                   </a:schemeClr>
                 </a:solidFill>
+                <a:latin typeface="CMU SERIF ROMAN" panose="02000603000000000000" pitchFamily="2" charset="0"/>
+                <a:ea typeface="CMU SERIF ROMAN" panose="02000603000000000000" pitchFamily="2" charset="0"/>
+                <a:cs typeface="CMU SERIF ROMAN" panose="02000603000000000000" pitchFamily="2" charset="0"/>
               </a:rPr>
               <a:t>)</a:t>
             </a:r>
-            <a:endParaRPr lang="en-US" dirty="0"/>
+            <a:endParaRPr lang="en-US" dirty="0">
+              <a:latin typeface="CMU Serif Roman" panose="02000603000000000000" pitchFamily="2" charset="0"/>
+              <a:ea typeface="CMU Serif Roman" panose="02000603000000000000" pitchFamily="2" charset="0"/>
+              <a:cs typeface="CMU Serif Roman" panose="02000603000000000000" pitchFamily="2" charset="0"/>
+            </a:endParaRPr>
           </a:p>
         </p:txBody>
       </p:sp>
@@ -5209,7 +5635,11 @@
               <a:buNone/>
             </a:pPr>
             <a:r>
-              <a:rPr lang="en-US" dirty="0"/>
+              <a:rPr lang="en-US" dirty="0">
+                <a:latin typeface="CMU Serif Roman" panose="02000603000000000000" pitchFamily="2" charset="0"/>
+                <a:ea typeface="CMU Serif Roman" panose="02000603000000000000" pitchFamily="2" charset="0"/>
+                <a:cs typeface="CMU Serif Roman" panose="02000603000000000000" pitchFamily="2" charset="0"/>
+              </a:rPr>
               <a:t>How does the AI Act define things...?</a:t>
             </a:r>
           </a:p>
@@ -5217,7 +5647,11 @@
             <a:pPr marL="0" indent="0">
               <a:buNone/>
             </a:pPr>
-            <a:endParaRPr lang="en-US" dirty="0"/>
+            <a:endParaRPr lang="en-US" dirty="0">
+              <a:latin typeface="CMU Serif Roman" panose="02000603000000000000" pitchFamily="2" charset="0"/>
+              <a:ea typeface="CMU Serif Roman" panose="02000603000000000000" pitchFamily="2" charset="0"/>
+              <a:cs typeface="CMU Serif Roman" panose="02000603000000000000" pitchFamily="2" charset="0"/>
+            </a:endParaRPr>
           </a:p>
           <a:p>
             <a:pPr marL="0" indent="0">
@@ -5226,123 +5660,180 @@
             <a:r>
               <a:rPr lang="en-US" b="1" dirty="0">
                 <a:solidFill>
-                  <a:srgbClr val="7030A0"/>
+                  <a:srgbClr val="1B55EB"/>
                 </a:solidFill>
-                <a:ea typeface="+mn-lt"/>
-                <a:cs typeface="+mn-lt"/>
+                <a:latin typeface="CMU SERIF ROMAN" panose="02000603000000000000" pitchFamily="2" charset="0"/>
+                <a:ea typeface="CMU SERIF ROMAN" panose="02000603000000000000" pitchFamily="2" charset="0"/>
+                <a:cs typeface="CMU SERIF ROMAN" panose="02000603000000000000" pitchFamily="2" charset="0"/>
               </a:rPr>
               <a:t>general-purpose AI model</a:t>
             </a:r>
             <a:r>
               <a:rPr lang="en-US" dirty="0">
-                <a:ea typeface="+mn-lt"/>
-                <a:cs typeface="+mn-lt"/>
-              </a:rPr>
-              <a:t> ... an </a:t>
+                <a:solidFill>
+                  <a:srgbClr val="1B55EB"/>
+                </a:solidFill>
+                <a:latin typeface="CMU Serif Roman" panose="02000603000000000000" pitchFamily="2" charset="0"/>
+                <a:ea typeface="CMU Serif Roman" panose="02000603000000000000" pitchFamily="2" charset="0"/>
+                <a:cs typeface="CMU Serif Roman" panose="02000603000000000000" pitchFamily="2" charset="0"/>
+              </a:rPr>
+              <a:t> </a:t>
+            </a:r>
+            <a:r>
+              <a:rPr lang="en-US" dirty="0">
+                <a:latin typeface="CMU Serif Roman" panose="02000603000000000000" pitchFamily="2" charset="0"/>
+                <a:ea typeface="CMU Serif Roman" panose="02000603000000000000" pitchFamily="2" charset="0"/>
+                <a:cs typeface="CMU Serif Roman" panose="02000603000000000000" pitchFamily="2" charset="0"/>
+              </a:rPr>
+              <a:t>... an </a:t>
             </a:r>
             <a:r>
               <a:rPr lang="en-US" i="1" dirty="0">
                 <a:solidFill>
-                  <a:srgbClr val="7030A0"/>
+                  <a:srgbClr val="1B55EB"/>
                 </a:solidFill>
-                <a:ea typeface="+mn-lt"/>
-                <a:cs typeface="+mn-lt"/>
+                <a:latin typeface="CMU SERIF ROMAN" panose="02000603000000000000" pitchFamily="2" charset="0"/>
+                <a:ea typeface="CMU SERIF ROMAN" panose="02000603000000000000" pitchFamily="2" charset="0"/>
+                <a:cs typeface="CMU SERIF ROMAN" panose="02000603000000000000" pitchFamily="2" charset="0"/>
               </a:rPr>
               <a:t>AI model</a:t>
             </a:r>
             <a:r>
               <a:rPr lang="en-US" dirty="0">
-                <a:ea typeface="+mn-lt"/>
-                <a:cs typeface="+mn-lt"/>
-              </a:rPr>
-              <a:t> … trained with a </a:t>
+                <a:solidFill>
+                  <a:srgbClr val="1B55EB"/>
+                </a:solidFill>
+                <a:latin typeface="CMU Serif Roman" panose="02000603000000000000" pitchFamily="2" charset="0"/>
+                <a:ea typeface="CMU Serif Roman" panose="02000603000000000000" pitchFamily="2" charset="0"/>
+                <a:cs typeface="CMU Serif Roman" panose="02000603000000000000" pitchFamily="2" charset="0"/>
+              </a:rPr>
+              <a:t> </a:t>
+            </a:r>
+            <a:r>
+              <a:rPr lang="en-US" dirty="0">
+                <a:latin typeface="CMU Serif Roman" panose="02000603000000000000" pitchFamily="2" charset="0"/>
+                <a:ea typeface="CMU Serif Roman" panose="02000603000000000000" pitchFamily="2" charset="0"/>
+                <a:cs typeface="CMU Serif Roman" panose="02000603000000000000" pitchFamily="2" charset="0"/>
+              </a:rPr>
+              <a:t>… trained with a </a:t>
             </a:r>
             <a:r>
               <a:rPr lang="en-US" i="1" dirty="0">
                 <a:solidFill>
-                  <a:srgbClr val="7030A0"/>
+                  <a:srgbClr val="1B55EB"/>
                 </a:solidFill>
-                <a:ea typeface="+mn-lt"/>
-                <a:cs typeface="+mn-lt"/>
+                <a:latin typeface="CMU SERIF ROMAN" panose="02000603000000000000" pitchFamily="2" charset="0"/>
+                <a:ea typeface="CMU SERIF ROMAN" panose="02000603000000000000" pitchFamily="2" charset="0"/>
+                <a:cs typeface="CMU SERIF ROMAN" panose="02000603000000000000" pitchFamily="2" charset="0"/>
               </a:rPr>
               <a:t>large amount of data</a:t>
             </a:r>
             <a:r>
               <a:rPr lang="en-US" dirty="0">
-                <a:ea typeface="+mn-lt"/>
-                <a:cs typeface="+mn-lt"/>
-              </a:rPr>
-              <a:t> using </a:t>
+                <a:solidFill>
+                  <a:srgbClr val="1B55EB"/>
+                </a:solidFill>
+                <a:latin typeface="CMU Serif Roman" panose="02000603000000000000" pitchFamily="2" charset="0"/>
+                <a:ea typeface="CMU Serif Roman" panose="02000603000000000000" pitchFamily="2" charset="0"/>
+                <a:cs typeface="CMU Serif Roman" panose="02000603000000000000" pitchFamily="2" charset="0"/>
+              </a:rPr>
+              <a:t> </a:t>
+            </a:r>
+            <a:r>
+              <a:rPr lang="en-US" dirty="0">
+                <a:latin typeface="CMU Serif Roman" panose="02000603000000000000" pitchFamily="2" charset="0"/>
+                <a:ea typeface="CMU Serif Roman" panose="02000603000000000000" pitchFamily="2" charset="0"/>
+                <a:cs typeface="CMU Serif Roman" panose="02000603000000000000" pitchFamily="2" charset="0"/>
+              </a:rPr>
+              <a:t>using </a:t>
             </a:r>
             <a:r>
               <a:rPr lang="en-US" i="1" dirty="0">
                 <a:solidFill>
-                  <a:srgbClr val="7030A0"/>
+                  <a:srgbClr val="1B55EB"/>
                 </a:solidFill>
-                <a:ea typeface="+mn-lt"/>
-                <a:cs typeface="+mn-lt"/>
+                <a:latin typeface="CMU SERIF ROMAN" panose="02000603000000000000" pitchFamily="2" charset="0"/>
+                <a:ea typeface="CMU SERIF ROMAN" panose="02000603000000000000" pitchFamily="2" charset="0"/>
+                <a:cs typeface="CMU SERIF ROMAN" panose="02000603000000000000" pitchFamily="2" charset="0"/>
               </a:rPr>
               <a:t>self-supervision</a:t>
             </a:r>
             <a:r>
               <a:rPr lang="en-US" dirty="0">
-                <a:ea typeface="+mn-lt"/>
-                <a:cs typeface="+mn-lt"/>
-              </a:rPr>
-              <a:t> at </a:t>
+                <a:solidFill>
+                  <a:srgbClr val="1B55EB"/>
+                </a:solidFill>
+                <a:latin typeface="CMU Serif Roman" panose="02000603000000000000" pitchFamily="2" charset="0"/>
+                <a:ea typeface="CMU Serif Roman" panose="02000603000000000000" pitchFamily="2" charset="0"/>
+                <a:cs typeface="CMU Serif Roman" panose="02000603000000000000" pitchFamily="2" charset="0"/>
+              </a:rPr>
+              <a:t> </a:t>
+            </a:r>
+            <a:r>
+              <a:rPr lang="en-US" dirty="0">
+                <a:latin typeface="CMU Serif Roman" panose="02000603000000000000" pitchFamily="2" charset="0"/>
+                <a:ea typeface="CMU Serif Roman" panose="02000603000000000000" pitchFamily="2" charset="0"/>
+                <a:cs typeface="CMU Serif Roman" panose="02000603000000000000" pitchFamily="2" charset="0"/>
+              </a:rPr>
+              <a:t>at </a:t>
             </a:r>
             <a:r>
               <a:rPr lang="en-US" i="1" dirty="0">
                 <a:solidFill>
-                  <a:srgbClr val="7030A0"/>
+                  <a:srgbClr val="1B55EB"/>
                 </a:solidFill>
-                <a:ea typeface="+mn-lt"/>
-                <a:cs typeface="+mn-lt"/>
+                <a:latin typeface="CMU SERIF ROMAN" panose="02000603000000000000" pitchFamily="2" charset="0"/>
+                <a:ea typeface="CMU SERIF ROMAN" panose="02000603000000000000" pitchFamily="2" charset="0"/>
+                <a:cs typeface="CMU SERIF ROMAN" panose="02000603000000000000" pitchFamily="2" charset="0"/>
               </a:rPr>
               <a:t>scale</a:t>
             </a:r>
             <a:r>
               <a:rPr lang="en-US" dirty="0">
-                <a:ea typeface="+mn-lt"/>
-                <a:cs typeface="+mn-lt"/>
+                <a:latin typeface="CMU Serif Roman" panose="02000603000000000000" pitchFamily="2" charset="0"/>
+                <a:ea typeface="CMU Serif Roman" panose="02000603000000000000" pitchFamily="2" charset="0"/>
+                <a:cs typeface="CMU Serif Roman" panose="02000603000000000000" pitchFamily="2" charset="0"/>
               </a:rPr>
               <a:t>, that displays significant </a:t>
             </a:r>
             <a:r>
               <a:rPr lang="en-US" i="1" dirty="0">
                 <a:solidFill>
-                  <a:srgbClr val="7030A0"/>
+                  <a:srgbClr val="1B55EB"/>
                 </a:solidFill>
-                <a:ea typeface="+mn-lt"/>
-                <a:cs typeface="+mn-lt"/>
+                <a:latin typeface="CMU SERIF ROMAN" panose="02000603000000000000" pitchFamily="2" charset="0"/>
+                <a:ea typeface="CMU SERIF ROMAN" panose="02000603000000000000" pitchFamily="2" charset="0"/>
+                <a:cs typeface="CMU SERIF ROMAN" panose="02000603000000000000" pitchFamily="2" charset="0"/>
               </a:rPr>
               <a:t>generality </a:t>
             </a:r>
             <a:r>
               <a:rPr lang="en-US" dirty="0">
-                <a:ea typeface="+mn-lt"/>
-                <a:cs typeface="+mn-lt"/>
+                <a:latin typeface="CMU Serif Roman" panose="02000603000000000000" pitchFamily="2" charset="0"/>
+                <a:ea typeface="CMU Serif Roman" panose="02000603000000000000" pitchFamily="2" charset="0"/>
+                <a:cs typeface="CMU Serif Roman" panose="02000603000000000000" pitchFamily="2" charset="0"/>
               </a:rPr>
               <a:t>and is capable of competently performing a wide range of distinct tasks ... that can be integrated into a variety of </a:t>
             </a:r>
             <a:r>
               <a:rPr lang="en-US" i="1" dirty="0">
                 <a:solidFill>
-                  <a:srgbClr val="7030A0"/>
+                  <a:srgbClr val="1B55EB"/>
                 </a:solidFill>
-                <a:ea typeface="+mn-lt"/>
-                <a:cs typeface="+mn-lt"/>
+                <a:latin typeface="CMU SERIF ROMAN" panose="02000603000000000000" pitchFamily="2" charset="0"/>
+                <a:ea typeface="CMU SERIF ROMAN" panose="02000603000000000000" pitchFamily="2" charset="0"/>
+                <a:cs typeface="CMU SERIF ROMAN" panose="02000603000000000000" pitchFamily="2" charset="0"/>
               </a:rPr>
               <a:t>downstream systems or applications</a:t>
             </a:r>
             <a:r>
               <a:rPr lang="en-US" dirty="0">
-                <a:ea typeface="+mn-lt"/>
-                <a:cs typeface="+mn-lt"/>
+                <a:latin typeface="CMU Serif Roman" panose="02000603000000000000" pitchFamily="2" charset="0"/>
+                <a:ea typeface="CMU Serif Roman" panose="02000603000000000000" pitchFamily="2" charset="0"/>
+                <a:cs typeface="CMU Serif Roman" panose="02000603000000000000" pitchFamily="2" charset="0"/>
               </a:rPr>
               <a:t> ...</a:t>
             </a:r>
-            <a:endParaRPr lang="en-US" dirty="0"/>
           </a:p>
         </p:txBody>
       </p:sp>
@@ -5359,7 +5850,7 @@
 </p:sld>
 </file>
 
-<file path=ppt/slides/slide14.xml><?xml version="1.0" encoding="utf-8"?>
+<file path=ppt/slides/slide15.xml><?xml version="1.0" encoding="utf-8"?>
 <p:sld xmlns:a="http://schemas.openxmlformats.org/drawingml/2006/main" xmlns:r="http://schemas.openxmlformats.org/officeDocument/2006/relationships" xmlns:p="http://schemas.openxmlformats.org/presentationml/2006/main">
   <p:cSld>
     <p:spTree>
@@ -5404,7 +5895,11 @@
           <a:lstStyle/>
           <a:p>
             <a:r>
-              <a:rPr lang="en-US" dirty="0"/>
+              <a:rPr lang="en-US" dirty="0">
+                <a:latin typeface="CMU Serif Roman" panose="02000603000000000000" pitchFamily="2" charset="0"/>
+                <a:ea typeface="CMU Serif Roman" panose="02000603000000000000" pitchFamily="2" charset="0"/>
+                <a:cs typeface="CMU Serif Roman" panose="02000603000000000000" pitchFamily="2" charset="0"/>
+              </a:rPr>
               <a:t>General Purpose AI Model</a:t>
             </a:r>
           </a:p>
@@ -5435,18 +5930,19 @@
           <a:p>
             <a:r>
               <a:rPr lang="en-US" dirty="0">
-                <a:ea typeface="+mn-lt"/>
-                <a:cs typeface="+mn-lt"/>
+                <a:latin typeface="CMU Serif Roman" panose="02000603000000000000" pitchFamily="2" charset="0"/>
+                <a:ea typeface="CMU Serif Roman" panose="02000603000000000000" pitchFamily="2" charset="0"/>
+                <a:cs typeface="CMU Serif Roman" panose="02000603000000000000" pitchFamily="2" charset="0"/>
               </a:rPr>
               <a:t>The number of parameters of the model;</a:t>
             </a:r>
-            <a:endParaRPr lang="en-US" dirty="0"/>
           </a:p>
           <a:p>
             <a:r>
               <a:rPr lang="en-US" dirty="0">
-                <a:ea typeface="+mn-lt"/>
-                <a:cs typeface="+mn-lt"/>
+                <a:latin typeface="CMU Serif Roman" panose="02000603000000000000" pitchFamily="2" charset="0"/>
+                <a:ea typeface="CMU Serif Roman" panose="02000603000000000000" pitchFamily="2" charset="0"/>
+                <a:cs typeface="CMU Serif Roman" panose="02000603000000000000" pitchFamily="2" charset="0"/>
               </a:rPr>
               <a:t>The quality or size of the data set, for example measured through tokens;</a:t>
             </a:r>
@@ -5454,8 +5950,9 @@
           <a:p>
             <a:r>
               <a:rPr lang="en-US" dirty="0">
-                <a:ea typeface="+mn-lt"/>
-                <a:cs typeface="+mn-lt"/>
+                <a:latin typeface="CMU Serif Roman" panose="02000603000000000000" pitchFamily="2" charset="0"/>
+                <a:ea typeface="CMU Serif Roman" panose="02000603000000000000" pitchFamily="2" charset="0"/>
+                <a:cs typeface="CMU Serif Roman" panose="02000603000000000000" pitchFamily="2" charset="0"/>
               </a:rPr>
               <a:t>The amount of computation used for training the model, measured in:</a:t>
             </a:r>
@@ -5467,8 +5964,9 @@
             </a:pPr>
             <a:r>
               <a:rPr lang="en-US" dirty="0">
-                <a:ea typeface="+mn-lt"/>
-                <a:cs typeface="+mn-lt"/>
+                <a:latin typeface="CMU Serif Roman" panose="02000603000000000000" pitchFamily="2" charset="0"/>
+                <a:ea typeface="CMU Serif Roman" panose="02000603000000000000" pitchFamily="2" charset="0"/>
+                <a:cs typeface="CMU Serif Roman" panose="02000603000000000000" pitchFamily="2" charset="0"/>
               </a:rPr>
               <a:t>Floating point ops</a:t>
             </a:r>
@@ -5480,8 +5978,9 @@
             </a:pPr>
             <a:r>
               <a:rPr lang="en-US" dirty="0">
-                <a:ea typeface="+mn-lt"/>
-                <a:cs typeface="+mn-lt"/>
+                <a:latin typeface="CMU Serif Roman" panose="02000603000000000000" pitchFamily="2" charset="0"/>
+                <a:ea typeface="CMU Serif Roman" panose="02000603000000000000" pitchFamily="2" charset="0"/>
+                <a:cs typeface="CMU Serif Roman" panose="02000603000000000000" pitchFamily="2" charset="0"/>
               </a:rPr>
               <a:t>Cost of training</a:t>
             </a:r>
@@ -5493,8 +5992,9 @@
             </a:pPr>
             <a:r>
               <a:rPr lang="en-US" dirty="0">
-                <a:ea typeface="+mn-lt"/>
-                <a:cs typeface="+mn-lt"/>
+                <a:latin typeface="CMU Serif Roman" panose="02000603000000000000" pitchFamily="2" charset="0"/>
+                <a:ea typeface="CMU Serif Roman" panose="02000603000000000000" pitchFamily="2" charset="0"/>
+                <a:cs typeface="CMU Serif Roman" panose="02000603000000000000" pitchFamily="2" charset="0"/>
               </a:rPr>
               <a:t>Training time</a:t>
             </a:r>
@@ -5506,8 +6006,9 @@
             </a:pPr>
             <a:r>
               <a:rPr lang="en-US" dirty="0">
-                <a:ea typeface="+mn-lt"/>
-                <a:cs typeface="+mn-lt"/>
+                <a:latin typeface="CMU Serif Roman" panose="02000603000000000000" pitchFamily="2" charset="0"/>
+                <a:ea typeface="CMU Serif Roman" panose="02000603000000000000" pitchFamily="2" charset="0"/>
+                <a:cs typeface="CMU Serif Roman" panose="02000603000000000000" pitchFamily="2" charset="0"/>
               </a:rPr>
               <a:t>Energy consumption</a:t>
             </a:r>
@@ -5517,8 +6018,9 @@
               <a:buNone/>
             </a:pPr>
             <a:endParaRPr lang="en-US" dirty="0">
-              <a:ea typeface="+mn-lt"/>
-              <a:cs typeface="+mn-lt"/>
+              <a:latin typeface="CMU Serif Roman" panose="02000603000000000000" pitchFamily="2" charset="0"/>
+              <a:ea typeface="CMU Serif Roman" panose="02000603000000000000" pitchFamily="2" charset="0"/>
+              <a:cs typeface="CMU Serif Roman" panose="02000603000000000000" pitchFamily="2" charset="0"/>
             </a:endParaRPr>
           </a:p>
         </p:txBody>
@@ -5840,7 +6342,7 @@
 </p:sld>
 </file>
 
-<file path=ppt/slides/slide15.xml><?xml version="1.0" encoding="utf-8"?>
+<file path=ppt/slides/slide16.xml><?xml version="1.0" encoding="utf-8"?>
 <p:sld xmlns:a="http://schemas.openxmlformats.org/drawingml/2006/main" xmlns:r="http://schemas.openxmlformats.org/officeDocument/2006/relationships" xmlns:p="http://schemas.openxmlformats.org/presentationml/2006/main">
   <p:cSld>
     <p:spTree>
@@ -5885,7 +6387,11 @@
           <a:lstStyle/>
           <a:p>
             <a:r>
-              <a:rPr lang="en-US" dirty="0"/>
+              <a:rPr lang="en-US" dirty="0">
+                <a:latin typeface="CMU Serif Roman" panose="02000603000000000000" pitchFamily="2" charset="0"/>
+                <a:ea typeface="CMU Serif Roman" panose="02000603000000000000" pitchFamily="2" charset="0"/>
+                <a:cs typeface="CMU Serif Roman" panose="02000603000000000000" pitchFamily="2" charset="0"/>
+              </a:rPr>
               <a:t>General Purpose AI Model</a:t>
             </a:r>
           </a:p>
@@ -5916,17 +6422,19 @@
           <a:p>
             <a:r>
               <a:rPr lang="en-US" dirty="0">
-                <a:ea typeface="+mn-lt"/>
-                <a:cs typeface="+mn-lt"/>
-              </a:rPr>
-              <a:t>The input and output modalities of the model, such as text to text(large language models)</a:t>
+                <a:latin typeface="CMU Serif Roman" panose="02000603000000000000" pitchFamily="2" charset="0"/>
+                <a:ea typeface="CMU Serif Roman" panose="02000603000000000000" pitchFamily="2" charset="0"/>
+                <a:cs typeface="CMU Serif Roman" panose="02000603000000000000" pitchFamily="2" charset="0"/>
+              </a:rPr>
+              <a:t>The input and output modalities of the model, such as text to text (large language models)</a:t>
             </a:r>
           </a:p>
           <a:p>
             <a:r>
               <a:rPr lang="en-US" dirty="0">
-                <a:ea typeface="+mn-lt"/>
-                <a:cs typeface="+mn-lt"/>
+                <a:latin typeface="CMU Serif Roman" panose="02000603000000000000" pitchFamily="2" charset="0"/>
+                <a:ea typeface="CMU Serif Roman" panose="02000603000000000000" pitchFamily="2" charset="0"/>
+                <a:cs typeface="CMU Serif Roman" panose="02000603000000000000" pitchFamily="2" charset="0"/>
               </a:rPr>
               <a:t>Impact:</a:t>
             </a:r>
@@ -5938,8 +6446,9 @@
             </a:pPr>
             <a:r>
               <a:rPr lang="en-US" dirty="0">
-                <a:ea typeface="+mn-lt"/>
-                <a:cs typeface="+mn-lt"/>
+                <a:latin typeface="CMU Serif Roman" panose="02000603000000000000" pitchFamily="2" charset="0"/>
+                <a:ea typeface="CMU Serif Roman" panose="02000603000000000000" pitchFamily="2" charset="0"/>
+                <a:cs typeface="CMU Serif Roman" panose="02000603000000000000" pitchFamily="2" charset="0"/>
               </a:rPr>
               <a:t>Business users</a:t>
             </a:r>
@@ -5951,8 +6460,9 @@
             </a:pPr>
             <a:r>
               <a:rPr lang="en-US" dirty="0">
-                <a:ea typeface="+mn-lt"/>
-                <a:cs typeface="+mn-lt"/>
+                <a:latin typeface="CMU Serif Roman" panose="02000603000000000000" pitchFamily="2" charset="0"/>
+                <a:ea typeface="CMU Serif Roman" panose="02000603000000000000" pitchFamily="2" charset="0"/>
+                <a:cs typeface="CMU Serif Roman" panose="02000603000000000000" pitchFamily="2" charset="0"/>
               </a:rPr>
               <a:t>Registered end-users</a:t>
             </a:r>
@@ -5960,8 +6470,9 @@
           <a:p>
             <a:r>
               <a:rPr lang="en-US" dirty="0">
-                <a:ea typeface="+mn-lt"/>
-                <a:cs typeface="+mn-lt"/>
+                <a:latin typeface="CMU Serif Roman" panose="02000603000000000000" pitchFamily="2" charset="0"/>
+                <a:ea typeface="CMU Serif Roman" panose="02000603000000000000" pitchFamily="2" charset="0"/>
+                <a:cs typeface="CMU Serif Roman" panose="02000603000000000000" pitchFamily="2" charset="0"/>
               </a:rPr>
               <a:t>The benchmarks and evaluations of capabilities of the model</a:t>
             </a:r>
@@ -5973,8 +6484,9 @@
             </a:pPr>
             <a:r>
               <a:rPr lang="en-US" dirty="0">
-                <a:ea typeface="+mn-lt"/>
-                <a:cs typeface="+mn-lt"/>
+                <a:latin typeface="CMU Serif Roman" panose="02000603000000000000" pitchFamily="2" charset="0"/>
+                <a:ea typeface="CMU Serif Roman" panose="02000603000000000000" pitchFamily="2" charset="0"/>
+                <a:cs typeface="CMU Serif Roman" panose="02000603000000000000" pitchFamily="2" charset="0"/>
               </a:rPr>
               <a:t>Tasks without additional training</a:t>
             </a:r>
@@ -5986,8 +6498,9 @@
             </a:pPr>
             <a:r>
               <a:rPr lang="en-US" dirty="0">
-                <a:ea typeface="+mn-lt"/>
-                <a:cs typeface="+mn-lt"/>
+                <a:latin typeface="CMU Serif Roman" panose="02000603000000000000" pitchFamily="2" charset="0"/>
+                <a:ea typeface="CMU Serif Roman" panose="02000603000000000000" pitchFamily="2" charset="0"/>
+                <a:cs typeface="CMU Serif Roman" panose="02000603000000000000" pitchFamily="2" charset="0"/>
               </a:rPr>
               <a:t>Adaptability to distinct tasks</a:t>
             </a:r>
@@ -5999,8 +6512,9 @@
             </a:pPr>
             <a:r>
               <a:rPr lang="en-US" dirty="0">
-                <a:ea typeface="+mn-lt"/>
-                <a:cs typeface="+mn-lt"/>
+                <a:latin typeface="CMU Serif Roman" panose="02000603000000000000" pitchFamily="2" charset="0"/>
+                <a:ea typeface="CMU Serif Roman" panose="02000603000000000000" pitchFamily="2" charset="0"/>
+                <a:cs typeface="CMU Serif Roman" panose="02000603000000000000" pitchFamily="2" charset="0"/>
               </a:rPr>
               <a:t>Autonomy and scalability</a:t>
             </a:r>
@@ -6012,20 +6526,26 @@
             </a:pPr>
             <a:r>
               <a:rPr lang="en-US" dirty="0">
-                <a:ea typeface="+mn-lt"/>
-                <a:cs typeface="+mn-lt"/>
+                <a:latin typeface="CMU Serif Roman" panose="02000603000000000000" pitchFamily="2" charset="0"/>
+                <a:ea typeface="CMU Serif Roman" panose="02000603000000000000" pitchFamily="2" charset="0"/>
+                <a:cs typeface="CMU Serif Roman" panose="02000603000000000000" pitchFamily="2" charset="0"/>
               </a:rPr>
               <a:t>Tool access</a:t>
             </a:r>
-            <a:endParaRPr lang="en-US" sz="2800" dirty="0"/>
+            <a:endParaRPr lang="en-US" sz="2800" dirty="0">
+              <a:latin typeface="CMU Serif Roman" panose="02000603000000000000" pitchFamily="2" charset="0"/>
+              <a:ea typeface="CMU Serif Roman" panose="02000603000000000000" pitchFamily="2" charset="0"/>
+              <a:cs typeface="CMU Serif Roman" panose="02000603000000000000" pitchFamily="2" charset="0"/>
+            </a:endParaRPr>
           </a:p>
           <a:p>
             <a:pPr marL="0" indent="0">
               <a:buNone/>
             </a:pPr>
             <a:endParaRPr lang="en-US" dirty="0">
-              <a:ea typeface="+mn-lt"/>
-              <a:cs typeface="+mn-lt"/>
+              <a:latin typeface="CMU Serif Roman" panose="02000603000000000000" pitchFamily="2" charset="0"/>
+              <a:ea typeface="CMU Serif Roman" panose="02000603000000000000" pitchFamily="2" charset="0"/>
+              <a:cs typeface="CMU Serif Roman" panose="02000603000000000000" pitchFamily="2" charset="0"/>
             </a:endParaRPr>
           </a:p>
         </p:txBody>
@@ -6409,7 +6929,7 @@
 </p:sld>
 </file>
 
-<file path=ppt/slides/slide16.xml><?xml version="1.0" encoding="utf-8"?>
+<file path=ppt/slides/slide17.xml><?xml version="1.0" encoding="utf-8"?>
 <p:sld xmlns:a="http://schemas.openxmlformats.org/drawingml/2006/main" xmlns:r="http://schemas.openxmlformats.org/officeDocument/2006/relationships" xmlns:p="http://schemas.openxmlformats.org/presentationml/2006/main">
   <p:cSld>
     <p:spTree>
@@ -6448,7 +6968,11 @@
           <a:lstStyle/>
           <a:p>
             <a:r>
-              <a:rPr lang="en-US" dirty="0"/>
+              <a:rPr lang="en-US" dirty="0">
+                <a:latin typeface="CMU Serif Roman" panose="02000603000000000000" pitchFamily="2" charset="0"/>
+                <a:ea typeface="CMU Serif Roman" panose="02000603000000000000" pitchFamily="2" charset="0"/>
+                <a:cs typeface="CMU Serif Roman" panose="02000603000000000000" pitchFamily="2" charset="0"/>
+              </a:rPr>
               <a:t>AI Systems</a:t>
             </a:r>
           </a:p>
@@ -6481,7 +7005,11 @@
               <a:buNone/>
             </a:pPr>
             <a:r>
-              <a:rPr lang="en-US" dirty="0"/>
+              <a:rPr lang="en-US" dirty="0">
+                <a:latin typeface="CMU Serif Roman" panose="02000603000000000000" pitchFamily="2" charset="0"/>
+                <a:ea typeface="CMU Serif Roman" panose="02000603000000000000" pitchFamily="2" charset="0"/>
+                <a:cs typeface="CMU Serif Roman" panose="02000603000000000000" pitchFamily="2" charset="0"/>
+              </a:rPr>
               <a:t>There is a clear distinction between AI </a:t>
             </a:r>
             <a:r>
@@ -6489,11 +7017,18 @@
                 <a:solidFill>
                   <a:srgbClr val="7030A0"/>
                 </a:solidFill>
+                <a:latin typeface="CMU SERIF ROMAN" panose="02000603000000000000" pitchFamily="2" charset="0"/>
+                <a:ea typeface="CMU SERIF ROMAN" panose="02000603000000000000" pitchFamily="2" charset="0"/>
+                <a:cs typeface="CMU SERIF ROMAN" panose="02000603000000000000" pitchFamily="2" charset="0"/>
               </a:rPr>
               <a:t>models </a:t>
             </a:r>
             <a:r>
-              <a:rPr lang="en-US" dirty="0"/>
+              <a:rPr lang="en-US" dirty="0">
+                <a:latin typeface="CMU Serif Roman" panose="02000603000000000000" pitchFamily="2" charset="0"/>
+                <a:ea typeface="CMU Serif Roman" panose="02000603000000000000" pitchFamily="2" charset="0"/>
+                <a:cs typeface="CMU Serif Roman" panose="02000603000000000000" pitchFamily="2" charset="0"/>
+              </a:rPr>
               <a:t>and AI </a:t>
             </a:r>
             <a:r>
@@ -6501,6 +7036,9 @@
                 <a:solidFill>
                   <a:srgbClr val="7030A0"/>
                 </a:solidFill>
+                <a:latin typeface="CMU SERIF ROMAN" panose="02000603000000000000" pitchFamily="2" charset="0"/>
+                <a:ea typeface="CMU SERIF ROMAN" panose="02000603000000000000" pitchFamily="2" charset="0"/>
+                <a:cs typeface="CMU SERIF ROMAN" panose="02000603000000000000" pitchFamily="2" charset="0"/>
               </a:rPr>
               <a:t>Systems</a:t>
             </a:r>
@@ -6509,7 +7047,11 @@
             <a:pPr marL="0" indent="0">
               <a:buNone/>
             </a:pPr>
-            <a:endParaRPr lang="en-US" dirty="0"/>
+            <a:endParaRPr lang="en-US" dirty="0">
+              <a:latin typeface="CMU Serif Roman" panose="02000603000000000000" pitchFamily="2" charset="0"/>
+              <a:ea typeface="CMU Serif Roman" panose="02000603000000000000" pitchFamily="2" charset="0"/>
+              <a:cs typeface="CMU Serif Roman" panose="02000603000000000000" pitchFamily="2" charset="0"/>
+            </a:endParaRPr>
           </a:p>
           <a:p>
             <a:pPr marL="0" indent="0">
@@ -6518,27 +7060,24 @@
             <a:r>
               <a:rPr lang="en-US" i="1" dirty="0">
                 <a:solidFill>
-                  <a:srgbClr val="7030A0"/>
+                  <a:srgbClr val="1B55EB"/>
                 </a:solidFill>
-              </a:rPr>
-              <a:t>"...</a:t>
-            </a:r>
-            <a:r>
-              <a:rPr lang="en-US" i="1" dirty="0">
-                <a:solidFill>
-                  <a:srgbClr val="7030A0"/>
-                </a:solidFill>
-                <a:ea typeface="+mn-lt"/>
-                <a:cs typeface="+mn-lt"/>
-              </a:rPr>
-              <a:t>AI models require the addition of further components, such as for example a user interface, to become AI systems..."</a:t>
+                <a:latin typeface="CMU SERIF ROMAN" panose="02000603000000000000" pitchFamily="2" charset="0"/>
+                <a:ea typeface="CMU SERIF ROMAN" panose="02000603000000000000" pitchFamily="2" charset="0"/>
+                <a:cs typeface="CMU SERIF ROMAN" panose="02000603000000000000" pitchFamily="2" charset="0"/>
+              </a:rPr>
+              <a:t>"...AI models require the addition of further components, for example a user interface, to become AI systems..."</a:t>
             </a:r>
           </a:p>
           <a:p>
             <a:pPr marL="0" indent="0">
               <a:buNone/>
             </a:pPr>
-            <a:endParaRPr lang="en-US" dirty="0"/>
+            <a:endParaRPr lang="en-US" dirty="0">
+              <a:latin typeface="CMU Serif Roman" panose="02000603000000000000" pitchFamily="2" charset="0"/>
+              <a:ea typeface="CMU Serif Roman" panose="02000603000000000000" pitchFamily="2" charset="0"/>
+              <a:cs typeface="CMU Serif Roman" panose="02000603000000000000" pitchFamily="2" charset="0"/>
+            </a:endParaRPr>
           </a:p>
         </p:txBody>
       </p:sp>
@@ -6637,7 +7176,7 @@
 </p:sld>
 </file>
 
-<file path=ppt/slides/slide17.xml><?xml version="1.0" encoding="utf-8"?>
+<file path=ppt/slides/slide18.xml><?xml version="1.0" encoding="utf-8"?>
 <p:sld xmlns:a="http://schemas.openxmlformats.org/drawingml/2006/main" xmlns:r="http://schemas.openxmlformats.org/officeDocument/2006/relationships" xmlns:p="http://schemas.openxmlformats.org/presentationml/2006/main">
   <p:cSld>
     <p:spTree>
@@ -6676,7 +7215,11 @@
           <a:lstStyle/>
           <a:p>
             <a:r>
-              <a:rPr lang="en-US" dirty="0"/>
+              <a:rPr lang="en-US" dirty="0">
+                <a:latin typeface="CMU Serif Roman" panose="02000603000000000000" pitchFamily="2" charset="0"/>
+                <a:ea typeface="CMU Serif Roman" panose="02000603000000000000" pitchFamily="2" charset="0"/>
+                <a:cs typeface="CMU Serif Roman" panose="02000603000000000000" pitchFamily="2" charset="0"/>
+              </a:rPr>
               <a:t>Further reading</a:t>
             </a:r>
           </a:p>
@@ -6698,7 +7241,12 @@
             <p:ph idx="1"/>
           </p:nvPr>
         </p:nvSpPr>
-        <p:spPr/>
+        <p:spPr>
+          <a:xfrm>
+            <a:off x="838200" y="1617078"/>
+            <a:ext cx="10515600" cy="4351338"/>
+          </a:xfrm>
+        </p:spPr>
         <p:txBody>
           <a:bodyPr vert="horz" lIns="91440" tIns="45720" rIns="91440" bIns="45720" rtlCol="0" anchor="t">
             <a:normAutofit fontScale="85000" lnSpcReduction="20000"/>
@@ -6710,98 +7258,113 @@
             </a:pPr>
             <a:r>
               <a:rPr lang="en-US" dirty="0">
-                <a:ea typeface="+mn-lt"/>
-                <a:cs typeface="+mn-lt"/>
+                <a:latin typeface="CMU Serif Roman" panose="02000603000000000000" pitchFamily="2" charset="0"/>
+                <a:ea typeface="CMU Serif Roman" panose="02000603000000000000" pitchFamily="2" charset="0"/>
+                <a:cs typeface="CMU Serif Roman" panose="02000603000000000000" pitchFamily="2" charset="0"/>
               </a:rPr>
               <a:t>Raphaël </a:t>
             </a:r>
             <a:r>
-              <a:rPr lang="en-US" err="1">
-                <a:ea typeface="+mn-lt"/>
-                <a:cs typeface="+mn-lt"/>
+              <a:rPr lang="en-US" dirty="0" err="1">
+                <a:latin typeface="CMU Serif Roman" panose="02000603000000000000" pitchFamily="2" charset="0"/>
+                <a:ea typeface="CMU Serif Roman" panose="02000603000000000000" pitchFamily="2" charset="0"/>
+                <a:cs typeface="CMU Serif Roman" panose="02000603000000000000" pitchFamily="2" charset="0"/>
               </a:rPr>
               <a:t>Millière</a:t>
             </a:r>
             <a:r>
               <a:rPr lang="en-US" dirty="0">
-                <a:ea typeface="+mn-lt"/>
-                <a:cs typeface="+mn-lt"/>
-              </a:rPr>
-              <a:t> and </a:t>
-            </a:r>
-            <a:r>
-              <a:rPr lang="en-US" dirty="0"/>
-              <a:t>Charles </a:t>
-            </a:r>
-            <a:r>
-              <a:rPr lang="en-US" err="1"/>
+                <a:latin typeface="CMU Serif Roman" panose="02000603000000000000" pitchFamily="2" charset="0"/>
+                <a:ea typeface="CMU Serif Roman" panose="02000603000000000000" pitchFamily="2" charset="0"/>
+                <a:cs typeface="CMU Serif Roman" panose="02000603000000000000" pitchFamily="2" charset="0"/>
+              </a:rPr>
+              <a:t> and Charles </a:t>
+            </a:r>
+            <a:r>
+              <a:rPr lang="en-US" dirty="0" err="1">
+                <a:latin typeface="CMU Serif Roman" panose="02000603000000000000" pitchFamily="2" charset="0"/>
+                <a:ea typeface="CMU Serif Roman" panose="02000603000000000000" pitchFamily="2" charset="0"/>
+                <a:cs typeface="CMU Serif Roman" panose="02000603000000000000" pitchFamily="2" charset="0"/>
+              </a:rPr>
               <a:t>Rathkopf</a:t>
             </a:r>
             <a:r>
               <a:rPr lang="en-US" dirty="0">
-                <a:ea typeface="+mn-lt"/>
-                <a:cs typeface="+mn-lt"/>
+                <a:latin typeface="CMU Serif Roman" panose="02000603000000000000" pitchFamily="2" charset="0"/>
+                <a:ea typeface="CMU Serif Roman" panose="02000603000000000000" pitchFamily="2" charset="0"/>
+                <a:cs typeface="CMU Serif Roman" panose="02000603000000000000" pitchFamily="2" charset="0"/>
               </a:rPr>
               <a:t>, </a:t>
             </a:r>
             <a:r>
               <a:rPr lang="en-US" i="1" dirty="0">
-                <a:ea typeface="+mn-lt"/>
-                <a:cs typeface="+mn-lt"/>
+                <a:latin typeface="CMU SERIF ROMAN" panose="02000603000000000000" pitchFamily="2" charset="0"/>
+                <a:ea typeface="CMU SERIF ROMAN" panose="02000603000000000000" pitchFamily="2" charset="0"/>
+                <a:cs typeface="CMU SERIF ROMAN" panose="02000603000000000000" pitchFamily="2" charset="0"/>
               </a:rPr>
               <a:t>Anthropocentric bias and the possibility of artificial cognition</a:t>
             </a:r>
             <a:r>
               <a:rPr lang="en-US" dirty="0">
-                <a:ea typeface="+mn-lt"/>
-                <a:cs typeface="+mn-lt"/>
+                <a:latin typeface="CMU Serif Roman" panose="02000603000000000000" pitchFamily="2" charset="0"/>
+                <a:ea typeface="CMU Serif Roman" panose="02000603000000000000" pitchFamily="2" charset="0"/>
+                <a:cs typeface="CMU Serif Roman" panose="02000603000000000000" pitchFamily="2" charset="0"/>
               </a:rPr>
               <a:t>, 2024</a:t>
             </a:r>
-            <a:endParaRPr lang="en-US"/>
           </a:p>
           <a:p>
             <a:pPr marL="0" indent="0">
               <a:buNone/>
             </a:pPr>
-            <a:endParaRPr lang="en-US" dirty="0"/>
+            <a:endParaRPr lang="en-US" dirty="0">
+              <a:latin typeface="CMU Serif Roman" panose="02000603000000000000" pitchFamily="2" charset="0"/>
+              <a:ea typeface="CMU Serif Roman" panose="02000603000000000000" pitchFamily="2" charset="0"/>
+              <a:cs typeface="CMU Serif Roman" panose="02000603000000000000" pitchFamily="2" charset="0"/>
+            </a:endParaRPr>
           </a:p>
           <a:p>
             <a:pPr marL="0" indent="0">
               <a:buNone/>
             </a:pPr>
             <a:r>
-              <a:rPr lang="en-US" dirty="0"/>
+              <a:rPr lang="en-US" dirty="0">
+                <a:latin typeface="CMU Serif Roman" panose="02000603000000000000" pitchFamily="2" charset="0"/>
+                <a:ea typeface="CMU Serif Roman" panose="02000603000000000000" pitchFamily="2" charset="0"/>
+                <a:cs typeface="CMU Serif Roman" panose="02000603000000000000" pitchFamily="2" charset="0"/>
+              </a:rPr>
               <a:t>Raphaël </a:t>
             </a:r>
             <a:r>
-              <a:rPr lang="en-US" err="1"/>
+              <a:rPr lang="en-US" dirty="0" err="1">
+                <a:latin typeface="CMU Serif Roman" panose="02000603000000000000" pitchFamily="2" charset="0"/>
+                <a:ea typeface="CMU Serif Roman" panose="02000603000000000000" pitchFamily="2" charset="0"/>
+                <a:cs typeface="CMU Serif Roman" panose="02000603000000000000" pitchFamily="2" charset="0"/>
+              </a:rPr>
               <a:t>Millière</a:t>
             </a:r>
             <a:r>
-              <a:rPr lang="en-US" dirty="0"/>
-              <a:t> and </a:t>
-            </a:r>
-            <a:r>
               <a:rPr lang="en-US" dirty="0">
-                <a:ea typeface="+mn-lt"/>
-                <a:cs typeface="+mn-lt"/>
-              </a:rPr>
-              <a:t>Cameron Buckner</a:t>
-            </a:r>
-            <a:r>
-              <a:rPr lang="en-US" dirty="0"/>
-              <a:t>, </a:t>
+                <a:latin typeface="CMU Serif Roman" panose="02000603000000000000" pitchFamily="2" charset="0"/>
+                <a:ea typeface="CMU Serif Roman" panose="02000603000000000000" pitchFamily="2" charset="0"/>
+                <a:cs typeface="CMU Serif Roman" panose="02000603000000000000" pitchFamily="2" charset="0"/>
+              </a:rPr>
+              <a:t> and Cameron Buckner, </a:t>
             </a:r>
             <a:r>
               <a:rPr lang="en-US" i="1" dirty="0">
-                <a:ea typeface="+mn-lt"/>
-                <a:cs typeface="+mn-lt"/>
+                <a:latin typeface="CMU SERIF ROMAN" panose="02000603000000000000" pitchFamily="2" charset="0"/>
+                <a:ea typeface="CMU SERIF ROMAN" panose="02000603000000000000" pitchFamily="2" charset="0"/>
+                <a:cs typeface="CMU SERIF ROMAN" panose="02000603000000000000" pitchFamily="2" charset="0"/>
               </a:rPr>
               <a:t>A Philosophical Introduction to Language Models</a:t>
             </a:r>
             <a:r>
-              <a:rPr lang="en-US" dirty="0"/>
+              <a:rPr lang="en-US" dirty="0">
+                <a:latin typeface="CMU Serif Roman" panose="02000603000000000000" pitchFamily="2" charset="0"/>
+                <a:ea typeface="CMU Serif Roman" panose="02000603000000000000" pitchFamily="2" charset="0"/>
+                <a:cs typeface="CMU Serif Roman" panose="02000603000000000000" pitchFamily="2" charset="0"/>
+              </a:rPr>
               <a:t>, 2024</a:t>
             </a:r>
           </a:p>
@@ -6809,7 +7372,11 @@
             <a:pPr marL="0" indent="0">
               <a:buNone/>
             </a:pPr>
-            <a:endParaRPr lang="en-US" dirty="0"/>
+            <a:endParaRPr lang="en-US" dirty="0">
+              <a:latin typeface="CMU Serif Roman" panose="02000603000000000000" pitchFamily="2" charset="0"/>
+              <a:ea typeface="CMU Serif Roman" panose="02000603000000000000" pitchFamily="2" charset="0"/>
+              <a:cs typeface="CMU Serif Roman" panose="02000603000000000000" pitchFamily="2" charset="0"/>
+            </a:endParaRPr>
           </a:p>
           <a:p>
             <a:pPr marL="0" indent="0">
@@ -6817,25 +7384,39 @@
             </a:pPr>
             <a:r>
               <a:rPr lang="en-US" dirty="0">
-                <a:ea typeface="+mn-lt"/>
-                <a:cs typeface="+mn-lt"/>
+                <a:latin typeface="CMU Serif Roman" panose="02000603000000000000" pitchFamily="2" charset="0"/>
+                <a:ea typeface="CMU Serif Roman" panose="02000603000000000000" pitchFamily="2" charset="0"/>
+                <a:cs typeface="CMU Serif Roman" panose="02000603000000000000" pitchFamily="2" charset="0"/>
                 <a:hlinkClick r:id="rId2"/>
               </a:rPr>
               <a:t>EU AI Act Explorer</a:t>
             </a:r>
+            <a:endParaRPr lang="en-US" dirty="0">
+              <a:latin typeface="CMU Serif Roman" panose="02000603000000000000" pitchFamily="2" charset="0"/>
+              <a:ea typeface="CMU Serif Roman" panose="02000603000000000000" pitchFamily="2" charset="0"/>
+              <a:cs typeface="CMU Serif Roman" panose="02000603000000000000" pitchFamily="2" charset="0"/>
+            </a:endParaRPr>
           </a:p>
           <a:p>
             <a:pPr marL="0" indent="0">
               <a:buNone/>
             </a:pPr>
-            <a:endParaRPr lang="en-US" dirty="0"/>
+            <a:endParaRPr lang="en-US" dirty="0">
+              <a:latin typeface="CMU Serif Roman" panose="02000603000000000000" pitchFamily="2" charset="0"/>
+              <a:ea typeface="CMU Serif Roman" panose="02000603000000000000" pitchFamily="2" charset="0"/>
+              <a:cs typeface="CMU Serif Roman" panose="02000603000000000000" pitchFamily="2" charset="0"/>
+            </a:endParaRPr>
           </a:p>
           <a:p>
             <a:pPr marL="0" indent="0">
               <a:buNone/>
             </a:pPr>
             <a:r>
-              <a:rPr lang="en-US" dirty="0"/>
+              <a:rPr lang="en-US" dirty="0">
+                <a:latin typeface="CMU Serif Roman" panose="02000603000000000000" pitchFamily="2" charset="0"/>
+                <a:ea typeface="CMU Serif Roman" panose="02000603000000000000" pitchFamily="2" charset="0"/>
+                <a:cs typeface="CMU Serif Roman" panose="02000603000000000000" pitchFamily="2" charset="0"/>
+              </a:rPr>
               <a:t>ICO Information:</a:t>
             </a:r>
           </a:p>
@@ -6844,11 +7425,18 @@
               <a:buNone/>
             </a:pPr>
             <a:r>
-              <a:rPr lang="en-US"/>
+              <a:rPr lang="en-US" dirty="0">
+                <a:latin typeface="CMU Serif Roman" panose="02000603000000000000" pitchFamily="2" charset="0"/>
+                <a:ea typeface="CMU Serif Roman" panose="02000603000000000000" pitchFamily="2" charset="0"/>
+                <a:cs typeface="CMU Serif Roman" panose="02000603000000000000" pitchFamily="2" charset="0"/>
+              </a:rPr>
               <a:t> </a:t>
             </a:r>
             <a:r>
               <a:rPr lang="en-US" dirty="0">
+                <a:latin typeface="CMU Serif Roman" panose="02000603000000000000" pitchFamily="2" charset="0"/>
+                <a:ea typeface="CMU Serif Roman" panose="02000603000000000000" pitchFamily="2" charset="0"/>
+                <a:cs typeface="CMU Serif Roman" panose="02000603000000000000" pitchFamily="2" charset="0"/>
                 <a:hlinkClick r:id="rId3"/>
               </a:rPr>
               <a:t>Artificial Intelligence</a:t>
@@ -6859,11 +7447,18 @@
               <a:buNone/>
             </a:pPr>
             <a:r>
-              <a:rPr lang="en-US"/>
+              <a:rPr lang="en-US" dirty="0">
+                <a:latin typeface="CMU Serif Roman" panose="02000603000000000000" pitchFamily="2" charset="0"/>
+                <a:ea typeface="CMU Serif Roman" panose="02000603000000000000" pitchFamily="2" charset="0"/>
+                <a:cs typeface="CMU Serif Roman" panose="02000603000000000000" pitchFamily="2" charset="0"/>
+              </a:rPr>
               <a:t> </a:t>
             </a:r>
             <a:r>
               <a:rPr lang="en-US" dirty="0">
+                <a:latin typeface="CMU Serif Roman" panose="02000603000000000000" pitchFamily="2" charset="0"/>
+                <a:ea typeface="CMU Serif Roman" panose="02000603000000000000" pitchFamily="2" charset="0"/>
+                <a:cs typeface="CMU Serif Roman" panose="02000603000000000000" pitchFamily="2" charset="0"/>
                 <a:hlinkClick r:id="rId4"/>
               </a:rPr>
               <a:t>Data Protection</a:t>
@@ -6874,11 +7469,18 @@
               <a:buNone/>
             </a:pPr>
             <a:r>
-              <a:rPr lang="en-US"/>
+              <a:rPr lang="en-US" dirty="0">
+                <a:latin typeface="CMU Serif Roman" panose="02000603000000000000" pitchFamily="2" charset="0"/>
+                <a:ea typeface="CMU Serif Roman" panose="02000603000000000000" pitchFamily="2" charset="0"/>
+                <a:cs typeface="CMU Serif Roman" panose="02000603000000000000" pitchFamily="2" charset="0"/>
+              </a:rPr>
               <a:t> </a:t>
             </a:r>
             <a:r>
               <a:rPr lang="en-US" dirty="0">
+                <a:latin typeface="CMU Serif Roman" panose="02000603000000000000" pitchFamily="2" charset="0"/>
+                <a:ea typeface="CMU Serif Roman" panose="02000603000000000000" pitchFamily="2" charset="0"/>
+                <a:cs typeface="CMU Serif Roman" panose="02000603000000000000" pitchFamily="2" charset="0"/>
                 <a:hlinkClick r:id="rId5"/>
               </a:rPr>
               <a:t>Explaining Decisions</a:t>
@@ -6899,7 +7501,7 @@
 </p:sld>
 </file>
 
-<file path=ppt/slides/slide18.xml><?xml version="1.0" encoding="utf-8"?>
+<file path=ppt/slides/slide19.xml><?xml version="1.0" encoding="utf-8"?>
 <p:sld xmlns:a="http://schemas.openxmlformats.org/drawingml/2006/main" xmlns:r="http://schemas.openxmlformats.org/officeDocument/2006/relationships" xmlns:p="http://schemas.openxmlformats.org/presentationml/2006/main">
   <p:cSld>
     <p:spTree>
@@ -6907,7 +7509,7 @@
         <p:cNvPr id="1" name="">
           <a:extLst>
             <a:ext uri="{FF2B5EF4-FFF2-40B4-BE49-F238E27FC236}">
-              <a16:creationId xmlns:a16="http://schemas.microsoft.com/office/drawing/2014/main" id="{21687FD7-F408-4ADB-E02C-219317EC5E7B}"/>
+              <a16:creationId xmlns:a16="http://schemas.microsoft.com/office/drawing/2014/main" id="{1C7D1FB5-ABC3-780A-61EE-446200B352B4}"/>
             </a:ext>
           </a:extLst>
         </p:cNvPr>
@@ -6927,7 +7529,7 @@
           <p:cNvPr id="9" name="Picture 8" descr="Generated image">
             <a:extLst>
               <a:ext uri="{FF2B5EF4-FFF2-40B4-BE49-F238E27FC236}">
-                <a16:creationId xmlns:a16="http://schemas.microsoft.com/office/drawing/2014/main" id="{1A9401A4-3E59-C24C-B465-A14D4AC0E9BA}"/>
+                <a16:creationId xmlns:a16="http://schemas.microsoft.com/office/drawing/2014/main" id="{0CB9B50D-79FA-5006-D2F4-949C92358E23}"/>
               </a:ext>
             </a:extLst>
           </p:cNvPr>
@@ -6937,15 +7539,16 @@
           <p:nvPr/>
         </p:nvPicPr>
         <p:blipFill>
-          <a:blip r:embed="rId2"/>
+          <a:blip r:embed="rId3"/>
+          <a:srcRect b="10767"/>
           <a:stretch>
             <a:fillRect/>
           </a:stretch>
         </p:blipFill>
         <p:spPr>
           <a:xfrm>
-            <a:off x="3653518" y="659947"/>
-            <a:ext cx="4401911" cy="6613071"/>
+            <a:off x="3575146" y="244930"/>
+            <a:ext cx="4401911" cy="5901038"/>
           </a:xfrm>
           <a:prstGeom prst="rect">
             <a:avLst/>
@@ -6957,7 +7560,7 @@
           <p:cNvPr id="2" name="Title 1">
             <a:extLst>
               <a:ext uri="{FF2B5EF4-FFF2-40B4-BE49-F238E27FC236}">
-                <a16:creationId xmlns:a16="http://schemas.microsoft.com/office/drawing/2014/main" id="{051FD524-6505-46E4-B48E-05443451B39B}"/>
+                <a16:creationId xmlns:a16="http://schemas.microsoft.com/office/drawing/2014/main" id="{40DE041F-0CBF-88DF-92CF-25A2CE73CE9F}"/>
               </a:ext>
             </a:extLst>
           </p:cNvPr>
@@ -6974,8 +7577,12 @@
           <a:lstStyle/>
           <a:p>
             <a:r>
-              <a:rPr lang="en-US" dirty="0"/>
-              <a:t>Back to the Llama...</a:t>
+              <a:rPr lang="en-US" dirty="0">
+                <a:latin typeface="CMU Serif Roman" panose="02000603000000000000" pitchFamily="2" charset="0"/>
+                <a:ea typeface="CMU Serif Roman" panose="02000603000000000000" pitchFamily="2" charset="0"/>
+                <a:cs typeface="CMU Serif Roman" panose="02000603000000000000" pitchFamily="2" charset="0"/>
+              </a:rPr>
+              <a:t>The Llama...</a:t>
             </a:r>
           </a:p>
         </p:txBody>
@@ -6985,7 +7592,7 @@
           <p:cNvPr id="15" name="Flowchart: Connector 14">
             <a:extLst>
               <a:ext uri="{FF2B5EF4-FFF2-40B4-BE49-F238E27FC236}">
-                <a16:creationId xmlns:a16="http://schemas.microsoft.com/office/drawing/2014/main" id="{44BA943E-F75D-70BC-66FA-FCEE37DB2F65}"/>
+                <a16:creationId xmlns:a16="http://schemas.microsoft.com/office/drawing/2014/main" id="{8DE49AE0-4CA4-40A9-0A9B-16088430B718}"/>
               </a:ext>
             </a:extLst>
           </p:cNvPr>
@@ -6994,7 +7601,7 @@
         </p:nvSpPr>
         <p:spPr>
           <a:xfrm>
-            <a:off x="3913290" y="2504332"/>
+            <a:off x="3834918" y="2089314"/>
             <a:ext cx="457200" cy="457200"/>
           </a:xfrm>
           <a:custGeom>
@@ -7086,6 +7693,9 @@
             </a:pathLst>
           </a:custGeom>
           <a:ln w="57150">
+            <a:solidFill>
+              <a:srgbClr val="1B55EB"/>
+            </a:solidFill>
             <a:extLst>
               <a:ext uri="{C807C97D-BFC1-408E-A445-0C87EB9F89A2}">
                 <ask:lineSketchStyleProps xmlns:ask="http://schemas.microsoft.com/office/drawing/2018/sketchyshapes" sd="3499211612">
@@ -7120,7 +7730,11 @@
           <a:p>
             <a:pPr algn="ctr"/>
             <a:r>
-              <a:rPr lang="en-US" dirty="0"/>
+              <a:rPr lang="en-US" dirty="0">
+                <a:latin typeface="CMU Serif Roman" panose="02000603000000000000" pitchFamily="2" charset="0"/>
+                <a:ea typeface="CMU Serif Roman" panose="02000603000000000000" pitchFamily="2" charset="0"/>
+                <a:cs typeface="CMU Serif Roman" panose="02000603000000000000" pitchFamily="2" charset="0"/>
+              </a:rPr>
               <a:t>1</a:t>
             </a:r>
           </a:p>
@@ -7131,7 +7745,7 @@
           <p:cNvPr id="17" name="Connector: Curved 16">
             <a:extLst>
               <a:ext uri="{FF2B5EF4-FFF2-40B4-BE49-F238E27FC236}">
-                <a16:creationId xmlns:a16="http://schemas.microsoft.com/office/drawing/2014/main" id="{C6EFEDB1-32D6-5A09-1935-65D7243FAA38}"/>
+                <a16:creationId xmlns:a16="http://schemas.microsoft.com/office/drawing/2014/main" id="{32B468D2-E305-F28B-7685-FCBF686A632B}"/>
               </a:ext>
             </a:extLst>
           </p:cNvPr>
@@ -7140,7 +7754,7 @@
         </p:nvCxnSpPr>
         <p:spPr>
           <a:xfrm>
-            <a:off x="4368511" y="2734417"/>
+            <a:off x="4290139" y="2319399"/>
             <a:ext cx="620485" cy="920339"/>
           </a:xfrm>
           <a:prstGeom prst="curvedConnector3">
@@ -7170,7 +7784,7 @@
           <p:cNvPr id="20" name="Connector: Curved 19">
             <a:extLst>
               <a:ext uri="{FF2B5EF4-FFF2-40B4-BE49-F238E27FC236}">
-                <a16:creationId xmlns:a16="http://schemas.microsoft.com/office/drawing/2014/main" id="{DDE49F8E-F31C-9089-9F7C-658C7265B777}"/>
+                <a16:creationId xmlns:a16="http://schemas.microsoft.com/office/drawing/2014/main" id="{76BC7FC7-AD08-90A8-49D1-0575D2B3F8AB}"/>
               </a:ext>
             </a:extLst>
           </p:cNvPr>
@@ -7181,7 +7795,7 @@
         </p:nvCxnSpPr>
         <p:spPr>
           <a:xfrm>
-            <a:off x="5443475" y="3666506"/>
+            <a:off x="5365103" y="3251488"/>
             <a:ext cx="409574" cy="838695"/>
           </a:xfrm>
           <a:prstGeom prst="curvedConnector3">
@@ -7211,7 +7825,7 @@
           <p:cNvPr id="21" name="Connector: Curved 20">
             <a:extLst>
               <a:ext uri="{FF2B5EF4-FFF2-40B4-BE49-F238E27FC236}">
-                <a16:creationId xmlns:a16="http://schemas.microsoft.com/office/drawing/2014/main" id="{EE6C85E4-75F1-3CA6-3137-CCDFFFD6B08A}"/>
+                <a16:creationId xmlns:a16="http://schemas.microsoft.com/office/drawing/2014/main" id="{A335E7AA-1D8B-2E55-A29E-EED24D1B639A}"/>
               </a:ext>
             </a:extLst>
           </p:cNvPr>
@@ -7222,7 +7836,7 @@
         </p:nvCxnSpPr>
         <p:spPr>
           <a:xfrm>
-            <a:off x="6307528" y="4496542"/>
+            <a:off x="6229156" y="4081524"/>
             <a:ext cx="810985" cy="8660"/>
           </a:xfrm>
           <a:prstGeom prst="curvedConnector3">
@@ -7252,7 +7866,7 @@
           <p:cNvPr id="22" name="Flowchart: Connector 21">
             <a:extLst>
               <a:ext uri="{FF2B5EF4-FFF2-40B4-BE49-F238E27FC236}">
-                <a16:creationId xmlns:a16="http://schemas.microsoft.com/office/drawing/2014/main" id="{D5313209-D324-86BD-27B5-6032FA0D624B}"/>
+                <a16:creationId xmlns:a16="http://schemas.microsoft.com/office/drawing/2014/main" id="{8712FCDF-7D9A-7B99-F5CA-BE97C761A042}"/>
               </a:ext>
             </a:extLst>
           </p:cNvPr>
@@ -7261,7 +7875,7 @@
         </p:nvSpPr>
         <p:spPr>
           <a:xfrm>
-            <a:off x="4988253" y="3429617"/>
+            <a:off x="4909881" y="3014599"/>
             <a:ext cx="457200" cy="457200"/>
           </a:xfrm>
           <a:custGeom>
@@ -7353,6 +7967,9 @@
             </a:pathLst>
           </a:custGeom>
           <a:ln w="57150">
+            <a:solidFill>
+              <a:srgbClr val="1B55EB"/>
+            </a:solidFill>
             <a:extLst>
               <a:ext uri="{C807C97D-BFC1-408E-A445-0C87EB9F89A2}">
                 <ask:lineSketchStyleProps xmlns:ask="http://schemas.microsoft.com/office/drawing/2018/sketchyshapes" sd="3499211612">
@@ -7387,7 +8004,11 @@
           <a:p>
             <a:pPr algn="ctr"/>
             <a:r>
-              <a:rPr lang="en-US" dirty="0"/>
+              <a:rPr lang="en-US" dirty="0">
+                <a:latin typeface="CMU Serif Roman" panose="02000603000000000000" pitchFamily="2" charset="0"/>
+                <a:ea typeface="CMU Serif Roman" panose="02000603000000000000" pitchFamily="2" charset="0"/>
+                <a:cs typeface="CMU Serif Roman" panose="02000603000000000000" pitchFamily="2" charset="0"/>
+              </a:rPr>
               <a:t>2</a:t>
             </a:r>
           </a:p>
@@ -7398,7 +8019,7 @@
           <p:cNvPr id="23" name="Flowchart: Connector 22">
             <a:extLst>
               <a:ext uri="{FF2B5EF4-FFF2-40B4-BE49-F238E27FC236}">
-                <a16:creationId xmlns:a16="http://schemas.microsoft.com/office/drawing/2014/main" id="{045B9FB8-EEA7-7105-C244-CB749B77A7C4}"/>
+                <a16:creationId xmlns:a16="http://schemas.microsoft.com/office/drawing/2014/main" id="{61F1CF64-0E1B-743E-5CD3-26A9AC682EEF}"/>
               </a:ext>
             </a:extLst>
           </p:cNvPr>
@@ -7407,7 +8028,7 @@
         </p:nvSpPr>
         <p:spPr>
           <a:xfrm>
-            <a:off x="5852306" y="4266456"/>
+            <a:off x="5773934" y="3851438"/>
             <a:ext cx="457200" cy="457200"/>
           </a:xfrm>
           <a:custGeom>
@@ -7499,6 +8120,9 @@
             </a:pathLst>
           </a:custGeom>
           <a:ln w="57150">
+            <a:solidFill>
+              <a:srgbClr val="1B55EB"/>
+            </a:solidFill>
             <a:extLst>
               <a:ext uri="{C807C97D-BFC1-408E-A445-0C87EB9F89A2}">
                 <ask:lineSketchStyleProps xmlns:ask="http://schemas.microsoft.com/office/drawing/2018/sketchyshapes" sd="3499211612">
@@ -7533,7 +8157,11 @@
           <a:p>
             <a:pPr algn="ctr"/>
             <a:r>
-              <a:rPr lang="en-US" dirty="0"/>
+              <a:rPr lang="en-US" dirty="0">
+                <a:latin typeface="CMU Serif Roman" panose="02000603000000000000" pitchFamily="2" charset="0"/>
+                <a:ea typeface="CMU Serif Roman" panose="02000603000000000000" pitchFamily="2" charset="0"/>
+                <a:cs typeface="CMU Serif Roman" panose="02000603000000000000" pitchFamily="2" charset="0"/>
+              </a:rPr>
               <a:t>3</a:t>
             </a:r>
           </a:p>
@@ -7544,7 +8172,7 @@
           <p:cNvPr id="24" name="Flowchart: Connector 23">
             <a:extLst>
               <a:ext uri="{FF2B5EF4-FFF2-40B4-BE49-F238E27FC236}">
-                <a16:creationId xmlns:a16="http://schemas.microsoft.com/office/drawing/2014/main" id="{E1E2630A-5F89-194B-F752-4C1757665205}"/>
+                <a16:creationId xmlns:a16="http://schemas.microsoft.com/office/drawing/2014/main" id="{5238F64C-890C-0625-CEFC-DC60C3C1630E}"/>
               </a:ext>
             </a:extLst>
           </p:cNvPr>
@@ -7553,7 +8181,7 @@
         </p:nvSpPr>
         <p:spPr>
           <a:xfrm>
-            <a:off x="7117770" y="4266456"/>
+            <a:off x="7039398" y="3851438"/>
             <a:ext cx="457200" cy="457200"/>
           </a:xfrm>
           <a:custGeom>
@@ -7645,6 +8273,9 @@
             </a:pathLst>
           </a:custGeom>
           <a:ln w="57150">
+            <a:solidFill>
+              <a:srgbClr val="1B55EB"/>
+            </a:solidFill>
             <a:extLst>
               <a:ext uri="{C807C97D-BFC1-408E-A445-0C87EB9F89A2}">
                 <ask:lineSketchStyleProps xmlns:ask="http://schemas.microsoft.com/office/drawing/2018/sketchyshapes" sd="3499211612">
@@ -7679,7 +8310,11 @@
           <a:p>
             <a:pPr algn="ctr"/>
             <a:r>
-              <a:rPr lang="en-US" dirty="0"/>
+              <a:rPr lang="en-US" dirty="0">
+                <a:latin typeface="CMU Serif Roman" panose="02000603000000000000" pitchFamily="2" charset="0"/>
+                <a:ea typeface="CMU Serif Roman" panose="02000603000000000000" pitchFamily="2" charset="0"/>
+                <a:cs typeface="CMU Serif Roman" panose="02000603000000000000" pitchFamily="2" charset="0"/>
+              </a:rPr>
               <a:t>4</a:t>
             </a:r>
           </a:p>
@@ -7690,7 +8325,7 @@
           <p:cNvPr id="27" name="Flowchart: Connector 26">
             <a:extLst>
               <a:ext uri="{FF2B5EF4-FFF2-40B4-BE49-F238E27FC236}">
-                <a16:creationId xmlns:a16="http://schemas.microsoft.com/office/drawing/2014/main" id="{8D48BB32-0742-CC8D-0295-C3631F565183}"/>
+                <a16:creationId xmlns:a16="http://schemas.microsoft.com/office/drawing/2014/main" id="{72A8BCF0-F440-F18F-06EA-2709354729E7}"/>
               </a:ext>
             </a:extLst>
           </p:cNvPr>
@@ -7791,6 +8426,9 @@
             </a:pathLst>
           </a:custGeom>
           <a:ln w="57150">
+            <a:solidFill>
+              <a:srgbClr val="1B55EB"/>
+            </a:solidFill>
             <a:extLst>
               <a:ext uri="{C807C97D-BFC1-408E-A445-0C87EB9F89A2}">
                 <ask:lineSketchStyleProps xmlns:ask="http://schemas.microsoft.com/office/drawing/2018/sketchyshapes" sd="3499211612">
@@ -7825,7 +8463,11 @@
           <a:p>
             <a:pPr algn="ctr"/>
             <a:r>
-              <a:rPr lang="en-US" dirty="0"/>
+              <a:rPr lang="en-US" dirty="0">
+                <a:latin typeface="CMU Serif Roman" panose="02000603000000000000" pitchFamily="2" charset="0"/>
+                <a:ea typeface="CMU Serif Roman" panose="02000603000000000000" pitchFamily="2" charset="0"/>
+                <a:cs typeface="CMU Serif Roman" panose="02000603000000000000" pitchFamily="2" charset="0"/>
+              </a:rPr>
               <a:t>1</a:t>
             </a:r>
           </a:p>
@@ -7836,7 +8478,7 @@
           <p:cNvPr id="29" name="Flowchart: Connector 28">
             <a:extLst>
               <a:ext uri="{FF2B5EF4-FFF2-40B4-BE49-F238E27FC236}">
-                <a16:creationId xmlns:a16="http://schemas.microsoft.com/office/drawing/2014/main" id="{A334D6B2-4575-4248-FDF6-5C5949D1E0B2}"/>
+                <a16:creationId xmlns:a16="http://schemas.microsoft.com/office/drawing/2014/main" id="{E0DDEB15-2D3A-41A4-5E5F-A92FC7CB7F59}"/>
               </a:ext>
             </a:extLst>
           </p:cNvPr>
@@ -7937,6 +8579,9 @@
             </a:pathLst>
           </a:custGeom>
           <a:ln w="57150">
+            <a:solidFill>
+              <a:srgbClr val="1B55EB"/>
+            </a:solidFill>
             <a:extLst>
               <a:ext uri="{C807C97D-BFC1-408E-A445-0C87EB9F89A2}">
                 <ask:lineSketchStyleProps xmlns:ask="http://schemas.microsoft.com/office/drawing/2018/sketchyshapes" sd="3499211612">
@@ -7971,7 +8616,11 @@
           <a:p>
             <a:pPr algn="ctr"/>
             <a:r>
-              <a:rPr lang="en-US" dirty="0"/>
+              <a:rPr lang="en-US" dirty="0">
+                <a:latin typeface="CMU Serif Roman" panose="02000603000000000000" pitchFamily="2" charset="0"/>
+                <a:ea typeface="CMU Serif Roman" panose="02000603000000000000" pitchFamily="2" charset="0"/>
+                <a:cs typeface="CMU Serif Roman" panose="02000603000000000000" pitchFamily="2" charset="0"/>
+              </a:rPr>
               <a:t>2</a:t>
             </a:r>
           </a:p>
@@ -7982,7 +8631,7 @@
           <p:cNvPr id="31" name="Flowchart: Connector 30">
             <a:extLst>
               <a:ext uri="{FF2B5EF4-FFF2-40B4-BE49-F238E27FC236}">
-                <a16:creationId xmlns:a16="http://schemas.microsoft.com/office/drawing/2014/main" id="{698B8E65-1B91-3B68-9EFE-B95DF2CF0380}"/>
+                <a16:creationId xmlns:a16="http://schemas.microsoft.com/office/drawing/2014/main" id="{C9E108AF-3E91-D9A2-C5C0-49D9AD0B066F}"/>
               </a:ext>
             </a:extLst>
           </p:cNvPr>
@@ -8083,6 +8732,9 @@
             </a:pathLst>
           </a:custGeom>
           <a:ln w="57150">
+            <a:solidFill>
+              <a:srgbClr val="1B55EB"/>
+            </a:solidFill>
             <a:extLst>
               <a:ext uri="{C807C97D-BFC1-408E-A445-0C87EB9F89A2}">
                 <ask:lineSketchStyleProps xmlns:ask="http://schemas.microsoft.com/office/drawing/2018/sketchyshapes" sd="3499211612">
@@ -8117,7 +8769,11 @@
           <a:p>
             <a:pPr algn="ctr"/>
             <a:r>
-              <a:rPr lang="en-US" dirty="0"/>
+              <a:rPr lang="en-US" dirty="0">
+                <a:latin typeface="CMU Serif Roman" panose="02000603000000000000" pitchFamily="2" charset="0"/>
+                <a:ea typeface="CMU Serif Roman" panose="02000603000000000000" pitchFamily="2" charset="0"/>
+                <a:cs typeface="CMU Serif Roman" panose="02000603000000000000" pitchFamily="2" charset="0"/>
+              </a:rPr>
               <a:t>3</a:t>
             </a:r>
           </a:p>
@@ -8128,7 +8784,7 @@
           <p:cNvPr id="33" name="Flowchart: Connector 32">
             <a:extLst>
               <a:ext uri="{FF2B5EF4-FFF2-40B4-BE49-F238E27FC236}">
-                <a16:creationId xmlns:a16="http://schemas.microsoft.com/office/drawing/2014/main" id="{A9E2DD96-8722-E5A8-DA69-8CD81C98109F}"/>
+                <a16:creationId xmlns:a16="http://schemas.microsoft.com/office/drawing/2014/main" id="{68D2B949-9B18-797E-E044-E9411FAFDF9E}"/>
               </a:ext>
             </a:extLst>
           </p:cNvPr>
@@ -8229,6 +8885,9 @@
             </a:pathLst>
           </a:custGeom>
           <a:ln w="57150">
+            <a:solidFill>
+              <a:srgbClr val="1B55EB"/>
+            </a:solidFill>
             <a:extLst>
               <a:ext uri="{C807C97D-BFC1-408E-A445-0C87EB9F89A2}">
                 <ask:lineSketchStyleProps xmlns:ask="http://schemas.microsoft.com/office/drawing/2018/sketchyshapes" sd="3499211612">
@@ -8263,7 +8922,11 @@
           <a:p>
             <a:pPr algn="ctr"/>
             <a:r>
-              <a:rPr lang="en-US" dirty="0"/>
+              <a:rPr lang="en-US" dirty="0">
+                <a:latin typeface="CMU Serif Roman" panose="02000603000000000000" pitchFamily="2" charset="0"/>
+                <a:ea typeface="CMU Serif Roman" panose="02000603000000000000" pitchFamily="2" charset="0"/>
+                <a:cs typeface="CMU Serif Roman" panose="02000603000000000000" pitchFamily="2" charset="0"/>
+              </a:rPr>
               <a:t>4</a:t>
             </a:r>
           </a:p>
@@ -8274,7 +8937,7 @@
           <p:cNvPr id="34" name="TextBox 33">
             <a:extLst>
               <a:ext uri="{FF2B5EF4-FFF2-40B4-BE49-F238E27FC236}">
-                <a16:creationId xmlns:a16="http://schemas.microsoft.com/office/drawing/2014/main" id="{0F27E98C-85A1-71D9-A20A-7EEEF969EAC4}"/>
+                <a16:creationId xmlns:a16="http://schemas.microsoft.com/office/drawing/2014/main" id="{2707287F-9A80-2F13-469B-56A11861478E}"/>
               </a:ext>
             </a:extLst>
           </p:cNvPr>
@@ -8465,6 +9128,9 @@
             </a:pathLst>
           </a:custGeom>
           <a:ln w="28575">
+            <a:solidFill>
+              <a:srgbClr val="1B55EB"/>
+            </a:solidFill>
             <a:extLst>
               <a:ext uri="{C807C97D-BFC1-408E-A445-0C87EB9F89A2}">
                 <ask:lineSketchStyleProps xmlns:ask="http://schemas.microsoft.com/office/drawing/2018/sketchyshapes" sd="283741067">
@@ -8504,7 +9170,11 @@
           <a:p>
             <a:pPr algn="l"/>
             <a:r>
-              <a:rPr lang="en-US" dirty="0"/>
+              <a:rPr lang="en-US" dirty="0">
+                <a:latin typeface="CMU Serif Roman" panose="02000603000000000000" pitchFamily="2" charset="0"/>
+                <a:ea typeface="CMU Serif Roman" panose="02000603000000000000" pitchFamily="2" charset="0"/>
+                <a:cs typeface="CMU Serif Roman" panose="02000603000000000000" pitchFamily="2" charset="0"/>
+              </a:rPr>
               <a:t>Tokenization</a:t>
             </a:r>
           </a:p>
@@ -8515,7 +9185,7 @@
           <p:cNvPr id="35" name="TextBox 34">
             <a:extLst>
               <a:ext uri="{FF2B5EF4-FFF2-40B4-BE49-F238E27FC236}">
-                <a16:creationId xmlns:a16="http://schemas.microsoft.com/office/drawing/2014/main" id="{3668E21C-BDB8-282B-EB4A-0EEA5820EDAB}"/>
+                <a16:creationId xmlns:a16="http://schemas.microsoft.com/office/drawing/2014/main" id="{3A25FC60-747B-0C4E-9D19-105FD1005680}"/>
               </a:ext>
             </a:extLst>
           </p:cNvPr>
@@ -8706,6 +9376,9 @@
             </a:pathLst>
           </a:custGeom>
           <a:ln w="28575">
+            <a:solidFill>
+              <a:srgbClr val="1B55EB"/>
+            </a:solidFill>
             <a:extLst>
               <a:ext uri="{C807C97D-BFC1-408E-A445-0C87EB9F89A2}">
                 <ask:lineSketchStyleProps xmlns:ask="http://schemas.microsoft.com/office/drawing/2018/sketchyshapes" sd="283741067">
@@ -8745,7 +9418,11 @@
           <a:p>
             <a:pPr algn="l"/>
             <a:r>
-              <a:rPr lang="en-US" dirty="0"/>
+              <a:rPr lang="en-US" dirty="0">
+                <a:latin typeface="CMU Serif Roman" panose="02000603000000000000" pitchFamily="2" charset="0"/>
+                <a:ea typeface="CMU Serif Roman" panose="02000603000000000000" pitchFamily="2" charset="0"/>
+                <a:cs typeface="CMU Serif Roman" panose="02000603000000000000" pitchFamily="2" charset="0"/>
+              </a:rPr>
               <a:t>Embeddings</a:t>
             </a:r>
           </a:p>
@@ -8756,7 +9433,7 @@
           <p:cNvPr id="36" name="TextBox 35">
             <a:extLst>
               <a:ext uri="{FF2B5EF4-FFF2-40B4-BE49-F238E27FC236}">
-                <a16:creationId xmlns:a16="http://schemas.microsoft.com/office/drawing/2014/main" id="{A2A647F5-B4E3-66EC-BB4E-9EF6ABC78F01}"/>
+                <a16:creationId xmlns:a16="http://schemas.microsoft.com/office/drawing/2014/main" id="{4FC6EA0E-233B-4304-00AD-284BD8A5F121}"/>
               </a:ext>
             </a:extLst>
           </p:cNvPr>
@@ -8947,6 +9624,9 @@
             </a:pathLst>
           </a:custGeom>
           <a:ln w="28575">
+            <a:solidFill>
+              <a:srgbClr val="1B55EB"/>
+            </a:solidFill>
             <a:extLst>
               <a:ext uri="{C807C97D-BFC1-408E-A445-0C87EB9F89A2}">
                 <ask:lineSketchStyleProps xmlns:ask="http://schemas.microsoft.com/office/drawing/2018/sketchyshapes" sd="283741067">
@@ -8986,7 +9666,11 @@
           <a:p>
             <a:pPr algn="l"/>
             <a:r>
-              <a:rPr lang="en-US" dirty="0"/>
+              <a:rPr lang="en-US" dirty="0">
+                <a:latin typeface="CMU Serif Roman" panose="02000603000000000000" pitchFamily="2" charset="0"/>
+                <a:ea typeface="CMU Serif Roman" panose="02000603000000000000" pitchFamily="2" charset="0"/>
+                <a:cs typeface="CMU Serif Roman" panose="02000603000000000000" pitchFamily="2" charset="0"/>
+              </a:rPr>
               <a:t>Attention</a:t>
             </a:r>
           </a:p>
@@ -8997,7 +9681,7 @@
           <p:cNvPr id="37" name="TextBox 36">
             <a:extLst>
               <a:ext uri="{FF2B5EF4-FFF2-40B4-BE49-F238E27FC236}">
-                <a16:creationId xmlns:a16="http://schemas.microsoft.com/office/drawing/2014/main" id="{DC6D2BB9-FEB8-D63C-66BC-9EF14CA6BE7B}"/>
+                <a16:creationId xmlns:a16="http://schemas.microsoft.com/office/drawing/2014/main" id="{7A953F32-7333-BF84-D68A-12CE0C4099A6}"/>
               </a:ext>
             </a:extLst>
           </p:cNvPr>
@@ -9188,6 +9872,9 @@
             </a:pathLst>
           </a:custGeom>
           <a:ln w="28575">
+            <a:solidFill>
+              <a:srgbClr val="1B55EB"/>
+            </a:solidFill>
             <a:extLst>
               <a:ext uri="{C807C97D-BFC1-408E-A445-0C87EB9F89A2}">
                 <ask:lineSketchStyleProps xmlns:ask="http://schemas.microsoft.com/office/drawing/2018/sketchyshapes" sd="283741067">
@@ -9227,541 +9914,12 @@
           <a:p>
             <a:pPr algn="l"/>
             <a:r>
-              <a:rPr lang="en-US" dirty="0"/>
+              <a:rPr lang="en-US" dirty="0">
+                <a:latin typeface="CMU Serif Roman" panose="02000603000000000000" pitchFamily="2" charset="0"/>
+                <a:ea typeface="CMU Serif Roman" panose="02000603000000000000" pitchFamily="2" charset="0"/>
+                <a:cs typeface="CMU Serif Roman" panose="02000603000000000000" pitchFamily="2" charset="0"/>
+              </a:rPr>
               <a:t>Sampling</a:t>
-            </a:r>
-          </a:p>
-        </p:txBody>
-      </p:sp>
-      <p:sp>
-        <p:nvSpPr>
-          <p:cNvPr id="4" name="Flowchart: Connector 3">
-            <a:extLst>
-              <a:ext uri="{FF2B5EF4-FFF2-40B4-BE49-F238E27FC236}">
-                <a16:creationId xmlns:a16="http://schemas.microsoft.com/office/drawing/2014/main" id="{2B81FEAB-B322-271F-3B23-B688BC735BEE}"/>
-              </a:ext>
-            </a:extLst>
-          </p:cNvPr>
-          <p:cNvSpPr/>
-          <p:nvPr/>
-        </p:nvSpPr>
-        <p:spPr>
-          <a:xfrm>
-            <a:off x="3827565" y="6133357"/>
-            <a:ext cx="457200" cy="457200"/>
-          </a:xfrm>
-          <a:custGeom>
-            <a:avLst/>
-            <a:gdLst>
-              <a:gd name="csX0" fmla="*/ 0 w 457200"/>
-              <a:gd name="csY0" fmla="*/ 228600 h 457200"/>
-              <a:gd name="csX1" fmla="*/ 228600 w 457200"/>
-              <a:gd name="csY1" fmla="*/ 0 h 457200"/>
-              <a:gd name="csX2" fmla="*/ 457200 w 457200"/>
-              <a:gd name="csY2" fmla="*/ 228600 h 457200"/>
-              <a:gd name="csX3" fmla="*/ 228600 w 457200"/>
-              <a:gd name="csY3" fmla="*/ 457200 h 457200"/>
-              <a:gd name="csX4" fmla="*/ 0 w 457200"/>
-              <a:gd name="csY4" fmla="*/ 228600 h 457200"/>
-            </a:gdLst>
-            <a:ahLst/>
-            <a:cxnLst>
-              <a:cxn ang="0">
-                <a:pos x="csX0" y="csY0"/>
-              </a:cxn>
-              <a:cxn ang="0">
-                <a:pos x="csX1" y="csY1"/>
-              </a:cxn>
-              <a:cxn ang="0">
-                <a:pos x="csX2" y="csY2"/>
-              </a:cxn>
-              <a:cxn ang="0">
-                <a:pos x="csX3" y="csY3"/>
-              </a:cxn>
-              <a:cxn ang="0">
-                <a:pos x="csX4" y="csY4"/>
-              </a:cxn>
-            </a:cxnLst>
-            <a:rect l="l" t="t" r="r" b="b"/>
-            <a:pathLst>
-              <a:path w="457200" h="457200" fill="none" extrusionOk="0">
-                <a:moveTo>
-                  <a:pt x="0" y="228600"/>
-                </a:moveTo>
-                <a:cubicBezTo>
-                  <a:pt x="-6286" y="94269"/>
-                  <a:pt x="85347" y="-15228"/>
-                  <a:pt x="228600" y="0"/>
-                </a:cubicBezTo>
-                <a:cubicBezTo>
-                  <a:pt x="356756" y="-2173"/>
-                  <a:pt x="460728" y="106247"/>
-                  <a:pt x="457200" y="228600"/>
-                </a:cubicBezTo>
-                <a:cubicBezTo>
-                  <a:pt x="445791" y="359591"/>
-                  <a:pt x="356223" y="454466"/>
-                  <a:pt x="228600" y="457200"/>
-                </a:cubicBezTo>
-                <a:cubicBezTo>
-                  <a:pt x="127866" y="459443"/>
-                  <a:pt x="-3812" y="381036"/>
-                  <a:pt x="0" y="228600"/>
-                </a:cubicBezTo>
-                <a:close/>
-              </a:path>
-              <a:path w="457200" h="457200" stroke="0" extrusionOk="0">
-                <a:moveTo>
-                  <a:pt x="0" y="228600"/>
-                </a:moveTo>
-                <a:cubicBezTo>
-                  <a:pt x="-1737" y="96896"/>
-                  <a:pt x="82315" y="1725"/>
-                  <a:pt x="228600" y="0"/>
-                </a:cubicBezTo>
-                <a:cubicBezTo>
-                  <a:pt x="351560" y="4587"/>
-                  <a:pt x="451890" y="96767"/>
-                  <a:pt x="457200" y="228600"/>
-                </a:cubicBezTo>
-                <a:cubicBezTo>
-                  <a:pt x="464530" y="367244"/>
-                  <a:pt x="372760" y="462027"/>
-                  <a:pt x="228600" y="457200"/>
-                </a:cubicBezTo>
-                <a:cubicBezTo>
-                  <a:pt x="93201" y="463549"/>
-                  <a:pt x="-7249" y="348329"/>
-                  <a:pt x="0" y="228600"/>
-                </a:cubicBezTo>
-                <a:close/>
-              </a:path>
-            </a:pathLst>
-          </a:custGeom>
-          <a:ln w="57150">
-            <a:extLst>
-              <a:ext uri="{C807C97D-BFC1-408E-A445-0C87EB9F89A2}">
-                <ask:lineSketchStyleProps xmlns:ask="http://schemas.microsoft.com/office/drawing/2018/sketchyshapes" sd="3499211612">
-                  <a:prstGeom prst="flowChartConnector">
-                    <a:avLst/>
-                  </a:prstGeom>
-                  <ask:type>
-                    <ask:lineSketchFreehand/>
-                  </ask:type>
-                </ask:lineSketchStyleProps>
-              </a:ext>
-            </a:extLst>
-          </a:ln>
-        </p:spPr>
-        <p:style>
-          <a:lnRef idx="2">
-            <a:schemeClr val="accent5"/>
-          </a:lnRef>
-          <a:fillRef idx="1">
-            <a:schemeClr val="lt1"/>
-          </a:fillRef>
-          <a:effectRef idx="0">
-            <a:schemeClr val="accent5"/>
-          </a:effectRef>
-          <a:fontRef idx="minor">
-            <a:schemeClr val="dk1"/>
-          </a:fontRef>
-        </p:style>
-        <p:txBody>
-          <a:bodyPr lIns="91440" tIns="45720" rIns="91440" bIns="45720" rtlCol="0" anchor="ctr"/>
-          <a:lstStyle/>
-          <a:p>
-            <a:pPr algn="ctr"/>
-            <a:r>
-              <a:rPr lang="en-US" dirty="0"/>
-              <a:t>0</a:t>
-            </a:r>
-          </a:p>
-        </p:txBody>
-      </p:sp>
-      <p:sp>
-        <p:nvSpPr>
-          <p:cNvPr id="6" name="Flowchart: Connector 5">
-            <a:extLst>
-              <a:ext uri="{FF2B5EF4-FFF2-40B4-BE49-F238E27FC236}">
-                <a16:creationId xmlns:a16="http://schemas.microsoft.com/office/drawing/2014/main" id="{15B07714-AFC8-705F-A4E1-12559D5C7D8C}"/>
-              </a:ext>
-            </a:extLst>
-          </p:cNvPr>
-          <p:cNvSpPr/>
-          <p:nvPr/>
-        </p:nvSpPr>
-        <p:spPr>
-          <a:xfrm>
-            <a:off x="8599590" y="1237507"/>
-            <a:ext cx="457200" cy="457200"/>
-          </a:xfrm>
-          <a:custGeom>
-            <a:avLst/>
-            <a:gdLst>
-              <a:gd name="csX0" fmla="*/ 0 w 457200"/>
-              <a:gd name="csY0" fmla="*/ 228600 h 457200"/>
-              <a:gd name="csX1" fmla="*/ 228600 w 457200"/>
-              <a:gd name="csY1" fmla="*/ 0 h 457200"/>
-              <a:gd name="csX2" fmla="*/ 457200 w 457200"/>
-              <a:gd name="csY2" fmla="*/ 228600 h 457200"/>
-              <a:gd name="csX3" fmla="*/ 228600 w 457200"/>
-              <a:gd name="csY3" fmla="*/ 457200 h 457200"/>
-              <a:gd name="csX4" fmla="*/ 0 w 457200"/>
-              <a:gd name="csY4" fmla="*/ 228600 h 457200"/>
-            </a:gdLst>
-            <a:ahLst/>
-            <a:cxnLst>
-              <a:cxn ang="0">
-                <a:pos x="csX0" y="csY0"/>
-              </a:cxn>
-              <a:cxn ang="0">
-                <a:pos x="csX1" y="csY1"/>
-              </a:cxn>
-              <a:cxn ang="0">
-                <a:pos x="csX2" y="csY2"/>
-              </a:cxn>
-              <a:cxn ang="0">
-                <a:pos x="csX3" y="csY3"/>
-              </a:cxn>
-              <a:cxn ang="0">
-                <a:pos x="csX4" y="csY4"/>
-              </a:cxn>
-            </a:cxnLst>
-            <a:rect l="l" t="t" r="r" b="b"/>
-            <a:pathLst>
-              <a:path w="457200" h="457200" fill="none" extrusionOk="0">
-                <a:moveTo>
-                  <a:pt x="0" y="228600"/>
-                </a:moveTo>
-                <a:cubicBezTo>
-                  <a:pt x="-6286" y="94269"/>
-                  <a:pt x="85347" y="-15228"/>
-                  <a:pt x="228600" y="0"/>
-                </a:cubicBezTo>
-                <a:cubicBezTo>
-                  <a:pt x="356756" y="-2173"/>
-                  <a:pt x="460728" y="106247"/>
-                  <a:pt x="457200" y="228600"/>
-                </a:cubicBezTo>
-                <a:cubicBezTo>
-                  <a:pt x="445791" y="359591"/>
-                  <a:pt x="356223" y="454466"/>
-                  <a:pt x="228600" y="457200"/>
-                </a:cubicBezTo>
-                <a:cubicBezTo>
-                  <a:pt x="127866" y="459443"/>
-                  <a:pt x="-3812" y="381036"/>
-                  <a:pt x="0" y="228600"/>
-                </a:cubicBezTo>
-                <a:close/>
-              </a:path>
-              <a:path w="457200" h="457200" stroke="0" extrusionOk="0">
-                <a:moveTo>
-                  <a:pt x="0" y="228600"/>
-                </a:moveTo>
-                <a:cubicBezTo>
-                  <a:pt x="-1737" y="96896"/>
-                  <a:pt x="82315" y="1725"/>
-                  <a:pt x="228600" y="0"/>
-                </a:cubicBezTo>
-                <a:cubicBezTo>
-                  <a:pt x="351560" y="4587"/>
-                  <a:pt x="451890" y="96767"/>
-                  <a:pt x="457200" y="228600"/>
-                </a:cubicBezTo>
-                <a:cubicBezTo>
-                  <a:pt x="464530" y="367244"/>
-                  <a:pt x="372760" y="462027"/>
-                  <a:pt x="228600" y="457200"/>
-                </a:cubicBezTo>
-                <a:cubicBezTo>
-                  <a:pt x="93201" y="463549"/>
-                  <a:pt x="-7249" y="348329"/>
-                  <a:pt x="0" y="228600"/>
-                </a:cubicBezTo>
-                <a:close/>
-              </a:path>
-            </a:pathLst>
-          </a:custGeom>
-          <a:ln w="57150">
-            <a:extLst>
-              <a:ext uri="{C807C97D-BFC1-408E-A445-0C87EB9F89A2}">
-                <ask:lineSketchStyleProps xmlns:ask="http://schemas.microsoft.com/office/drawing/2018/sketchyshapes" sd="3499211612">
-                  <a:prstGeom prst="flowChartConnector">
-                    <a:avLst/>
-                  </a:prstGeom>
-                  <ask:type>
-                    <ask:lineSketchFreehand/>
-                  </ask:type>
-                </ask:lineSketchStyleProps>
-              </a:ext>
-            </a:extLst>
-          </a:ln>
-        </p:spPr>
-        <p:style>
-          <a:lnRef idx="2">
-            <a:schemeClr val="accent5"/>
-          </a:lnRef>
-          <a:fillRef idx="1">
-            <a:schemeClr val="lt1"/>
-          </a:fillRef>
-          <a:effectRef idx="0">
-            <a:schemeClr val="accent5"/>
-          </a:effectRef>
-          <a:fontRef idx="minor">
-            <a:schemeClr val="dk1"/>
-          </a:fontRef>
-        </p:style>
-        <p:txBody>
-          <a:bodyPr lIns="91440" tIns="45720" rIns="91440" bIns="45720" rtlCol="0" anchor="ctr"/>
-          <a:lstStyle/>
-          <a:p>
-            <a:pPr algn="ctr"/>
-            <a:r>
-              <a:rPr lang="en-US" dirty="0"/>
-              <a:t>0</a:t>
-            </a:r>
-          </a:p>
-        </p:txBody>
-      </p:sp>
-      <p:sp>
-        <p:nvSpPr>
-          <p:cNvPr id="8" name="TextBox 7">
-            <a:extLst>
-              <a:ext uri="{FF2B5EF4-FFF2-40B4-BE49-F238E27FC236}">
-                <a16:creationId xmlns:a16="http://schemas.microsoft.com/office/drawing/2014/main" id="{F828A35B-682A-4751-5A92-071AD5043088}"/>
-              </a:ext>
-            </a:extLst>
-          </p:cNvPr>
-          <p:cNvSpPr txBox="1"/>
-          <p:nvPr/>
-        </p:nvSpPr>
-        <p:spPr>
-          <a:xfrm>
-            <a:off x="9201148" y="1278391"/>
-            <a:ext cx="2333625" cy="369332"/>
-          </a:xfrm>
-          <a:custGeom>
-            <a:avLst/>
-            <a:gdLst>
-              <a:gd name="csX0" fmla="*/ 0 w 2333625"/>
-              <a:gd name="csY0" fmla="*/ 0 h 369332"/>
-              <a:gd name="csX1" fmla="*/ 583406 w 2333625"/>
-              <a:gd name="csY1" fmla="*/ 0 h 369332"/>
-              <a:gd name="csX2" fmla="*/ 1213485 w 2333625"/>
-              <a:gd name="csY2" fmla="*/ 0 h 369332"/>
-              <a:gd name="csX3" fmla="*/ 1773555 w 2333625"/>
-              <a:gd name="csY3" fmla="*/ 0 h 369332"/>
-              <a:gd name="csX4" fmla="*/ 2333625 w 2333625"/>
-              <a:gd name="csY4" fmla="*/ 0 h 369332"/>
-              <a:gd name="csX5" fmla="*/ 2333625 w 2333625"/>
-              <a:gd name="csY5" fmla="*/ 369332 h 369332"/>
-              <a:gd name="csX6" fmla="*/ 1703546 w 2333625"/>
-              <a:gd name="csY6" fmla="*/ 369332 h 369332"/>
-              <a:gd name="csX7" fmla="*/ 1143476 w 2333625"/>
-              <a:gd name="csY7" fmla="*/ 369332 h 369332"/>
-              <a:gd name="csX8" fmla="*/ 583406 w 2333625"/>
-              <a:gd name="csY8" fmla="*/ 369332 h 369332"/>
-              <a:gd name="csX9" fmla="*/ 0 w 2333625"/>
-              <a:gd name="csY9" fmla="*/ 369332 h 369332"/>
-              <a:gd name="csX10" fmla="*/ 0 w 2333625"/>
-              <a:gd name="csY10" fmla="*/ 0 h 369332"/>
-            </a:gdLst>
-            <a:ahLst/>
-            <a:cxnLst>
-              <a:cxn ang="0">
-                <a:pos x="csX0" y="csY0"/>
-              </a:cxn>
-              <a:cxn ang="0">
-                <a:pos x="csX1" y="csY1"/>
-              </a:cxn>
-              <a:cxn ang="0">
-                <a:pos x="csX2" y="csY2"/>
-              </a:cxn>
-              <a:cxn ang="0">
-                <a:pos x="csX3" y="csY3"/>
-              </a:cxn>
-              <a:cxn ang="0">
-                <a:pos x="csX4" y="csY4"/>
-              </a:cxn>
-              <a:cxn ang="0">
-                <a:pos x="csX5" y="csY5"/>
-              </a:cxn>
-              <a:cxn ang="0">
-                <a:pos x="csX6" y="csY6"/>
-              </a:cxn>
-              <a:cxn ang="0">
-                <a:pos x="csX7" y="csY7"/>
-              </a:cxn>
-              <a:cxn ang="0">
-                <a:pos x="csX8" y="csY8"/>
-              </a:cxn>
-              <a:cxn ang="0">
-                <a:pos x="csX9" y="csY9"/>
-              </a:cxn>
-              <a:cxn ang="0">
-                <a:pos x="csX10" y="csY10"/>
-              </a:cxn>
-            </a:cxnLst>
-            <a:rect l="l" t="t" r="r" b="b"/>
-            <a:pathLst>
-              <a:path w="2333625" h="369332" fill="none" extrusionOk="0">
-                <a:moveTo>
-                  <a:pt x="0" y="0"/>
-                </a:moveTo>
-                <a:cubicBezTo>
-                  <a:pt x="245286" y="5736"/>
-                  <a:pt x="297030" y="11623"/>
-                  <a:pt x="583406" y="0"/>
-                </a:cubicBezTo>
-                <a:cubicBezTo>
-                  <a:pt x="869782" y="-11623"/>
-                  <a:pt x="937660" y="16695"/>
-                  <a:pt x="1213485" y="0"/>
-                </a:cubicBezTo>
-                <a:cubicBezTo>
-                  <a:pt x="1489310" y="-16695"/>
-                  <a:pt x="1542847" y="20924"/>
-                  <a:pt x="1773555" y="0"/>
-                </a:cubicBezTo>
-                <a:cubicBezTo>
-                  <a:pt x="2004263" y="-20924"/>
-                  <a:pt x="2182579" y="-21382"/>
-                  <a:pt x="2333625" y="0"/>
-                </a:cubicBezTo>
-                <a:cubicBezTo>
-                  <a:pt x="2337252" y="75109"/>
-                  <a:pt x="2349962" y="234559"/>
-                  <a:pt x="2333625" y="369332"/>
-                </a:cubicBezTo>
-                <a:cubicBezTo>
-                  <a:pt x="2069355" y="359916"/>
-                  <a:pt x="1935929" y="394132"/>
-                  <a:pt x="1703546" y="369332"/>
-                </a:cubicBezTo>
-                <a:cubicBezTo>
-                  <a:pt x="1471163" y="344532"/>
-                  <a:pt x="1329274" y="365822"/>
-                  <a:pt x="1143476" y="369332"/>
-                </a:cubicBezTo>
-                <a:cubicBezTo>
-                  <a:pt x="957678" y="372843"/>
-                  <a:pt x="831305" y="374022"/>
-                  <a:pt x="583406" y="369332"/>
-                </a:cubicBezTo>
-                <a:cubicBezTo>
-                  <a:pt x="335507" y="364643"/>
-                  <a:pt x="272252" y="350793"/>
-                  <a:pt x="0" y="369332"/>
-                </a:cubicBezTo>
-                <a:cubicBezTo>
-                  <a:pt x="-10156" y="282015"/>
-                  <a:pt x="15390" y="87716"/>
-                  <a:pt x="0" y="0"/>
-                </a:cubicBezTo>
-                <a:close/>
-              </a:path>
-              <a:path w="2333625" h="369332" stroke="0" extrusionOk="0">
-                <a:moveTo>
-                  <a:pt x="0" y="0"/>
-                </a:moveTo>
-                <a:cubicBezTo>
-                  <a:pt x="239755" y="-8249"/>
-                  <a:pt x="342871" y="-19915"/>
-                  <a:pt x="536734" y="0"/>
-                </a:cubicBezTo>
-                <a:cubicBezTo>
-                  <a:pt x="730597" y="19915"/>
-                  <a:pt x="840094" y="22340"/>
-                  <a:pt x="1096804" y="0"/>
-                </a:cubicBezTo>
-                <a:cubicBezTo>
-                  <a:pt x="1353514" y="-22340"/>
-                  <a:pt x="1497339" y="11109"/>
-                  <a:pt x="1633538" y="0"/>
-                </a:cubicBezTo>
-                <a:cubicBezTo>
-                  <a:pt x="1769737" y="-11109"/>
-                  <a:pt x="2174563" y="20709"/>
-                  <a:pt x="2333625" y="0"/>
-                </a:cubicBezTo>
-                <a:cubicBezTo>
-                  <a:pt x="2329907" y="138875"/>
-                  <a:pt x="2321892" y="201024"/>
-                  <a:pt x="2333625" y="369332"/>
-                </a:cubicBezTo>
-                <a:cubicBezTo>
-                  <a:pt x="2156139" y="341013"/>
-                  <a:pt x="2037090" y="345370"/>
-                  <a:pt x="1750219" y="369332"/>
-                </a:cubicBezTo>
-                <a:cubicBezTo>
-                  <a:pt x="1463348" y="393294"/>
-                  <a:pt x="1400953" y="368246"/>
-                  <a:pt x="1213485" y="369332"/>
-                </a:cubicBezTo>
-                <a:cubicBezTo>
-                  <a:pt x="1026017" y="370418"/>
-                  <a:pt x="909812" y="382789"/>
-                  <a:pt x="676751" y="369332"/>
-                </a:cubicBezTo>
-                <a:cubicBezTo>
-                  <a:pt x="443690" y="355875"/>
-                  <a:pt x="279106" y="335772"/>
-                  <a:pt x="0" y="369332"/>
-                </a:cubicBezTo>
-                <a:cubicBezTo>
-                  <a:pt x="-6712" y="232751"/>
-                  <a:pt x="-840" y="78663"/>
-                  <a:pt x="0" y="0"/>
-                </a:cubicBezTo>
-                <a:close/>
-              </a:path>
-            </a:pathLst>
-          </a:custGeom>
-          <a:ln w="28575">
-            <a:extLst>
-              <a:ext uri="{C807C97D-BFC1-408E-A445-0C87EB9F89A2}">
-                <ask:lineSketchStyleProps xmlns:ask="http://schemas.microsoft.com/office/drawing/2018/sketchyshapes" sd="283741067">
-                  <a:prstGeom prst="rect">
-                    <a:avLst/>
-                  </a:prstGeom>
-                  <ask:type>
-                    <ask:lineSketchFreehand/>
-                  </ask:type>
-                </ask:lineSketchStyleProps>
-              </a:ext>
-            </a:extLst>
-          </a:ln>
-        </p:spPr>
-        <p:style>
-          <a:lnRef idx="2">
-            <a:schemeClr val="accent5"/>
-          </a:lnRef>
-          <a:fillRef idx="1">
-            <a:schemeClr val="lt1"/>
-          </a:fillRef>
-          <a:effectRef idx="0">
-            <a:schemeClr val="accent5"/>
-          </a:effectRef>
-          <a:fontRef idx="minor">
-            <a:schemeClr val="dk1"/>
-          </a:fontRef>
-        </p:style>
-        <p:txBody>
-          <a:bodyPr rot="0" spcFirstLastPara="0" vertOverflow="overflow" horzOverflow="overflow" vert="horz" wrap="square" lIns="91440" tIns="45720" rIns="91440" bIns="45720" numCol="1" spcCol="0" rtlCol="0" fromWordArt="0" anchor="t" anchorCtr="0" forceAA="0" compatLnSpc="1">
-            <a:prstTxWarp prst="textNoShape">
-              <a:avLst/>
-            </a:prstTxWarp>
-            <a:spAutoFit/>
-          </a:bodyPr>
-          <a:lstStyle/>
-          <a:p>
-            <a:pPr algn="l"/>
-            <a:r>
-              <a:rPr lang="en-US" dirty="0"/>
-              <a:t>Hardware</a:t>
             </a:r>
           </a:p>
         </p:txBody>
@@ -9769,147 +9927,13 @@
     </p:spTree>
     <p:extLst>
       <p:ext uri="{BB962C8B-B14F-4D97-AF65-F5344CB8AC3E}">
-        <p14:creationId xmlns:p14="http://schemas.microsoft.com/office/powerpoint/2010/main" val="3607703828"/>
+        <p14:creationId xmlns:p14="http://schemas.microsoft.com/office/powerpoint/2010/main" val="1622517294"/>
       </p:ext>
     </p:extLst>
   </p:cSld>
   <p:clrMapOvr>
     <a:masterClrMapping/>
   </p:clrMapOvr>
-  <p:timing>
-    <p:tnLst>
-      <p:par>
-        <p:cTn id="1" dur="indefinite" restart="never" nodeType="tmRoot">
-          <p:childTnLst>
-            <p:seq concurrent="1" nextAc="seek">
-              <p:cTn id="2" dur="indefinite" nodeType="mainSeq">
-                <p:childTnLst>
-                  <p:par>
-                    <p:cTn id="3" fill="hold">
-                      <p:stCondLst>
-                        <p:cond delay="indefinite"/>
-                      </p:stCondLst>
-                      <p:childTnLst>
-                        <p:par>
-                          <p:cTn id="4" fill="hold">
-                            <p:stCondLst>
-                              <p:cond delay="0"/>
-                            </p:stCondLst>
-                            <p:childTnLst>
-                              <p:par>
-                                <p:cTn id="5" presetID="1" presetClass="entr" presetSubtype="0" fill="hold" grpId="0" nodeType="clickEffect">
-                                  <p:stCondLst>
-                                    <p:cond delay="0"/>
-                                  </p:stCondLst>
-                                  <p:childTnLst>
-                                    <p:set>
-                                      <p:cBhvr>
-                                        <p:cTn id="6" dur="1" fill="hold">
-                                          <p:stCondLst>
-                                            <p:cond delay="0"/>
-                                          </p:stCondLst>
-                                        </p:cTn>
-                                        <p:tgtEl>
-                                          <p:spTgt spid="4"/>
-                                        </p:tgtEl>
-                                        <p:attrNameLst>
-                                          <p:attrName>style.visibility</p:attrName>
-                                        </p:attrNameLst>
-                                      </p:cBhvr>
-                                      <p:to>
-                                        <p:strVal val="visible"/>
-                                      </p:to>
-                                    </p:set>
-                                  </p:childTnLst>
-                                </p:cTn>
-                              </p:par>
-                              <p:par>
-                                <p:cTn id="7" presetID="1" presetClass="entr" presetSubtype="0" fill="hold" grpId="0" nodeType="withEffect">
-                                  <p:stCondLst>
-                                    <p:cond delay="0"/>
-                                  </p:stCondLst>
-                                  <p:childTnLst>
-                                    <p:set>
-                                      <p:cBhvr>
-                                        <p:cTn id="8" dur="1" fill="hold">
-                                          <p:stCondLst>
-                                            <p:cond delay="0"/>
-                                          </p:stCondLst>
-                                        </p:cTn>
-                                        <p:tgtEl>
-                                          <p:spTgt spid="6"/>
-                                        </p:tgtEl>
-                                        <p:attrNameLst>
-                                          <p:attrName>style.visibility</p:attrName>
-                                        </p:attrNameLst>
-                                      </p:cBhvr>
-                                      <p:to>
-                                        <p:strVal val="visible"/>
-                                      </p:to>
-                                    </p:set>
-                                  </p:childTnLst>
-                                </p:cTn>
-                              </p:par>
-                              <p:par>
-                                <p:cTn id="9" presetID="1" presetClass="entr" presetSubtype="0" fill="hold" grpId="0" nodeType="withEffect">
-                                  <p:stCondLst>
-                                    <p:cond delay="0"/>
-                                  </p:stCondLst>
-                                  <p:childTnLst>
-                                    <p:set>
-                                      <p:cBhvr>
-                                        <p:cTn id="10" dur="1" fill="hold">
-                                          <p:stCondLst>
-                                            <p:cond delay="0"/>
-                                          </p:stCondLst>
-                                        </p:cTn>
-                                        <p:tgtEl>
-                                          <p:spTgt spid="8"/>
-                                        </p:tgtEl>
-                                        <p:attrNameLst>
-                                          <p:attrName>style.visibility</p:attrName>
-                                        </p:attrNameLst>
-                                      </p:cBhvr>
-                                      <p:to>
-                                        <p:strVal val="visible"/>
-                                      </p:to>
-                                    </p:set>
-                                  </p:childTnLst>
-                                </p:cTn>
-                              </p:par>
-                            </p:childTnLst>
-                          </p:cTn>
-                        </p:par>
-                      </p:childTnLst>
-                    </p:cTn>
-                  </p:par>
-                </p:childTnLst>
-              </p:cTn>
-              <p:prevCondLst>
-                <p:cond evt="onPrev" delay="0">
-                  <p:tgtEl>
-                    <p:sldTgt/>
-                  </p:tgtEl>
-                </p:cond>
-              </p:prevCondLst>
-              <p:nextCondLst>
-                <p:cond evt="onNext" delay="0">
-                  <p:tgtEl>
-                    <p:sldTgt/>
-                  </p:tgtEl>
-                </p:cond>
-              </p:nextCondLst>
-            </p:seq>
-          </p:childTnLst>
-        </p:cTn>
-      </p:par>
-    </p:tnLst>
-    <p:bldLst>
-      <p:bldP spid="4" grpId="0" animBg="1"/>
-      <p:bldP spid="6" grpId="0" animBg="1"/>
-      <p:bldP spid="8" grpId="0" animBg="1"/>
-    </p:bldLst>
-  </p:timing>
 </p:sld>
 </file>
 
@@ -9952,7 +9976,11 @@
           <a:lstStyle/>
           <a:p>
             <a:r>
-              <a:rPr lang="en-US" dirty="0"/>
+              <a:rPr lang="en-US" dirty="0">
+                <a:latin typeface="CMU Serif Roman" panose="02000603000000000000" pitchFamily="2" charset="0"/>
+                <a:ea typeface="CMU Serif Roman" panose="02000603000000000000" pitchFamily="2" charset="0"/>
+                <a:cs typeface="CMU Serif Roman" panose="02000603000000000000" pitchFamily="2" charset="0"/>
+              </a:rPr>
               <a:t>About Us</a:t>
             </a:r>
           </a:p>
@@ -9985,30 +10013,16 @@
               <a:buNone/>
             </a:pPr>
             <a:r>
-              <a:rPr lang="en-US" i="1" dirty="0">
-                <a:ea typeface="+mn-lt"/>
-                <a:cs typeface="+mn-lt"/>
-              </a:rPr>
-              <a:t>"</a:t>
-            </a:r>
-            <a:r>
-              <a:rPr lang="en-US" i="1" dirty="0">
+              <a:rPr lang="en-US" dirty="0">
                 <a:solidFill>
-                  <a:srgbClr val="7030A0"/>
+                  <a:srgbClr val="1B55EB"/>
                 </a:solidFill>
-                <a:ea typeface="+mn-lt"/>
-                <a:cs typeface="+mn-lt"/>
-              </a:rPr>
-              <a:t>Accelerate Science pursues research at the interface of AI and the sciences, generating new scientific insights and developing AI methods that can be deployed to advance scientific knowledge.</a:t>
-            </a:r>
-            <a:r>
-              <a:rPr lang="en-US" i="1" dirty="0">
-                <a:ea typeface="+mn-lt"/>
-                <a:cs typeface="+mn-lt"/>
-              </a:rPr>
-              <a:t>"</a:t>
-            </a:r>
-            <a:endParaRPr lang="en-US" i="1" dirty="0"/>
+                <a:latin typeface="CMU Serif Roman" panose="02000603000000000000" pitchFamily="2" charset="0"/>
+                <a:ea typeface="CMU Serif Roman" panose="02000603000000000000" pitchFamily="2" charset="0"/>
+                <a:cs typeface="CMU Serif Roman" panose="02000603000000000000" pitchFamily="2" charset="0"/>
+              </a:rPr>
+              <a:t>"Accelerate Science pursues research at the interface of AI and the sciences, generating new scientific insights and developing AI methods that can be deployed to advance scientific knowledge."</a:t>
+            </a:r>
           </a:p>
         </p:txBody>
       </p:sp>
@@ -10077,6 +10091,156 @@
           <p:cNvPr id="2" name="Title 1">
             <a:extLst>
               <a:ext uri="{FF2B5EF4-FFF2-40B4-BE49-F238E27FC236}">
+                <a16:creationId xmlns:a16="http://schemas.microsoft.com/office/drawing/2014/main" id="{DC975AC1-0CC0-EDDE-70D1-05C0CCB797C0}"/>
+              </a:ext>
+            </a:extLst>
+          </p:cNvPr>
+          <p:cNvSpPr>
+            <a:spLocks noGrp="1"/>
+          </p:cNvSpPr>
+          <p:nvPr>
+            <p:ph type="title"/>
+          </p:nvPr>
+        </p:nvSpPr>
+        <p:spPr/>
+        <p:txBody>
+          <a:bodyPr/>
+          <a:lstStyle/>
+          <a:p>
+            <a:r>
+              <a:rPr lang="en-US" dirty="0">
+                <a:latin typeface="CMU Serif Roman" panose="02000603000000000000" pitchFamily="2" charset="0"/>
+                <a:ea typeface="CMU Serif Roman" panose="02000603000000000000" pitchFamily="2" charset="0"/>
+                <a:cs typeface="CMU Serif Roman" panose="02000603000000000000" pitchFamily="2" charset="0"/>
+              </a:rPr>
+              <a:t>AI Clinic</a:t>
+            </a:r>
+          </a:p>
+        </p:txBody>
+      </p:sp>
+      <p:sp>
+        <p:nvSpPr>
+          <p:cNvPr id="3" name="Content Placeholder 2">
+            <a:extLst>
+              <a:ext uri="{FF2B5EF4-FFF2-40B4-BE49-F238E27FC236}">
+                <a16:creationId xmlns:a16="http://schemas.microsoft.com/office/drawing/2014/main" id="{C66C5BAA-06D6-1D2A-DB10-66C8E92D3CCC}"/>
+              </a:ext>
+            </a:extLst>
+          </p:cNvPr>
+          <p:cNvSpPr>
+            <a:spLocks noGrp="1"/>
+          </p:cNvSpPr>
+          <p:nvPr>
+            <p:ph idx="1"/>
+          </p:nvPr>
+        </p:nvSpPr>
+        <p:spPr/>
+        <p:txBody>
+          <a:bodyPr/>
+          <a:lstStyle/>
+          <a:p>
+            <a:pPr marL="0" indent="0">
+              <a:buNone/>
+            </a:pPr>
+            <a:r>
+              <a:rPr lang="en-US" dirty="0">
+                <a:latin typeface="CMU Serif Roman" panose="02000603000000000000" pitchFamily="2" charset="0"/>
+                <a:ea typeface="CMU Serif Roman" panose="02000603000000000000" pitchFamily="2" charset="0"/>
+                <a:cs typeface="CMU Serif Roman" panose="02000603000000000000" pitchFamily="2" charset="0"/>
+              </a:rPr>
+              <a:t>30-minute (free) consultations for researchers at the university working on applied AI/machine learning research</a:t>
+            </a:r>
+          </a:p>
+          <a:p>
+            <a:pPr marL="0" indent="0">
+              <a:buNone/>
+            </a:pPr>
+            <a:endParaRPr lang="en-US" dirty="0">
+              <a:latin typeface="CMU Serif Roman" panose="02000603000000000000" pitchFamily="2" charset="0"/>
+              <a:ea typeface="CMU Serif Roman" panose="02000603000000000000" pitchFamily="2" charset="0"/>
+              <a:cs typeface="CMU Serif Roman" panose="02000603000000000000" pitchFamily="2" charset="0"/>
+            </a:endParaRPr>
+          </a:p>
+          <a:p>
+            <a:pPr marL="0" indent="0">
+              <a:buNone/>
+            </a:pPr>
+            <a:r>
+              <a:rPr lang="en-US" dirty="0">
+                <a:latin typeface="CMU Serif Roman" panose="02000603000000000000" pitchFamily="2" charset="0"/>
+                <a:ea typeface="CMU Serif Roman" panose="02000603000000000000" pitchFamily="2" charset="0"/>
+                <a:cs typeface="CMU Serif Roman" panose="02000603000000000000" pitchFamily="2" charset="0"/>
+              </a:rPr>
+              <a:t>Book via UTBS!</a:t>
+            </a:r>
+          </a:p>
+        </p:txBody>
+      </p:sp>
+      <p:pic>
+        <p:nvPicPr>
+          <p:cNvPr id="4" name="Picture 3">
+            <a:extLst>
+              <a:ext uri="{FF2B5EF4-FFF2-40B4-BE49-F238E27FC236}">
+                <a16:creationId xmlns:a16="http://schemas.microsoft.com/office/drawing/2014/main" id="{924D622B-9573-147C-A917-BDA5F627DDD6}"/>
+              </a:ext>
+            </a:extLst>
+          </p:cNvPr>
+          <p:cNvPicPr>
+            <a:picLocks noChangeAspect="1"/>
+          </p:cNvPicPr>
+          <p:nvPr/>
+        </p:nvPicPr>
+        <p:blipFill>
+          <a:blip r:embed="rId2"/>
+          <a:stretch>
+            <a:fillRect/>
+          </a:stretch>
+        </p:blipFill>
+        <p:spPr>
+          <a:xfrm>
+            <a:off x="5047748" y="3741955"/>
+            <a:ext cx="2096503" cy="2082241"/>
+          </a:xfrm>
+          <a:prstGeom prst="rect">
+            <a:avLst/>
+          </a:prstGeom>
+        </p:spPr>
+      </p:pic>
+    </p:spTree>
+    <p:extLst>
+      <p:ext uri="{BB962C8B-B14F-4D97-AF65-F5344CB8AC3E}">
+        <p14:creationId xmlns:p14="http://schemas.microsoft.com/office/powerpoint/2010/main" val="2389988784"/>
+      </p:ext>
+    </p:extLst>
+  </p:cSld>
+  <p:clrMapOvr>
+    <a:masterClrMapping/>
+  </p:clrMapOvr>
+</p:sld>
+</file>
+
+<file path=ppt/slides/slide4.xml><?xml version="1.0" encoding="utf-8"?>
+<p:sld xmlns:a="http://schemas.openxmlformats.org/drawingml/2006/main" xmlns:r="http://schemas.openxmlformats.org/officeDocument/2006/relationships" xmlns:p="http://schemas.openxmlformats.org/presentationml/2006/main">
+  <p:cSld>
+    <p:spTree>
+      <p:nvGrpSpPr>
+        <p:cNvPr id="1" name=""/>
+        <p:cNvGrpSpPr/>
+        <p:nvPr/>
+      </p:nvGrpSpPr>
+      <p:grpSpPr>
+        <a:xfrm>
+          <a:off x="0" y="0"/>
+          <a:ext cx="0" cy="0"/>
+          <a:chOff x="0" y="0"/>
+          <a:chExt cx="0" cy="0"/>
+        </a:xfrm>
+      </p:grpSpPr>
+      <p:sp>
+        <p:nvSpPr>
+          <p:cNvPr id="2" name="Title 1">
+            <a:extLst>
+              <a:ext uri="{FF2B5EF4-FFF2-40B4-BE49-F238E27FC236}">
                 <a16:creationId xmlns:a16="http://schemas.microsoft.com/office/drawing/2014/main" id="{E3838369-8553-1A55-B265-3F27C53A813B}"/>
               </a:ext>
             </a:extLst>
@@ -10094,7 +10258,11 @@
           <a:lstStyle/>
           <a:p>
             <a:r>
-              <a:rPr lang="en-US" dirty="0"/>
+              <a:rPr lang="en-US" dirty="0">
+                <a:latin typeface="CMU Serif Roman" panose="02000603000000000000" pitchFamily="2" charset="0"/>
+                <a:ea typeface="CMU Serif Roman" panose="02000603000000000000" pitchFamily="2" charset="0"/>
+                <a:cs typeface="CMU Serif Roman" panose="02000603000000000000" pitchFamily="2" charset="0"/>
+              </a:rPr>
               <a:t>Workshop Goals</a:t>
             </a:r>
           </a:p>
@@ -10128,8 +10296,9 @@
             </a:pPr>
             <a:r>
               <a:rPr lang="en-US" b="1" dirty="0">
-                <a:ea typeface="+mn-lt"/>
-                <a:cs typeface="+mn-lt"/>
+                <a:latin typeface="CMU SERIF ROMAN" panose="02000603000000000000" pitchFamily="2" charset="0"/>
+                <a:ea typeface="CMU SERIF ROMAN" panose="02000603000000000000" pitchFamily="2" charset="0"/>
+                <a:cs typeface="CMU SERIF ROMAN" panose="02000603000000000000" pitchFamily="2" charset="0"/>
               </a:rPr>
               <a:t>We want to:</a:t>
             </a:r>
@@ -10137,8 +10306,9 @@
           <a:p>
             <a:r>
               <a:rPr lang="en-US" dirty="0">
-                <a:ea typeface="+mn-lt"/>
-                <a:cs typeface="+mn-lt"/>
+                <a:latin typeface="CMU Serif Roman" panose="02000603000000000000" pitchFamily="2" charset="0"/>
+                <a:ea typeface="CMU Serif Roman" panose="02000603000000000000" pitchFamily="2" charset="0"/>
+                <a:cs typeface="CMU Serif Roman" panose="02000603000000000000" pitchFamily="2" charset="0"/>
               </a:rPr>
               <a:t>Support researchers across the university to use AI – that's LLMs in this group.</a:t>
             </a:r>
@@ -10146,8 +10316,9 @@
           <a:p>
             <a:r>
               <a:rPr lang="en-US" dirty="0">
-                <a:ea typeface="+mn-lt"/>
-                <a:cs typeface="+mn-lt"/>
+                <a:latin typeface="CMU Serif Roman" panose="02000603000000000000" pitchFamily="2" charset="0"/>
+                <a:ea typeface="CMU Serif Roman" panose="02000603000000000000" pitchFamily="2" charset="0"/>
+                <a:cs typeface="CMU Serif Roman" panose="02000603000000000000" pitchFamily="2" charset="0"/>
               </a:rPr>
               <a:t>Better understand the challenges that researchers face.</a:t>
             </a:r>
@@ -10155,22 +10326,25 @@
           <a:p>
             <a:r>
               <a:rPr lang="en-US" dirty="0">
-                <a:ea typeface="+mn-lt"/>
-                <a:cs typeface="+mn-lt"/>
+                <a:latin typeface="CMU Serif Roman" panose="02000603000000000000" pitchFamily="2" charset="0"/>
+                <a:ea typeface="CMU Serif Roman" panose="02000603000000000000" pitchFamily="2" charset="0"/>
+                <a:cs typeface="CMU Serif Roman" panose="02000603000000000000" pitchFamily="2" charset="0"/>
               </a:rPr>
               <a:t>Identify what training courses or software resources we might want the Accelerate Science </a:t>
             </a:r>
             <a:r>
               <a:rPr lang="en-US" dirty="0" err="1">
-                <a:ea typeface="+mn-lt"/>
-                <a:cs typeface="+mn-lt"/>
+                <a:latin typeface="CMU Serif Roman" panose="02000603000000000000" pitchFamily="2" charset="0"/>
+                <a:ea typeface="CMU Serif Roman" panose="02000603000000000000" pitchFamily="2" charset="0"/>
+                <a:cs typeface="CMU Serif Roman" panose="02000603000000000000" pitchFamily="2" charset="0"/>
               </a:rPr>
               <a:t>Programme</a:t>
             </a:r>
             <a:r>
               <a:rPr lang="en-US" dirty="0">
-                <a:ea typeface="+mn-lt"/>
-                <a:cs typeface="+mn-lt"/>
+                <a:latin typeface="CMU Serif Roman" panose="02000603000000000000" pitchFamily="2" charset="0"/>
+                <a:ea typeface="CMU Serif Roman" panose="02000603000000000000" pitchFamily="2" charset="0"/>
+                <a:cs typeface="CMU Serif Roman" panose="02000603000000000000" pitchFamily="2" charset="0"/>
               </a:rPr>
               <a:t> to create.</a:t>
             </a:r>
@@ -10182,8 +10356,9 @@
             </a:pPr>
             <a:r>
               <a:rPr lang="en-US" dirty="0">
-                <a:ea typeface="+mn-lt"/>
-                <a:cs typeface="+mn-lt"/>
+                <a:latin typeface="CMU Serif Roman" panose="02000603000000000000" pitchFamily="2" charset="0"/>
+                <a:ea typeface="CMU Serif Roman" panose="02000603000000000000" pitchFamily="2" charset="0"/>
+                <a:cs typeface="CMU Serif Roman" panose="02000603000000000000" pitchFamily="2" charset="0"/>
               </a:rPr>
               <a:t>Including shared code</a:t>
             </a:r>
@@ -10191,12 +10366,12 @@
           <a:p>
             <a:r>
               <a:rPr lang="en-US" dirty="0">
-                <a:ea typeface="+mn-lt"/>
-                <a:cs typeface="+mn-lt"/>
+                <a:latin typeface="CMU Serif Roman" panose="02000603000000000000" pitchFamily="2" charset="0"/>
+                <a:ea typeface="CMU Serif Roman" panose="02000603000000000000" pitchFamily="2" charset="0"/>
+                <a:cs typeface="CMU Serif Roman" panose="02000603000000000000" pitchFamily="2" charset="0"/>
               </a:rPr>
               <a:t>Start to build a community of like-minded researchers across the university.</a:t>
             </a:r>
-            <a:endParaRPr lang="en-US" dirty="0"/>
           </a:p>
         </p:txBody>
       </p:sp>
@@ -10213,7 +10388,7 @@
 </p:sld>
 </file>
 
-<file path=ppt/slides/slide4.xml><?xml version="1.0" encoding="utf-8"?>
+<file path=ppt/slides/slide5.xml><?xml version="1.0" encoding="utf-8"?>
 <p:sld xmlns:a="http://schemas.openxmlformats.org/drawingml/2006/main" xmlns:r="http://schemas.openxmlformats.org/officeDocument/2006/relationships" xmlns:p="http://schemas.openxmlformats.org/presentationml/2006/main">
   <p:cSld>
     <p:spTree>
@@ -10252,7 +10427,11 @@
           <a:lstStyle/>
           <a:p>
             <a:r>
-              <a:rPr lang="en-US" dirty="0"/>
+              <a:rPr lang="en-US" dirty="0">
+                <a:latin typeface="CMU Serif Roman" panose="02000603000000000000" pitchFamily="2" charset="0"/>
+                <a:ea typeface="CMU Serif Roman" panose="02000603000000000000" pitchFamily="2" charset="0"/>
+                <a:cs typeface="CMU Serif Roman" panose="02000603000000000000" pitchFamily="2" charset="0"/>
+              </a:rPr>
               <a:t>Schedule</a:t>
             </a:r>
           </a:p>
@@ -10274,7 +10453,7 @@
             <p:ph idx="1"/>
             <p:extLst>
               <p:ext uri="{D42A27DB-BD31-4B8C-83A1-F6EECF244321}">
-                <p14:modId xmlns:p14="http://schemas.microsoft.com/office/powerpoint/2010/main" val="566401051"/>
+                <p14:modId xmlns:p14="http://schemas.microsoft.com/office/powerpoint/2010/main" val="3526604962"/>
               </p:ext>
             </p:extLst>
           </p:nvPr>
@@ -10287,7 +10466,7 @@
           <a:graphicData uri="http://schemas.openxmlformats.org/drawingml/2006/table">
             <a:tbl>
               <a:tblPr firstRow="1" bandRow="1">
-                <a:tableStyleId>{5C22544A-7EE6-4342-B048-85BDC9FD1C3A}</a:tableStyleId>
+                <a:tableStyleId>{5940675A-B579-460E-94D1-54222C63F5DA}</a:tableStyleId>
               </a:tblPr>
               <a:tblGrid>
                 <a:gridCol w="5257800">
@@ -10312,12 +10491,22 @@
                     <a:lstStyle/>
                     <a:p>
                       <a:r>
-                        <a:rPr lang="en-US" dirty="0"/>
+                        <a:rPr lang="en-US" dirty="0">
+                          <a:latin typeface="CMU Serif Roman" panose="02000603000000000000" pitchFamily="2" charset="0"/>
+                          <a:ea typeface="CMU Serif Roman" panose="02000603000000000000" pitchFamily="2" charset="0"/>
+                          <a:cs typeface="CMU Serif Roman" panose="02000603000000000000" pitchFamily="2" charset="0"/>
+                        </a:rPr>
                         <a:t>Session</a:t>
                       </a:r>
                     </a:p>
                   </a:txBody>
-                  <a:tcPr/>
+                  <a:tcPr>
+                    <a:solidFill>
+                      <a:schemeClr val="bg2">
+                        <a:lumMod val="90000"/>
+                      </a:schemeClr>
+                    </a:solidFill>
+                  </a:tcPr>
                 </a:tc>
                 <a:tc>
                   <a:txBody>
@@ -10325,12 +10514,22 @@
                     <a:lstStyle/>
                     <a:p>
                       <a:r>
-                        <a:rPr lang="en-US" dirty="0"/>
+                        <a:rPr lang="en-US" dirty="0">
+                          <a:latin typeface="CMU Serif Roman" panose="02000603000000000000" pitchFamily="2" charset="0"/>
+                          <a:ea typeface="CMU Serif Roman" panose="02000603000000000000" pitchFamily="2" charset="0"/>
+                          <a:cs typeface="CMU Serif Roman" panose="02000603000000000000" pitchFamily="2" charset="0"/>
+                        </a:rPr>
                         <a:t>Time</a:t>
                       </a:r>
                     </a:p>
                   </a:txBody>
-                  <a:tcPr/>
+                  <a:tcPr>
+                    <a:solidFill>
+                      <a:schemeClr val="bg2">
+                        <a:lumMod val="90000"/>
+                      </a:schemeClr>
+                    </a:solidFill>
+                  </a:tcPr>
                 </a:tc>
                 <a:extLst>
                   <a:ext uri="{0D108BD9-81ED-4DB2-BD59-A6C34878D82A}">
@@ -10347,8 +10546,11 @@
                       <a:r>
                         <a:rPr lang="en-US" dirty="0">
                           <a:solidFill>
-                            <a:srgbClr val="7030A0"/>
+                            <a:srgbClr val="1B55EB"/>
                           </a:solidFill>
+                          <a:latin typeface="CMU Serif Roman" panose="02000603000000000000" pitchFamily="2" charset="0"/>
+                          <a:ea typeface="CMU Serif Roman" panose="02000603000000000000" pitchFamily="2" charset="0"/>
+                          <a:cs typeface="CMU Serif Roman" panose="02000603000000000000" pitchFamily="2" charset="0"/>
                         </a:rPr>
                         <a:t>9:30 – 10:30</a:t>
                       </a:r>
@@ -10364,8 +10566,11 @@
                       <a:r>
                         <a:rPr lang="en-US" dirty="0">
                           <a:solidFill>
-                            <a:srgbClr val="7030A0"/>
+                            <a:srgbClr val="1B55EB"/>
                           </a:solidFill>
+                          <a:latin typeface="CMU Serif Roman" panose="02000603000000000000" pitchFamily="2" charset="0"/>
+                          <a:ea typeface="CMU Serif Roman" panose="02000603000000000000" pitchFamily="2" charset="0"/>
+                          <a:cs typeface="CMU Serif Roman" panose="02000603000000000000" pitchFamily="2" charset="0"/>
                         </a:rPr>
                         <a:t>Session 1</a:t>
                       </a:r>
@@ -10386,7 +10591,11 @@
                     <a:lstStyle/>
                     <a:p>
                       <a:r>
-                        <a:rPr lang="en-US" b="1" dirty="0"/>
+                        <a:rPr lang="en-US" b="1" dirty="0">
+                          <a:latin typeface="CMU SERIF ROMAN" panose="02000603000000000000" pitchFamily="2" charset="0"/>
+                          <a:ea typeface="CMU SERIF ROMAN" panose="02000603000000000000" pitchFamily="2" charset="0"/>
+                          <a:cs typeface="CMU SERIF ROMAN" panose="02000603000000000000" pitchFamily="2" charset="0"/>
+                        </a:rPr>
                         <a:t>10:30 – 11:00</a:t>
                       </a:r>
                     </a:p>
@@ -10399,7 +10608,11 @@
                     <a:lstStyle/>
                     <a:p>
                       <a:r>
-                        <a:rPr lang="en-US" b="1" dirty="0"/>
+                        <a:rPr lang="en-US" b="1" dirty="0">
+                          <a:latin typeface="CMU SERIF ROMAN" panose="02000603000000000000" pitchFamily="2" charset="0"/>
+                          <a:ea typeface="CMU SERIF ROMAN" panose="02000603000000000000" pitchFamily="2" charset="0"/>
+                          <a:cs typeface="CMU SERIF ROMAN" panose="02000603000000000000" pitchFamily="2" charset="0"/>
+                        </a:rPr>
                         <a:t>Break</a:t>
                       </a:r>
                     </a:p>
@@ -10421,8 +10634,11 @@
                       <a:r>
                         <a:rPr lang="en-US" dirty="0">
                           <a:solidFill>
-                            <a:srgbClr val="7030A0"/>
+                            <a:srgbClr val="1B55EB"/>
                           </a:solidFill>
+                          <a:latin typeface="CMU Serif Roman" panose="02000603000000000000" pitchFamily="2" charset="0"/>
+                          <a:ea typeface="CMU Serif Roman" panose="02000603000000000000" pitchFamily="2" charset="0"/>
+                          <a:cs typeface="CMU Serif Roman" panose="02000603000000000000" pitchFamily="2" charset="0"/>
                         </a:rPr>
                         <a:t>11:00 – 12:30</a:t>
                       </a:r>
@@ -10438,8 +10654,11 @@
                       <a:r>
                         <a:rPr lang="en-US" dirty="0">
                           <a:solidFill>
-                            <a:srgbClr val="7030A0"/>
+                            <a:srgbClr val="1B55EB"/>
                           </a:solidFill>
+                          <a:latin typeface="CMU Serif Roman" panose="02000603000000000000" pitchFamily="2" charset="0"/>
+                          <a:ea typeface="CMU Serif Roman" panose="02000603000000000000" pitchFamily="2" charset="0"/>
+                          <a:cs typeface="CMU Serif Roman" panose="02000603000000000000" pitchFamily="2" charset="0"/>
                         </a:rPr>
                         <a:t>Session 2</a:t>
                       </a:r>
@@ -10460,7 +10679,11 @@
                     <a:lstStyle/>
                     <a:p>
                       <a:r>
-                        <a:rPr lang="en-US" b="1" dirty="0"/>
+                        <a:rPr lang="en-US" b="1" dirty="0">
+                          <a:latin typeface="CMU SERIF ROMAN" panose="02000603000000000000" pitchFamily="2" charset="0"/>
+                          <a:ea typeface="CMU SERIF ROMAN" panose="02000603000000000000" pitchFamily="2" charset="0"/>
+                          <a:cs typeface="CMU SERIF ROMAN" panose="02000603000000000000" pitchFamily="2" charset="0"/>
+                        </a:rPr>
                         <a:t>12:30 – 13:30</a:t>
                       </a:r>
                     </a:p>
@@ -10473,7 +10696,11 @@
                     <a:lstStyle/>
                     <a:p>
                       <a:r>
-                        <a:rPr lang="en-US" b="1" dirty="0"/>
+                        <a:rPr lang="en-US" b="1" dirty="0">
+                          <a:latin typeface="CMU SERIF ROMAN" panose="02000603000000000000" pitchFamily="2" charset="0"/>
+                          <a:ea typeface="CMU SERIF ROMAN" panose="02000603000000000000" pitchFamily="2" charset="0"/>
+                          <a:cs typeface="CMU SERIF ROMAN" panose="02000603000000000000" pitchFamily="2" charset="0"/>
+                        </a:rPr>
                         <a:t>Lunch</a:t>
                       </a:r>
                     </a:p>
@@ -10495,8 +10722,11 @@
                       <a:r>
                         <a:rPr lang="en-US" dirty="0">
                           <a:solidFill>
-                            <a:srgbClr val="7030A0"/>
+                            <a:srgbClr val="1B55EB"/>
                           </a:solidFill>
+                          <a:latin typeface="CMU Serif Roman" panose="02000603000000000000" pitchFamily="2" charset="0"/>
+                          <a:ea typeface="CMU Serif Roman" panose="02000603000000000000" pitchFamily="2" charset="0"/>
+                          <a:cs typeface="CMU Serif Roman" panose="02000603000000000000" pitchFamily="2" charset="0"/>
                         </a:rPr>
                         <a:t>13:30 – 15:00</a:t>
                       </a:r>
@@ -10512,8 +10742,11 @@
                       <a:r>
                         <a:rPr lang="en-US" dirty="0">
                           <a:solidFill>
-                            <a:srgbClr val="7030A0"/>
+                            <a:srgbClr val="1B55EB"/>
                           </a:solidFill>
+                          <a:latin typeface="CMU Serif Roman" panose="02000603000000000000" pitchFamily="2" charset="0"/>
+                          <a:ea typeface="CMU Serif Roman" panose="02000603000000000000" pitchFamily="2" charset="0"/>
+                          <a:cs typeface="CMU Serif Roman" panose="02000603000000000000" pitchFamily="2" charset="0"/>
                         </a:rPr>
                         <a:t>Session 3</a:t>
                       </a:r>
@@ -10537,7 +10770,11 @@
                         <a:buNone/>
                       </a:pPr>
                       <a:r>
-                        <a:rPr lang="en-US" b="1" dirty="0"/>
+                        <a:rPr lang="en-US" b="1" dirty="0">
+                          <a:latin typeface="CMU SERIF ROMAN" panose="02000603000000000000" pitchFamily="2" charset="0"/>
+                          <a:ea typeface="CMU SERIF ROMAN" panose="02000603000000000000" pitchFamily="2" charset="0"/>
+                          <a:cs typeface="CMU SERIF ROMAN" panose="02000603000000000000" pitchFamily="2" charset="0"/>
+                        </a:rPr>
                         <a:t>15:00 – 15:30</a:t>
                       </a:r>
                     </a:p>
@@ -10553,7 +10790,11 @@
                         <a:buNone/>
                       </a:pPr>
                       <a:r>
-                        <a:rPr lang="en-US" b="1" dirty="0"/>
+                        <a:rPr lang="en-US" b="1" dirty="0">
+                          <a:latin typeface="CMU SERIF ROMAN" panose="02000603000000000000" pitchFamily="2" charset="0"/>
+                          <a:ea typeface="CMU SERIF ROMAN" panose="02000603000000000000" pitchFamily="2" charset="0"/>
+                          <a:cs typeface="CMU SERIF ROMAN" panose="02000603000000000000" pitchFamily="2" charset="0"/>
+                        </a:rPr>
                         <a:t>Break</a:t>
                       </a:r>
                     </a:p>
@@ -10578,8 +10819,11 @@
                       <a:r>
                         <a:rPr lang="en-US" dirty="0">
                           <a:solidFill>
-                            <a:srgbClr val="7030A0"/>
+                            <a:srgbClr val="1B55EB"/>
                           </a:solidFill>
+                          <a:latin typeface="CMU Serif Roman" panose="02000603000000000000" pitchFamily="2" charset="0"/>
+                          <a:ea typeface="CMU Serif Roman" panose="02000603000000000000" pitchFamily="2" charset="0"/>
+                          <a:cs typeface="CMU Serif Roman" panose="02000603000000000000" pitchFamily="2" charset="0"/>
                         </a:rPr>
                         <a:t>15:30 – 17:00</a:t>
                       </a:r>
@@ -10598,8 +10842,11 @@
                       <a:r>
                         <a:rPr lang="en-US" dirty="0">
                           <a:solidFill>
-                            <a:srgbClr val="7030A0"/>
+                            <a:srgbClr val="1B55EB"/>
                           </a:solidFill>
+                          <a:latin typeface="CMU Serif Roman" panose="02000603000000000000" pitchFamily="2" charset="0"/>
+                          <a:ea typeface="CMU Serif Roman" panose="02000603000000000000" pitchFamily="2" charset="0"/>
+                          <a:cs typeface="CMU Serif Roman" panose="02000603000000000000" pitchFamily="2" charset="0"/>
                         </a:rPr>
                         <a:t>Session 4</a:t>
                       </a:r>
@@ -10633,7 +10880,7 @@
         </p:nvSpPr>
         <p:spPr>
           <a:xfrm>
-            <a:off x="838200" y="5196522"/>
+            <a:off x="838200" y="5013642"/>
             <a:ext cx="10515600" cy="1661477"/>
           </a:xfrm>
           <a:prstGeom prst="rect">
@@ -10819,6 +11066,9 @@
                     <a:lumMod val="50000"/>
                   </a:schemeClr>
                 </a:solidFill>
+                <a:latin typeface="CMU Serif Roman" panose="02000603000000000000" pitchFamily="2" charset="0"/>
+                <a:ea typeface="CMU Serif Roman" panose="02000603000000000000" pitchFamily="2" charset="0"/>
+                <a:cs typeface="CMU Serif Roman" panose="02000603000000000000" pitchFamily="2" charset="0"/>
               </a:rPr>
               <a:t>Slides available at:</a:t>
             </a:r>
@@ -10834,6 +11084,9 @@
                     <a:lumMod val="50000"/>
                   </a:schemeClr>
                 </a:solidFill>
+                <a:latin typeface="CMU SERIF ROMAN" panose="02000603000000000000" pitchFamily="2" charset="0"/>
+                <a:ea typeface="CMU SERIF ROMAN" panose="02000603000000000000" pitchFamily="2" charset="0"/>
+                <a:cs typeface="CMU SERIF ROMAN" panose="02000603000000000000" pitchFamily="2" charset="0"/>
               </a:rPr>
               <a:t>docs.science.ai.cam.ac.uk</a:t>
             </a:r>
@@ -10844,6 +11097,9 @@
                     <a:lumMod val="50000"/>
                   </a:schemeClr>
                 </a:solidFill>
+                <a:latin typeface="CMU SERIF ROMAN" panose="02000603000000000000" pitchFamily="2" charset="0"/>
+                <a:ea typeface="CMU SERIF ROMAN" panose="02000603000000000000" pitchFamily="2" charset="0"/>
+                <a:cs typeface="CMU SERIF ROMAN" panose="02000603000000000000" pitchFamily="2" charset="0"/>
               </a:rPr>
               <a:t>/large-language-models/</a:t>
             </a:r>
@@ -10863,7 +11119,7 @@
 </p:sld>
 </file>
 
-<file path=ppt/slides/slide5.xml><?xml version="1.0" encoding="utf-8"?>
+<file path=ppt/slides/slide6.xml><?xml version="1.0" encoding="utf-8"?>
 <p:sld xmlns:a="http://schemas.openxmlformats.org/drawingml/2006/main" xmlns:r="http://schemas.openxmlformats.org/officeDocument/2006/relationships" xmlns:p="http://schemas.openxmlformats.org/presentationml/2006/main">
   <p:cSld>
     <p:spTree>
@@ -10902,7 +11158,11 @@
           <a:lstStyle/>
           <a:p>
             <a:r>
-              <a:rPr lang="en-US" dirty="0"/>
+              <a:rPr lang="en-US" dirty="0">
+                <a:latin typeface="CMU Serif Roman" panose="02000603000000000000" pitchFamily="2" charset="0"/>
+                <a:ea typeface="CMU Serif Roman" panose="02000603000000000000" pitchFamily="2" charset="0"/>
+                <a:cs typeface="CMU Serif Roman" panose="02000603000000000000" pitchFamily="2" charset="0"/>
+              </a:rPr>
               <a:t>Before we begin...</a:t>
             </a:r>
           </a:p>
@@ -10935,7 +11195,11 @@
               <a:buNone/>
             </a:pPr>
             <a:r>
-              <a:rPr lang="en-US"/>
+              <a:rPr lang="en-US" dirty="0">
+                <a:latin typeface="CMU Serif Roman" panose="02000603000000000000" pitchFamily="2" charset="0"/>
+                <a:ea typeface="CMU Serif Roman" panose="02000603000000000000" pitchFamily="2" charset="0"/>
+                <a:cs typeface="CMU Serif Roman" panose="02000603000000000000" pitchFamily="2" charset="0"/>
+              </a:rPr>
               <a:t>What do you know about LLMs...?</a:t>
             </a:r>
           </a:p>
@@ -10943,7 +11207,11 @@
             <a:pPr marL="0" indent="0">
               <a:buNone/>
             </a:pPr>
-            <a:endParaRPr lang="en-US" dirty="0"/>
+            <a:endParaRPr lang="en-US" dirty="0">
+              <a:latin typeface="CMU Serif Roman" panose="02000603000000000000" pitchFamily="2" charset="0"/>
+              <a:ea typeface="CMU Serif Roman" panose="02000603000000000000" pitchFamily="2" charset="0"/>
+              <a:cs typeface="CMU Serif Roman" panose="02000603000000000000" pitchFamily="2" charset="0"/>
+            </a:endParaRPr>
           </a:p>
           <a:p>
             <a:pPr>
@@ -10951,7 +11219,11 @@
               <a:buChar char="-"/>
             </a:pPr>
             <a:r>
-              <a:rPr lang="en-US" i="1" dirty="0"/>
+              <a:rPr lang="en-US" dirty="0">
+                <a:latin typeface="CMU Serif Roman" panose="02000603000000000000" pitchFamily="2" charset="0"/>
+                <a:ea typeface="CMU Serif Roman" panose="02000603000000000000" pitchFamily="2" charset="0"/>
+                <a:cs typeface="CMU Serif Roman" panose="02000603000000000000" pitchFamily="2" charset="0"/>
+              </a:rPr>
               <a:t>How do they work?</a:t>
             </a:r>
           </a:p>
@@ -10961,7 +11233,11 @@
               <a:buChar char="-"/>
             </a:pPr>
             <a:r>
-              <a:rPr lang="en-US" i="1" dirty="0"/>
+              <a:rPr lang="en-US" dirty="0">
+                <a:latin typeface="CMU Serif Roman" panose="02000603000000000000" pitchFamily="2" charset="0"/>
+                <a:ea typeface="CMU Serif Roman" panose="02000603000000000000" pitchFamily="2" charset="0"/>
+                <a:cs typeface="CMU Serif Roman" panose="02000603000000000000" pitchFamily="2" charset="0"/>
+              </a:rPr>
               <a:t>Can you name any?</a:t>
             </a:r>
           </a:p>
@@ -10971,7 +11247,11 @@
               <a:buChar char="-"/>
             </a:pPr>
             <a:r>
-              <a:rPr lang="en-US" i="1" dirty="0"/>
+              <a:rPr lang="en-US" dirty="0">
+                <a:latin typeface="CMU Serif Roman" panose="02000603000000000000" pitchFamily="2" charset="0"/>
+                <a:ea typeface="CMU Serif Roman" panose="02000603000000000000" pitchFamily="2" charset="0"/>
+                <a:cs typeface="CMU Serif Roman" panose="02000603000000000000" pitchFamily="2" charset="0"/>
+              </a:rPr>
               <a:t>What can you use them for?</a:t>
             </a:r>
           </a:p>
@@ -10981,10 +11261,13 @@
               <a:buChar char="-"/>
             </a:pPr>
             <a:r>
-              <a:rPr lang="en-US" i="1"/>
+              <a:rPr lang="en-US" dirty="0">
+                <a:latin typeface="CMU Serif Roman" panose="02000603000000000000" pitchFamily="2" charset="0"/>
+                <a:ea typeface="CMU Serif Roman" panose="02000603000000000000" pitchFamily="2" charset="0"/>
+                <a:cs typeface="CMU Serif Roman" panose="02000603000000000000" pitchFamily="2" charset="0"/>
+              </a:rPr>
               <a:t>What are potential problems?</a:t>
             </a:r>
-            <a:endParaRPr lang="en-US" i="1" dirty="0"/>
           </a:p>
           <a:p>
             <a:pPr>
@@ -10992,15 +11275,27 @@
               <a:buChar char="-"/>
             </a:pPr>
             <a:r>
-              <a:rPr lang="en-US" i="1" dirty="0"/>
+              <a:rPr lang="en-US" dirty="0">
+                <a:latin typeface="CMU Serif Roman" panose="02000603000000000000" pitchFamily="2" charset="0"/>
+                <a:ea typeface="CMU Serif Roman" panose="02000603000000000000" pitchFamily="2" charset="0"/>
+                <a:cs typeface="CMU Serif Roman" panose="02000603000000000000" pitchFamily="2" charset="0"/>
+              </a:rPr>
               <a:t>What do </a:t>
             </a:r>
             <a:r>
-              <a:rPr lang="en-US" b="1" i="1" dirty="0"/>
+              <a:rPr lang="en-US" b="1" dirty="0">
+                <a:latin typeface="CMU SERIF ROMAN" panose="02000603000000000000" pitchFamily="2" charset="0"/>
+                <a:ea typeface="CMU SERIF ROMAN" panose="02000603000000000000" pitchFamily="2" charset="0"/>
+                <a:cs typeface="CMU SERIF ROMAN" panose="02000603000000000000" pitchFamily="2" charset="0"/>
+              </a:rPr>
               <a:t>you </a:t>
             </a:r>
             <a:r>
-              <a:rPr lang="en-US" i="1" dirty="0"/>
+              <a:rPr lang="en-US" dirty="0">
+                <a:latin typeface="CMU Serif Roman" panose="02000603000000000000" pitchFamily="2" charset="0"/>
+                <a:ea typeface="CMU Serif Roman" panose="02000603000000000000" pitchFamily="2" charset="0"/>
+                <a:cs typeface="CMU Serif Roman" panose="02000603000000000000" pitchFamily="2" charset="0"/>
+              </a:rPr>
               <a:t>want to use them for?</a:t>
             </a:r>
           </a:p>
@@ -11346,7 +11641,7 @@
 </p:sld>
 </file>
 
-<file path=ppt/slides/slide6.xml><?xml version="1.0" encoding="utf-8"?>
+<file path=ppt/slides/slide7.xml><?xml version="1.0" encoding="utf-8"?>
 <p:sld xmlns:a="http://schemas.openxmlformats.org/drawingml/2006/main" xmlns:r="http://schemas.openxmlformats.org/officeDocument/2006/relationships" xmlns:p="http://schemas.openxmlformats.org/presentationml/2006/main">
   <p:cSld>
     <p:spTree>
@@ -11379,14 +11674,15 @@
         </p:nvPicPr>
         <p:blipFill>
           <a:blip r:embed="rId3"/>
+          <a:srcRect b="10767"/>
           <a:stretch>
             <a:fillRect/>
           </a:stretch>
         </p:blipFill>
         <p:spPr>
           <a:xfrm>
-            <a:off x="3653518" y="659947"/>
-            <a:ext cx="4401911" cy="6613071"/>
+            <a:off x="3575146" y="244930"/>
+            <a:ext cx="4401911" cy="5901038"/>
           </a:xfrm>
           <a:prstGeom prst="rect">
             <a:avLst/>
@@ -11415,8 +11711,12 @@
           <a:lstStyle/>
           <a:p>
             <a:r>
-              <a:rPr lang="en-US" dirty="0"/>
-              <a:t>Here is a Llama...</a:t>
+              <a:rPr lang="en-US" dirty="0">
+                <a:latin typeface="CMU Serif Roman" panose="02000603000000000000" pitchFamily="2" charset="0"/>
+                <a:ea typeface="CMU Serif Roman" panose="02000603000000000000" pitchFamily="2" charset="0"/>
+                <a:cs typeface="CMU Serif Roman" panose="02000603000000000000" pitchFamily="2" charset="0"/>
+              </a:rPr>
+              <a:t>The Llama...</a:t>
             </a:r>
           </a:p>
         </p:txBody>
@@ -11435,7 +11735,7 @@
         </p:nvSpPr>
         <p:spPr>
           <a:xfrm>
-            <a:off x="3913290" y="2504332"/>
+            <a:off x="3834918" y="2089314"/>
             <a:ext cx="457200" cy="457200"/>
           </a:xfrm>
           <a:custGeom>
@@ -11527,6 +11827,9 @@
             </a:pathLst>
           </a:custGeom>
           <a:ln w="57150">
+            <a:solidFill>
+              <a:srgbClr val="1B55EB"/>
+            </a:solidFill>
             <a:extLst>
               <a:ext uri="{C807C97D-BFC1-408E-A445-0C87EB9F89A2}">
                 <ask:lineSketchStyleProps xmlns:ask="http://schemas.microsoft.com/office/drawing/2018/sketchyshapes" sd="3499211612">
@@ -11561,7 +11864,11 @@
           <a:p>
             <a:pPr algn="ctr"/>
             <a:r>
-              <a:rPr lang="en-US" dirty="0"/>
+              <a:rPr lang="en-US" dirty="0">
+                <a:latin typeface="CMU Serif Roman" panose="02000603000000000000" pitchFamily="2" charset="0"/>
+                <a:ea typeface="CMU Serif Roman" panose="02000603000000000000" pitchFamily="2" charset="0"/>
+                <a:cs typeface="CMU Serif Roman" panose="02000603000000000000" pitchFamily="2" charset="0"/>
+              </a:rPr>
               <a:t>1</a:t>
             </a:r>
           </a:p>
@@ -11581,7 +11888,7 @@
         </p:nvCxnSpPr>
         <p:spPr>
           <a:xfrm>
-            <a:off x="4368511" y="2734417"/>
+            <a:off x="4290139" y="2319399"/>
             <a:ext cx="620485" cy="920339"/>
           </a:xfrm>
           <a:prstGeom prst="curvedConnector3">
@@ -11622,7 +11929,7 @@
         </p:nvCxnSpPr>
         <p:spPr>
           <a:xfrm>
-            <a:off x="5443475" y="3666506"/>
+            <a:off x="5365103" y="3251488"/>
             <a:ext cx="409574" cy="838695"/>
           </a:xfrm>
           <a:prstGeom prst="curvedConnector3">
@@ -11663,7 +11970,7 @@
         </p:nvCxnSpPr>
         <p:spPr>
           <a:xfrm>
-            <a:off x="6307528" y="4496542"/>
+            <a:off x="6229156" y="4081524"/>
             <a:ext cx="810985" cy="8660"/>
           </a:xfrm>
           <a:prstGeom prst="curvedConnector3">
@@ -11702,7 +12009,7 @@
         </p:nvSpPr>
         <p:spPr>
           <a:xfrm>
-            <a:off x="4988253" y="3429617"/>
+            <a:off x="4909881" y="3014599"/>
             <a:ext cx="457200" cy="457200"/>
           </a:xfrm>
           <a:custGeom>
@@ -11794,6 +12101,9 @@
             </a:pathLst>
           </a:custGeom>
           <a:ln w="57150">
+            <a:solidFill>
+              <a:srgbClr val="1B55EB"/>
+            </a:solidFill>
             <a:extLst>
               <a:ext uri="{C807C97D-BFC1-408E-A445-0C87EB9F89A2}">
                 <ask:lineSketchStyleProps xmlns:ask="http://schemas.microsoft.com/office/drawing/2018/sketchyshapes" sd="3499211612">
@@ -11828,7 +12138,11 @@
           <a:p>
             <a:pPr algn="ctr"/>
             <a:r>
-              <a:rPr lang="en-US" dirty="0"/>
+              <a:rPr lang="en-US" dirty="0">
+                <a:latin typeface="CMU Serif Roman" panose="02000603000000000000" pitchFamily="2" charset="0"/>
+                <a:ea typeface="CMU Serif Roman" panose="02000603000000000000" pitchFamily="2" charset="0"/>
+                <a:cs typeface="CMU Serif Roman" panose="02000603000000000000" pitchFamily="2" charset="0"/>
+              </a:rPr>
               <a:t>2</a:t>
             </a:r>
           </a:p>
@@ -11848,7 +12162,7 @@
         </p:nvSpPr>
         <p:spPr>
           <a:xfrm>
-            <a:off x="5852306" y="4266456"/>
+            <a:off x="5773934" y="3851438"/>
             <a:ext cx="457200" cy="457200"/>
           </a:xfrm>
           <a:custGeom>
@@ -11940,6 +12254,9 @@
             </a:pathLst>
           </a:custGeom>
           <a:ln w="57150">
+            <a:solidFill>
+              <a:srgbClr val="1B55EB"/>
+            </a:solidFill>
             <a:extLst>
               <a:ext uri="{C807C97D-BFC1-408E-A445-0C87EB9F89A2}">
                 <ask:lineSketchStyleProps xmlns:ask="http://schemas.microsoft.com/office/drawing/2018/sketchyshapes" sd="3499211612">
@@ -11974,7 +12291,11 @@
           <a:p>
             <a:pPr algn="ctr"/>
             <a:r>
-              <a:rPr lang="en-US" dirty="0"/>
+              <a:rPr lang="en-US" dirty="0">
+                <a:latin typeface="CMU Serif Roman" panose="02000603000000000000" pitchFamily="2" charset="0"/>
+                <a:ea typeface="CMU Serif Roman" panose="02000603000000000000" pitchFamily="2" charset="0"/>
+                <a:cs typeface="CMU Serif Roman" panose="02000603000000000000" pitchFamily="2" charset="0"/>
+              </a:rPr>
               <a:t>3</a:t>
             </a:r>
           </a:p>
@@ -11994,7 +12315,7 @@
         </p:nvSpPr>
         <p:spPr>
           <a:xfrm>
-            <a:off x="7117770" y="4266456"/>
+            <a:off x="7039398" y="3851438"/>
             <a:ext cx="457200" cy="457200"/>
           </a:xfrm>
           <a:custGeom>
@@ -12086,6 +12407,9 @@
             </a:pathLst>
           </a:custGeom>
           <a:ln w="57150">
+            <a:solidFill>
+              <a:srgbClr val="1B55EB"/>
+            </a:solidFill>
             <a:extLst>
               <a:ext uri="{C807C97D-BFC1-408E-A445-0C87EB9F89A2}">
                 <ask:lineSketchStyleProps xmlns:ask="http://schemas.microsoft.com/office/drawing/2018/sketchyshapes" sd="3499211612">
@@ -12120,7 +12444,11 @@
           <a:p>
             <a:pPr algn="ctr"/>
             <a:r>
-              <a:rPr lang="en-US" dirty="0"/>
+              <a:rPr lang="en-US" dirty="0">
+                <a:latin typeface="CMU Serif Roman" panose="02000603000000000000" pitchFamily="2" charset="0"/>
+                <a:ea typeface="CMU Serif Roman" panose="02000603000000000000" pitchFamily="2" charset="0"/>
+                <a:cs typeface="CMU Serif Roman" panose="02000603000000000000" pitchFamily="2" charset="0"/>
+              </a:rPr>
               <a:t>4</a:t>
             </a:r>
           </a:p>
@@ -12232,6 +12560,9 @@
             </a:pathLst>
           </a:custGeom>
           <a:ln w="57150">
+            <a:solidFill>
+              <a:srgbClr val="1B55EB"/>
+            </a:solidFill>
             <a:extLst>
               <a:ext uri="{C807C97D-BFC1-408E-A445-0C87EB9F89A2}">
                 <ask:lineSketchStyleProps xmlns:ask="http://schemas.microsoft.com/office/drawing/2018/sketchyshapes" sd="3499211612">
@@ -12266,7 +12597,11 @@
           <a:p>
             <a:pPr algn="ctr"/>
             <a:r>
-              <a:rPr lang="en-US" dirty="0"/>
+              <a:rPr lang="en-US" dirty="0">
+                <a:latin typeface="CMU Serif Roman" panose="02000603000000000000" pitchFamily="2" charset="0"/>
+                <a:ea typeface="CMU Serif Roman" panose="02000603000000000000" pitchFamily="2" charset="0"/>
+                <a:cs typeface="CMU Serif Roman" panose="02000603000000000000" pitchFamily="2" charset="0"/>
+              </a:rPr>
               <a:t>1</a:t>
             </a:r>
           </a:p>
@@ -12378,6 +12713,9 @@
             </a:pathLst>
           </a:custGeom>
           <a:ln w="57150">
+            <a:solidFill>
+              <a:srgbClr val="1B55EB"/>
+            </a:solidFill>
             <a:extLst>
               <a:ext uri="{C807C97D-BFC1-408E-A445-0C87EB9F89A2}">
                 <ask:lineSketchStyleProps xmlns:ask="http://schemas.microsoft.com/office/drawing/2018/sketchyshapes" sd="3499211612">
@@ -12412,7 +12750,11 @@
           <a:p>
             <a:pPr algn="ctr"/>
             <a:r>
-              <a:rPr lang="en-US" dirty="0"/>
+              <a:rPr lang="en-US" dirty="0">
+                <a:latin typeface="CMU Serif Roman" panose="02000603000000000000" pitchFamily="2" charset="0"/>
+                <a:ea typeface="CMU Serif Roman" panose="02000603000000000000" pitchFamily="2" charset="0"/>
+                <a:cs typeface="CMU Serif Roman" panose="02000603000000000000" pitchFamily="2" charset="0"/>
+              </a:rPr>
               <a:t>2</a:t>
             </a:r>
           </a:p>
@@ -12524,6 +12866,9 @@
             </a:pathLst>
           </a:custGeom>
           <a:ln w="57150">
+            <a:solidFill>
+              <a:srgbClr val="1B55EB"/>
+            </a:solidFill>
             <a:extLst>
               <a:ext uri="{C807C97D-BFC1-408E-A445-0C87EB9F89A2}">
                 <ask:lineSketchStyleProps xmlns:ask="http://schemas.microsoft.com/office/drawing/2018/sketchyshapes" sd="3499211612">
@@ -12558,7 +12903,11 @@
           <a:p>
             <a:pPr algn="ctr"/>
             <a:r>
-              <a:rPr lang="en-US" dirty="0"/>
+              <a:rPr lang="en-US" dirty="0">
+                <a:latin typeface="CMU Serif Roman" panose="02000603000000000000" pitchFamily="2" charset="0"/>
+                <a:ea typeface="CMU Serif Roman" panose="02000603000000000000" pitchFamily="2" charset="0"/>
+                <a:cs typeface="CMU Serif Roman" panose="02000603000000000000" pitchFamily="2" charset="0"/>
+              </a:rPr>
               <a:t>3</a:t>
             </a:r>
           </a:p>
@@ -12670,6 +13019,9 @@
             </a:pathLst>
           </a:custGeom>
           <a:ln w="57150">
+            <a:solidFill>
+              <a:srgbClr val="1B55EB"/>
+            </a:solidFill>
             <a:extLst>
               <a:ext uri="{C807C97D-BFC1-408E-A445-0C87EB9F89A2}">
                 <ask:lineSketchStyleProps xmlns:ask="http://schemas.microsoft.com/office/drawing/2018/sketchyshapes" sd="3499211612">
@@ -12704,7 +13056,11 @@
           <a:p>
             <a:pPr algn="ctr"/>
             <a:r>
-              <a:rPr lang="en-US" dirty="0"/>
+              <a:rPr lang="en-US" dirty="0">
+                <a:latin typeface="CMU Serif Roman" panose="02000603000000000000" pitchFamily="2" charset="0"/>
+                <a:ea typeface="CMU Serif Roman" panose="02000603000000000000" pitchFamily="2" charset="0"/>
+                <a:cs typeface="CMU Serif Roman" panose="02000603000000000000" pitchFamily="2" charset="0"/>
+              </a:rPr>
               <a:t>4</a:t>
             </a:r>
           </a:p>
@@ -12906,6 +13262,9 @@
             </a:pathLst>
           </a:custGeom>
           <a:ln w="28575">
+            <a:solidFill>
+              <a:srgbClr val="1B55EB"/>
+            </a:solidFill>
             <a:extLst>
               <a:ext uri="{C807C97D-BFC1-408E-A445-0C87EB9F89A2}">
                 <ask:lineSketchStyleProps xmlns:ask="http://schemas.microsoft.com/office/drawing/2018/sketchyshapes" sd="283741067">
@@ -12945,7 +13304,11 @@
           <a:p>
             <a:pPr algn="l"/>
             <a:r>
-              <a:rPr lang="en-US" dirty="0"/>
+              <a:rPr lang="en-US" dirty="0">
+                <a:latin typeface="CMU Serif Roman" panose="02000603000000000000" pitchFamily="2" charset="0"/>
+                <a:ea typeface="CMU Serif Roman" panose="02000603000000000000" pitchFamily="2" charset="0"/>
+                <a:cs typeface="CMU Serif Roman" panose="02000603000000000000" pitchFamily="2" charset="0"/>
+              </a:rPr>
               <a:t>Tokenization</a:t>
             </a:r>
           </a:p>
@@ -13147,6 +13510,9 @@
             </a:pathLst>
           </a:custGeom>
           <a:ln w="28575">
+            <a:solidFill>
+              <a:srgbClr val="1B55EB"/>
+            </a:solidFill>
             <a:extLst>
               <a:ext uri="{C807C97D-BFC1-408E-A445-0C87EB9F89A2}">
                 <ask:lineSketchStyleProps xmlns:ask="http://schemas.microsoft.com/office/drawing/2018/sketchyshapes" sd="283741067">
@@ -13186,7 +13552,11 @@
           <a:p>
             <a:pPr algn="l"/>
             <a:r>
-              <a:rPr lang="en-US" dirty="0"/>
+              <a:rPr lang="en-US" dirty="0">
+                <a:latin typeface="CMU Serif Roman" panose="02000603000000000000" pitchFamily="2" charset="0"/>
+                <a:ea typeface="CMU Serif Roman" panose="02000603000000000000" pitchFamily="2" charset="0"/>
+                <a:cs typeface="CMU Serif Roman" panose="02000603000000000000" pitchFamily="2" charset="0"/>
+              </a:rPr>
               <a:t>Embeddings</a:t>
             </a:r>
           </a:p>
@@ -13388,6 +13758,9 @@
             </a:pathLst>
           </a:custGeom>
           <a:ln w="28575">
+            <a:solidFill>
+              <a:srgbClr val="1B55EB"/>
+            </a:solidFill>
             <a:extLst>
               <a:ext uri="{C807C97D-BFC1-408E-A445-0C87EB9F89A2}">
                 <ask:lineSketchStyleProps xmlns:ask="http://schemas.microsoft.com/office/drawing/2018/sketchyshapes" sd="283741067">
@@ -13427,7 +13800,11 @@
           <a:p>
             <a:pPr algn="l"/>
             <a:r>
-              <a:rPr lang="en-US" dirty="0"/>
+              <a:rPr lang="en-US" dirty="0">
+                <a:latin typeface="CMU Serif Roman" panose="02000603000000000000" pitchFamily="2" charset="0"/>
+                <a:ea typeface="CMU Serif Roman" panose="02000603000000000000" pitchFamily="2" charset="0"/>
+                <a:cs typeface="CMU Serif Roman" panose="02000603000000000000" pitchFamily="2" charset="0"/>
+              </a:rPr>
               <a:t>Attention</a:t>
             </a:r>
           </a:p>
@@ -13629,6 +14006,9 @@
             </a:pathLst>
           </a:custGeom>
           <a:ln w="28575">
+            <a:solidFill>
+              <a:srgbClr val="1B55EB"/>
+            </a:solidFill>
             <a:extLst>
               <a:ext uri="{C807C97D-BFC1-408E-A445-0C87EB9F89A2}">
                 <ask:lineSketchStyleProps xmlns:ask="http://schemas.microsoft.com/office/drawing/2018/sketchyshapes" sd="283741067">
@@ -13668,7 +14048,11 @@
           <a:p>
             <a:pPr algn="l"/>
             <a:r>
-              <a:rPr lang="en-US" dirty="0"/>
+              <a:rPr lang="en-US" dirty="0">
+                <a:latin typeface="CMU Serif Roman" panose="02000603000000000000" pitchFamily="2" charset="0"/>
+                <a:ea typeface="CMU Serif Roman" panose="02000603000000000000" pitchFamily="2" charset="0"/>
+                <a:cs typeface="CMU Serif Roman" panose="02000603000000000000" pitchFamily="2" charset="0"/>
+              </a:rPr>
               <a:t>Sampling</a:t>
             </a:r>
           </a:p>
@@ -14208,7 +14592,7 @@
 </p:sld>
 </file>
 
-<file path=ppt/slides/slide7.xml><?xml version="1.0" encoding="utf-8"?>
+<file path=ppt/slides/slide8.xml><?xml version="1.0" encoding="utf-8"?>
 <p:sld xmlns:a="http://schemas.openxmlformats.org/drawingml/2006/main" xmlns:r="http://schemas.openxmlformats.org/officeDocument/2006/relationships" xmlns:p="http://schemas.openxmlformats.org/presentationml/2006/main">
   <p:cSld>
     <p:spTree>
@@ -14259,7 +14643,7 @@
         </p:blipFill>
         <p:spPr>
           <a:xfrm>
-            <a:off x="7903917" y="1396915"/>
+            <a:off x="7918907" y="796925"/>
             <a:ext cx="3797300" cy="5695950"/>
           </a:xfrm>
           <a:prstGeom prst="rect">
@@ -14289,7 +14673,11 @@
           <a:lstStyle/>
           <a:p>
             <a:r>
-              <a:rPr lang="en-US" dirty="0"/>
+              <a:rPr lang="en-US" dirty="0">
+                <a:latin typeface="CMU Serif Roman" panose="02000603000000000000" pitchFamily="2" charset="0"/>
+                <a:ea typeface="CMU Serif Roman" panose="02000603000000000000" pitchFamily="2" charset="0"/>
+                <a:cs typeface="CMU Serif Roman" panose="02000603000000000000" pitchFamily="2" charset="0"/>
+              </a:rPr>
               <a:t>How can we augment them?</a:t>
             </a:r>
           </a:p>
@@ -14322,7 +14710,11 @@
               <a:buNone/>
             </a:pPr>
             <a:r>
-              <a:rPr lang="en-US"/>
+              <a:rPr lang="en-US" dirty="0">
+                <a:latin typeface="CMU Serif Roman" panose="02000603000000000000" pitchFamily="2" charset="0"/>
+                <a:ea typeface="CMU Serif Roman" panose="02000603000000000000" pitchFamily="2" charset="0"/>
+                <a:cs typeface="CMU Serif Roman" panose="02000603000000000000" pitchFamily="2" charset="0"/>
+              </a:rPr>
               <a:t>Session states</a:t>
             </a:r>
           </a:p>
@@ -14331,7 +14723,11 @@
               <a:buNone/>
             </a:pPr>
             <a:r>
-              <a:rPr lang="en-US" dirty="0"/>
+              <a:rPr lang="en-US" dirty="0">
+                <a:latin typeface="CMU Serif Roman" panose="02000603000000000000" pitchFamily="2" charset="0"/>
+                <a:ea typeface="CMU Serif Roman" panose="02000603000000000000" pitchFamily="2" charset="0"/>
+                <a:cs typeface="CMU Serif Roman" panose="02000603000000000000" pitchFamily="2" charset="0"/>
+              </a:rPr>
               <a:t>RAG</a:t>
             </a:r>
           </a:p>
@@ -14340,7 +14736,11 @@
               <a:buNone/>
             </a:pPr>
             <a:r>
-              <a:rPr lang="en-US"/>
+              <a:rPr lang="en-US" dirty="0">
+                <a:latin typeface="CMU Serif Roman" panose="02000603000000000000" pitchFamily="2" charset="0"/>
+                <a:ea typeface="CMU Serif Roman" panose="02000603000000000000" pitchFamily="2" charset="0"/>
+                <a:cs typeface="CMU Serif Roman" panose="02000603000000000000" pitchFamily="2" charset="0"/>
+              </a:rPr>
               <a:t>Prompting</a:t>
             </a:r>
           </a:p>
@@ -14349,7 +14749,11 @@
               <a:buNone/>
             </a:pPr>
             <a:r>
-              <a:rPr lang="en-US"/>
+              <a:rPr lang="en-US" dirty="0">
+                <a:latin typeface="CMU Serif Roman" panose="02000603000000000000" pitchFamily="2" charset="0"/>
+                <a:ea typeface="CMU Serif Roman" panose="02000603000000000000" pitchFamily="2" charset="0"/>
+                <a:cs typeface="CMU Serif Roman" panose="02000603000000000000" pitchFamily="2" charset="0"/>
+              </a:rPr>
               <a:t>Tools</a:t>
             </a:r>
           </a:p>
@@ -14358,7 +14762,11 @@
               <a:buNone/>
             </a:pPr>
             <a:r>
-              <a:rPr lang="en-US" dirty="0"/>
+              <a:rPr lang="en-US" dirty="0">
+                <a:latin typeface="CMU Serif Roman" panose="02000603000000000000" pitchFamily="2" charset="0"/>
+                <a:ea typeface="CMU Serif Roman" panose="02000603000000000000" pitchFamily="2" charset="0"/>
+                <a:cs typeface="CMU Serif Roman" panose="02000603000000000000" pitchFamily="2" charset="0"/>
+              </a:rPr>
               <a:t>Finetuning</a:t>
             </a:r>
           </a:p>
@@ -14708,7 +15116,7 @@
 </p:sld>
 </file>
 
-<file path=ppt/slides/slide8.xml><?xml version="1.0" encoding="utf-8"?>
+<file path=ppt/slides/slide9.xml><?xml version="1.0" encoding="utf-8"?>
 <p:sld xmlns:a="http://schemas.openxmlformats.org/drawingml/2006/main" xmlns:r="http://schemas.openxmlformats.org/officeDocument/2006/relationships" xmlns:p="http://schemas.openxmlformats.org/presentationml/2006/main">
   <p:cSld>
     <p:spTree>
@@ -14741,13 +15149,22 @@
             <p:ph type="title"/>
           </p:nvPr>
         </p:nvSpPr>
-        <p:spPr/>
+        <p:spPr>
+          <a:xfrm>
+            <a:off x="838200" y="0"/>
+            <a:ext cx="10515600" cy="1325563"/>
+          </a:xfrm>
+        </p:spPr>
         <p:txBody>
           <a:bodyPr/>
           <a:lstStyle/>
           <a:p>
             <a:r>
-              <a:rPr lang="en-US" dirty="0"/>
+              <a:rPr lang="en-US" dirty="0">
+                <a:latin typeface="CMU Serif Roman" panose="02000603000000000000" pitchFamily="2" charset="0"/>
+                <a:ea typeface="CMU Serif Roman" panose="02000603000000000000" pitchFamily="2" charset="0"/>
+                <a:cs typeface="CMU Serif Roman" panose="02000603000000000000" pitchFamily="2" charset="0"/>
+              </a:rPr>
               <a:t>Some definitions</a:t>
             </a:r>
           </a:p>
@@ -14771,7 +15188,7 @@
         </p:nvSpPr>
         <p:spPr>
           <a:xfrm>
-            <a:off x="838200" y="1825624"/>
+            <a:off x="838200" y="1031145"/>
             <a:ext cx="10900410" cy="5032375"/>
           </a:xfrm>
         </p:spPr>
@@ -14787,17 +15204,19 @@
             <a:r>
               <a:rPr lang="en-US" b="1" dirty="0">
                 <a:solidFill>
-                  <a:srgbClr val="7030A0"/>
+                  <a:srgbClr val="1B55EB"/>
                 </a:solidFill>
-                <a:ea typeface="+mn-lt"/>
-                <a:cs typeface="+mn-lt"/>
+                <a:latin typeface="CMU SERIF ROMAN" panose="02000603000000000000" pitchFamily="2" charset="0"/>
+                <a:ea typeface="CMU SERIF ROMAN" panose="02000603000000000000" pitchFamily="2" charset="0"/>
+                <a:cs typeface="CMU SERIF ROMAN" panose="02000603000000000000" pitchFamily="2" charset="0"/>
               </a:rPr>
               <a:t>Model </a:t>
             </a:r>
             <a:r>
               <a:rPr lang="en-US" dirty="0">
-                <a:ea typeface="+mn-lt"/>
-                <a:cs typeface="+mn-lt"/>
+                <a:latin typeface="CMU Serif Roman" panose="02000603000000000000" pitchFamily="2" charset="0"/>
+                <a:ea typeface="CMU Serif Roman" panose="02000603000000000000" pitchFamily="2" charset="0"/>
+                <a:cs typeface="CMU Serif Roman" panose="02000603000000000000" pitchFamily="2" charset="0"/>
               </a:rPr>
               <a:t>The thing you train and use to generate text.</a:t>
             </a:r>
@@ -14806,20 +15225,33 @@
             <a:pPr marL="0" indent="0">
               <a:buNone/>
             </a:pPr>
+            <a:r>
+              <a:rPr lang="en-US" b="1" dirty="0">
+                <a:solidFill>
+                  <a:srgbClr val="1B55EB"/>
+                </a:solidFill>
+                <a:latin typeface="CMU SERIF ROMAN" panose="02000603000000000000" pitchFamily="2" charset="0"/>
+                <a:ea typeface="CMU SERIF ROMAN" panose="02000603000000000000" pitchFamily="2" charset="0"/>
+                <a:cs typeface="CMU SERIF ROMAN" panose="02000603000000000000" pitchFamily="2" charset="0"/>
+              </a:rPr>
+              <a:t>Architecture</a:t>
+            </a:r>
             <a:r>
               <a:rPr lang="en-US" b="1" dirty="0">
                 <a:solidFill>
                   <a:srgbClr val="7030A0"/>
                 </a:solidFill>
-                <a:ea typeface="+mn-lt"/>
-                <a:cs typeface="+mn-lt"/>
-              </a:rPr>
-              <a:t>Architecture </a:t>
+                <a:latin typeface="CMU SERIF ROMAN" panose="02000603000000000000" pitchFamily="2" charset="0"/>
+                <a:ea typeface="CMU SERIF ROMAN" panose="02000603000000000000" pitchFamily="2" charset="0"/>
+                <a:cs typeface="CMU SERIF ROMAN" panose="02000603000000000000" pitchFamily="2" charset="0"/>
+              </a:rPr>
+              <a:t> </a:t>
             </a:r>
             <a:r>
               <a:rPr lang="en-US" dirty="0">
-                <a:ea typeface="+mn-lt"/>
-                <a:cs typeface="+mn-lt"/>
+                <a:latin typeface="CMU Serif Roman" panose="02000603000000000000" pitchFamily="2" charset="0"/>
+                <a:ea typeface="CMU Serif Roman" panose="02000603000000000000" pitchFamily="2" charset="0"/>
+                <a:cs typeface="CMU Serif Roman" panose="02000603000000000000" pitchFamily="2" charset="0"/>
               </a:rPr>
               <a:t>The high-level structure of the model.</a:t>
             </a:r>
@@ -14828,154 +15260,293 @@
             <a:pPr marL="0" indent="0">
               <a:buNone/>
             </a:pPr>
+            <a:r>
+              <a:rPr lang="en-US" b="1" dirty="0">
+                <a:solidFill>
+                  <a:srgbClr val="1B55EB"/>
+                </a:solidFill>
+                <a:latin typeface="CMU SERIF ROMAN" panose="02000603000000000000" pitchFamily="2" charset="0"/>
+                <a:ea typeface="CMU SERIF ROMAN" panose="02000603000000000000" pitchFamily="2" charset="0"/>
+                <a:cs typeface="CMU SERIF ROMAN" panose="02000603000000000000" pitchFamily="2" charset="0"/>
+              </a:rPr>
+              <a:t>Parameters </a:t>
+            </a:r>
+            <a:r>
+              <a:rPr lang="en-US" dirty="0">
+                <a:latin typeface="CMU Serif Roman" panose="02000603000000000000" pitchFamily="2" charset="0"/>
+                <a:ea typeface="CMU Serif Roman" panose="02000603000000000000" pitchFamily="2" charset="0"/>
+                <a:cs typeface="CMU Serif Roman" panose="02000603000000000000" pitchFamily="2" charset="0"/>
+              </a:rPr>
+              <a:t>(or weights) The internal knobs and dials that get altered during the course of training.</a:t>
+            </a:r>
+          </a:p>
+          <a:p>
+            <a:pPr marL="0" indent="0">
+              <a:buNone/>
+            </a:pPr>
+            <a:r>
+              <a:rPr lang="en-US" b="1" dirty="0">
+                <a:solidFill>
+                  <a:srgbClr val="1B55EB"/>
+                </a:solidFill>
+                <a:latin typeface="CMU SERIF ROMAN" panose="02000603000000000000" pitchFamily="2" charset="0"/>
+                <a:ea typeface="CMU SERIF ROMAN" panose="02000603000000000000" pitchFamily="2" charset="0"/>
+                <a:cs typeface="CMU SERIF ROMAN" panose="02000603000000000000" pitchFamily="2" charset="0"/>
+              </a:rPr>
+              <a:t>Context</a:t>
+            </a:r>
             <a:r>
               <a:rPr lang="en-US" b="1" dirty="0">
                 <a:solidFill>
                   <a:srgbClr val="7030A0"/>
                 </a:solidFill>
-                <a:ea typeface="+mn-lt"/>
-                <a:cs typeface="+mn-lt"/>
-              </a:rPr>
-              <a:t>Parameters </a:t>
+                <a:latin typeface="CMU SERIF ROMAN" panose="02000603000000000000" pitchFamily="2" charset="0"/>
+                <a:ea typeface="CMU SERIF ROMAN" panose="02000603000000000000" pitchFamily="2" charset="0"/>
+                <a:cs typeface="CMU SERIF ROMAN" panose="02000603000000000000" pitchFamily="2" charset="0"/>
+              </a:rPr>
+              <a:t> </a:t>
             </a:r>
             <a:r>
               <a:rPr lang="en-US" dirty="0">
-                <a:ea typeface="+mn-lt"/>
-                <a:cs typeface="+mn-lt"/>
-              </a:rPr>
-              <a:t>(or weights) The internal knobs and dials that get altered during the course of training.</a:t>
+                <a:latin typeface="CMU Serif Roman" panose="02000603000000000000" pitchFamily="2" charset="0"/>
+                <a:ea typeface="CMU Serif Roman" panose="02000603000000000000" pitchFamily="2" charset="0"/>
+                <a:cs typeface="CMU Serif Roman" panose="02000603000000000000" pitchFamily="2" charset="0"/>
+              </a:rPr>
+              <a:t>The input to the LLM.</a:t>
             </a:r>
           </a:p>
           <a:p>
             <a:pPr marL="0" indent="0">
               <a:buNone/>
             </a:pPr>
+            <a:r>
+              <a:rPr lang="en-US" b="1" dirty="0">
+                <a:solidFill>
+                  <a:srgbClr val="1B55EB"/>
+                </a:solidFill>
+                <a:latin typeface="CMU SERIF ROMAN" panose="02000603000000000000" pitchFamily="2" charset="0"/>
+                <a:ea typeface="CMU SERIF ROMAN" panose="02000603000000000000" pitchFamily="2" charset="0"/>
+                <a:cs typeface="CMU SERIF ROMAN" panose="02000603000000000000" pitchFamily="2" charset="0"/>
+              </a:rPr>
+              <a:t>Embedding </a:t>
+            </a:r>
+            <a:r>
+              <a:rPr lang="en-US" dirty="0">
+                <a:latin typeface="CMU Serif Roman" panose="02000603000000000000" pitchFamily="2" charset="0"/>
+                <a:ea typeface="CMU Serif Roman" panose="02000603000000000000" pitchFamily="2" charset="0"/>
+                <a:cs typeface="CMU Serif Roman" panose="02000603000000000000" pitchFamily="2" charset="0"/>
+              </a:rPr>
+              <a:t>A high-dimensional representation of text.</a:t>
+            </a:r>
+          </a:p>
+          <a:p>
+            <a:pPr marL="0" indent="0">
+              <a:buNone/>
+            </a:pPr>
+            <a:r>
+              <a:rPr lang="en-US" b="1" dirty="0">
+                <a:solidFill>
+                  <a:srgbClr val="1B55EB"/>
+                </a:solidFill>
+                <a:latin typeface="CMU SERIF ROMAN" panose="02000603000000000000" pitchFamily="2" charset="0"/>
+                <a:ea typeface="CMU SERIF ROMAN" panose="02000603000000000000" pitchFamily="2" charset="0"/>
+                <a:cs typeface="CMU SERIF ROMAN" panose="02000603000000000000" pitchFamily="2" charset="0"/>
+              </a:rPr>
+              <a:t>Token</a:t>
+            </a:r>
             <a:r>
               <a:rPr lang="en-US" b="1" dirty="0">
                 <a:solidFill>
                   <a:srgbClr val="7030A0"/>
                 </a:solidFill>
-                <a:ea typeface="+mn-lt"/>
-                <a:cs typeface="+mn-lt"/>
-              </a:rPr>
-              <a:t>Context </a:t>
+                <a:latin typeface="CMU SERIF ROMAN" panose="02000603000000000000" pitchFamily="2" charset="0"/>
+                <a:ea typeface="CMU SERIF ROMAN" panose="02000603000000000000" pitchFamily="2" charset="0"/>
+                <a:cs typeface="CMU SERIF ROMAN" panose="02000603000000000000" pitchFamily="2" charset="0"/>
+              </a:rPr>
+              <a:t> </a:t>
             </a:r>
             <a:r>
               <a:rPr lang="en-US" dirty="0">
-                <a:ea typeface="+mn-lt"/>
-                <a:cs typeface="+mn-lt"/>
-              </a:rPr>
-              <a:t>The input to the LLM.</a:t>
+                <a:latin typeface="CMU Serif Roman" panose="02000603000000000000" pitchFamily="2" charset="0"/>
+                <a:ea typeface="CMU Serif Roman" panose="02000603000000000000" pitchFamily="2" charset="0"/>
+                <a:cs typeface="CMU Serif Roman" panose="02000603000000000000" pitchFamily="2" charset="0"/>
+              </a:rPr>
+              <a:t>The smallest unit of text fed into a model.</a:t>
             </a:r>
           </a:p>
           <a:p>
             <a:pPr marL="0" indent="0">
               <a:buNone/>
             </a:pPr>
+            <a:r>
+              <a:rPr lang="en-US" b="1" dirty="0">
+                <a:solidFill>
+                  <a:srgbClr val="1B55EB"/>
+                </a:solidFill>
+                <a:latin typeface="CMU SERIF ROMAN" panose="02000603000000000000" pitchFamily="2" charset="0"/>
+                <a:ea typeface="CMU SERIF ROMAN" panose="02000603000000000000" pitchFamily="2" charset="0"/>
+                <a:cs typeface="CMU SERIF ROMAN" panose="02000603000000000000" pitchFamily="2" charset="0"/>
+              </a:rPr>
+              <a:t>Pre-training</a:t>
+            </a:r>
             <a:r>
               <a:rPr lang="en-US" b="1" dirty="0">
                 <a:solidFill>
                   <a:srgbClr val="7030A0"/>
                 </a:solidFill>
-                <a:ea typeface="+mn-lt"/>
-                <a:cs typeface="+mn-lt"/>
-              </a:rPr>
-              <a:t>Embedding </a:t>
+                <a:latin typeface="CMU SERIF ROMAN" panose="02000603000000000000" pitchFamily="2" charset="0"/>
+                <a:ea typeface="CMU SERIF ROMAN" panose="02000603000000000000" pitchFamily="2" charset="0"/>
+                <a:cs typeface="CMU SERIF ROMAN" panose="02000603000000000000" pitchFamily="2" charset="0"/>
+              </a:rPr>
+              <a:t> </a:t>
             </a:r>
             <a:r>
               <a:rPr lang="en-US" dirty="0">
-                <a:ea typeface="+mn-lt"/>
-                <a:cs typeface="+mn-lt"/>
-              </a:rPr>
-              <a:t>A high-dimensional representation of text.</a:t>
+                <a:latin typeface="CMU Serif Roman" panose="02000603000000000000" pitchFamily="2" charset="0"/>
+                <a:ea typeface="CMU Serif Roman" panose="02000603000000000000" pitchFamily="2" charset="0"/>
+                <a:cs typeface="CMU Serif Roman" panose="02000603000000000000" pitchFamily="2" charset="0"/>
+              </a:rPr>
+              <a:t>The first stage of training the LLM, and usually the most expensive.</a:t>
             </a:r>
           </a:p>
           <a:p>
             <a:pPr marL="0" indent="0">
               <a:buNone/>
             </a:pPr>
+            <a:r>
+              <a:rPr lang="en-US" b="1" dirty="0">
+                <a:solidFill>
+                  <a:srgbClr val="1B55EB"/>
+                </a:solidFill>
+                <a:latin typeface="CMU SERIF ROMAN" panose="02000603000000000000" pitchFamily="2" charset="0"/>
+                <a:ea typeface="CMU SERIF ROMAN" panose="02000603000000000000" pitchFamily="2" charset="0"/>
+                <a:cs typeface="CMU SERIF ROMAN" panose="02000603000000000000" pitchFamily="2" charset="0"/>
+              </a:rPr>
+              <a:t>Post-training</a:t>
+            </a:r>
             <a:r>
               <a:rPr lang="en-US" b="1" dirty="0">
                 <a:solidFill>
                   <a:srgbClr val="7030A0"/>
                 </a:solidFill>
-                <a:ea typeface="+mn-lt"/>
-                <a:cs typeface="+mn-lt"/>
-              </a:rPr>
-              <a:t>Token </a:t>
+                <a:latin typeface="CMU SERIF ROMAN" panose="02000603000000000000" pitchFamily="2" charset="0"/>
+                <a:ea typeface="CMU SERIF ROMAN" panose="02000603000000000000" pitchFamily="2" charset="0"/>
+                <a:cs typeface="CMU SERIF ROMAN" panose="02000603000000000000" pitchFamily="2" charset="0"/>
+              </a:rPr>
+              <a:t> </a:t>
             </a:r>
             <a:r>
               <a:rPr lang="en-US" dirty="0">
-                <a:ea typeface="+mn-lt"/>
-                <a:cs typeface="+mn-lt"/>
-              </a:rPr>
-              <a:t>The smallest unit of text fed into a model.</a:t>
+                <a:latin typeface="CMU Serif Roman" panose="02000603000000000000" pitchFamily="2" charset="0"/>
+                <a:ea typeface="CMU Serif Roman" panose="02000603000000000000" pitchFamily="2" charset="0"/>
+                <a:cs typeface="CMU Serif Roman" panose="02000603000000000000" pitchFamily="2" charset="0"/>
+              </a:rPr>
+              <a:t>The second stage of training for working beyond general language understanding</a:t>
             </a:r>
           </a:p>
           <a:p>
             <a:pPr marL="0" indent="0">
               <a:buNone/>
             </a:pPr>
+            <a:r>
+              <a:rPr lang="en-US" b="1" dirty="0">
+                <a:solidFill>
+                  <a:srgbClr val="1B55EB"/>
+                </a:solidFill>
+                <a:latin typeface="CMU SERIF ROMAN" panose="02000603000000000000" pitchFamily="2" charset="0"/>
+                <a:ea typeface="CMU SERIF ROMAN" panose="02000603000000000000" pitchFamily="2" charset="0"/>
+                <a:cs typeface="CMU SERIF ROMAN" panose="02000603000000000000" pitchFamily="2" charset="0"/>
+              </a:rPr>
+              <a:t>Fine-tuning</a:t>
+            </a:r>
             <a:r>
               <a:rPr lang="en-US" b="1" dirty="0">
                 <a:solidFill>
                   <a:srgbClr val="7030A0"/>
                 </a:solidFill>
-                <a:ea typeface="+mn-lt"/>
-                <a:cs typeface="+mn-lt"/>
-              </a:rPr>
-              <a:t>Pre-training </a:t>
+                <a:latin typeface="CMU SERIF ROMAN" panose="02000603000000000000" pitchFamily="2" charset="0"/>
+                <a:ea typeface="CMU SERIF ROMAN" panose="02000603000000000000" pitchFamily="2" charset="0"/>
+                <a:cs typeface="CMU SERIF ROMAN" panose="02000603000000000000" pitchFamily="2" charset="0"/>
+              </a:rPr>
+              <a:t> </a:t>
             </a:r>
             <a:r>
               <a:rPr lang="en-US" dirty="0">
-                <a:ea typeface="+mn-lt"/>
-                <a:cs typeface="+mn-lt"/>
-              </a:rPr>
-              <a:t>The first stage of training the LLM, and usually the most expensive.</a:t>
+                <a:latin typeface="CMU Serif Roman" panose="02000603000000000000" pitchFamily="2" charset="0"/>
+                <a:ea typeface="CMU Serif Roman" panose="02000603000000000000" pitchFamily="2" charset="0"/>
+                <a:cs typeface="CMU Serif Roman" panose="02000603000000000000" pitchFamily="2" charset="0"/>
+              </a:rPr>
+              <a:t>Training the LLM to do a particular task.</a:t>
             </a:r>
           </a:p>
           <a:p>
             <a:pPr marL="0" indent="0">
               <a:buNone/>
             </a:pPr>
+            <a:r>
+              <a:rPr lang="en-US" b="1" dirty="0">
+                <a:solidFill>
+                  <a:srgbClr val="1B55EB"/>
+                </a:solidFill>
+                <a:latin typeface="CMU SERIF ROMAN" panose="02000603000000000000" pitchFamily="2" charset="0"/>
+                <a:ea typeface="CMU SERIF ROMAN" panose="02000603000000000000" pitchFamily="2" charset="0"/>
+                <a:cs typeface="CMU SERIF ROMAN" panose="02000603000000000000" pitchFamily="2" charset="0"/>
+              </a:rPr>
+              <a:t>Inference</a:t>
+            </a:r>
             <a:r>
               <a:rPr lang="en-US" b="1" dirty="0">
                 <a:solidFill>
                   <a:srgbClr val="7030A0"/>
                 </a:solidFill>
-                <a:ea typeface="+mn-lt"/>
-                <a:cs typeface="+mn-lt"/>
-              </a:rPr>
-              <a:t>Post-training </a:t>
+                <a:latin typeface="CMU SERIF ROMAN" panose="02000603000000000000" pitchFamily="2" charset="0"/>
+                <a:ea typeface="CMU SERIF ROMAN" panose="02000603000000000000" pitchFamily="2" charset="0"/>
+                <a:cs typeface="CMU SERIF ROMAN" panose="02000603000000000000" pitchFamily="2" charset="0"/>
+              </a:rPr>
+              <a:t> </a:t>
             </a:r>
             <a:r>
               <a:rPr lang="en-US" dirty="0">
-                <a:ea typeface="+mn-lt"/>
-                <a:cs typeface="+mn-lt"/>
-              </a:rPr>
-              <a:t>The second stage of training for working beyond general language understanding</a:t>
+                <a:latin typeface="CMU Serif Roman" panose="02000603000000000000" pitchFamily="2" charset="0"/>
+                <a:ea typeface="CMU Serif Roman" panose="02000603000000000000" pitchFamily="2" charset="0"/>
+                <a:cs typeface="CMU Serif Roman" panose="02000603000000000000" pitchFamily="2" charset="0"/>
+              </a:rPr>
+              <a:t>The act of calling the model for text generation.</a:t>
             </a:r>
           </a:p>
           <a:p>
             <a:pPr marL="0" indent="0">
               <a:buNone/>
             </a:pPr>
+            <a:r>
+              <a:rPr lang="en-US" b="1" dirty="0">
+                <a:solidFill>
+                  <a:srgbClr val="1B55EB"/>
+                </a:solidFill>
+                <a:latin typeface="CMU SERIF ROMAN" panose="02000603000000000000" pitchFamily="2" charset="0"/>
+                <a:ea typeface="CMU SERIF ROMAN" panose="02000603000000000000" pitchFamily="2" charset="0"/>
+                <a:cs typeface="CMU SERIF ROMAN" panose="02000603000000000000" pitchFamily="2" charset="0"/>
+              </a:rPr>
+              <a:t>Quantization</a:t>
+            </a:r>
             <a:r>
               <a:rPr lang="en-US" b="1" dirty="0">
                 <a:solidFill>
                   <a:srgbClr val="7030A0"/>
                 </a:solidFill>
-                <a:ea typeface="+mn-lt"/>
-                <a:cs typeface="+mn-lt"/>
-              </a:rPr>
-              <a:t>Fine-tuning </a:t>
+                <a:latin typeface="CMU SERIF ROMAN" panose="02000603000000000000" pitchFamily="2" charset="0"/>
+                <a:ea typeface="CMU SERIF ROMAN" panose="02000603000000000000" pitchFamily="2" charset="0"/>
+                <a:cs typeface="CMU SERIF ROMAN" panose="02000603000000000000" pitchFamily="2" charset="0"/>
+              </a:rPr>
+              <a:t> </a:t>
             </a:r>
             <a:r>
               <a:rPr lang="en-US" dirty="0">
-                <a:ea typeface="+mn-lt"/>
-                <a:cs typeface="+mn-lt"/>
-              </a:rPr>
-              <a:t>Training the LLM to do a particular task.</a:t>
+                <a:latin typeface="CMU Serif Roman" panose="02000603000000000000" pitchFamily="2" charset="0"/>
+                <a:ea typeface="CMU Serif Roman" panose="02000603000000000000" pitchFamily="2" charset="0"/>
+                <a:cs typeface="CMU Serif Roman" panose="02000603000000000000" pitchFamily="2" charset="0"/>
+              </a:rPr>
+              <a:t>Reducing the size of a model.</a:t>
             </a:r>
           </a:p>
           <a:p>
@@ -14985,19 +15556,21 @@
             <a:r>
               <a:rPr lang="en-US" b="1" dirty="0">
                 <a:solidFill>
-                  <a:srgbClr val="7030A0"/>
+                  <a:srgbClr val="1B55EB"/>
                 </a:solidFill>
-                <a:ea typeface="+mn-lt"/>
-                <a:cs typeface="+mn-lt"/>
-              </a:rPr>
-              <a:t>Inference </a:t>
+                <a:latin typeface="CMU SERIF ROMAN" panose="02000603000000000000" pitchFamily="2" charset="0"/>
+                <a:ea typeface="CMU SERIF ROMAN" panose="02000603000000000000" pitchFamily="2" charset="0"/>
+                <a:cs typeface="CMU SERIF ROMAN" panose="02000603000000000000" pitchFamily="2" charset="0"/>
+              </a:rPr>
+              <a:t>Source </a:t>
             </a:r>
             <a:r>
               <a:rPr lang="en-US" dirty="0">
-                <a:ea typeface="+mn-lt"/>
-                <a:cs typeface="+mn-lt"/>
-              </a:rPr>
-              <a:t>The act of calling the model for text generation.</a:t>
+                <a:latin typeface="CMU Serif Roman" panose="02000603000000000000" pitchFamily="2" charset="0"/>
+                <a:ea typeface="CMU Serif Roman" panose="02000603000000000000" pitchFamily="2" charset="0"/>
+                <a:cs typeface="CMU Serif Roman" panose="02000603000000000000" pitchFamily="2" charset="0"/>
+              </a:rPr>
+              <a:t>The availability of the model (can be open or closed).</a:t>
             </a:r>
           </a:p>
           <a:p>
@@ -15007,19 +15580,21 @@
             <a:r>
               <a:rPr lang="en-US" b="1" dirty="0">
                 <a:solidFill>
-                  <a:srgbClr val="7030A0"/>
+                  <a:srgbClr val="1B55EB"/>
                 </a:solidFill>
-                <a:ea typeface="+mn-lt"/>
-                <a:cs typeface="+mn-lt"/>
-              </a:rPr>
-              <a:t>Quantization </a:t>
+                <a:latin typeface="CMU SERIF ROMAN" panose="02000603000000000000" pitchFamily="2" charset="0"/>
+                <a:ea typeface="CMU SERIF ROMAN" panose="02000603000000000000" pitchFamily="2" charset="0"/>
+                <a:cs typeface="CMU SERIF ROMAN" panose="02000603000000000000" pitchFamily="2" charset="0"/>
+              </a:rPr>
+              <a:t>Modality </a:t>
             </a:r>
             <a:r>
               <a:rPr lang="en-US" dirty="0">
-                <a:ea typeface="+mn-lt"/>
-                <a:cs typeface="+mn-lt"/>
-              </a:rPr>
-              <a:t>Reducing the size of a model.</a:t>
+                <a:latin typeface="CMU Serif Roman" panose="02000603000000000000" pitchFamily="2" charset="0"/>
+                <a:ea typeface="CMU Serif Roman" panose="02000603000000000000" pitchFamily="2" charset="0"/>
+                <a:cs typeface="CMU Serif Roman" panose="02000603000000000000" pitchFamily="2" charset="0"/>
+              </a:rPr>
+              <a:t>Defined by the type of data the model is trained on (e.g. text or images).</a:t>
             </a:r>
           </a:p>
           <a:p>
@@ -15029,65 +15604,22 @@
             <a:r>
               <a:rPr lang="en-US" b="1" dirty="0">
                 <a:solidFill>
-                  <a:srgbClr val="7030A0"/>
+                  <a:srgbClr val="1B55EB"/>
                 </a:solidFill>
-                <a:ea typeface="+mn-lt"/>
-                <a:cs typeface="+mn-lt"/>
-              </a:rPr>
-              <a:t>Source </a:t>
+                <a:latin typeface="CMU SERIF ROMAN" panose="02000603000000000000" pitchFamily="2" charset="0"/>
+                <a:ea typeface="CMU SERIF ROMAN" panose="02000603000000000000" pitchFamily="2" charset="0"/>
+                <a:cs typeface="CMU SERIF ROMAN" panose="02000603000000000000" pitchFamily="2" charset="0"/>
+              </a:rPr>
+              <a:t>API </a:t>
             </a:r>
             <a:r>
               <a:rPr lang="en-US" dirty="0">
-                <a:ea typeface="+mn-lt"/>
-                <a:cs typeface="+mn-lt"/>
-              </a:rPr>
-              <a:t>The availability of the model (can be open or closed).</a:t>
-            </a:r>
-          </a:p>
-          <a:p>
-            <a:pPr marL="0" indent="0">
-              <a:buNone/>
-            </a:pPr>
-            <a:r>
-              <a:rPr lang="en-US" b="1" dirty="0">
-                <a:solidFill>
-                  <a:srgbClr val="7030A0"/>
-                </a:solidFill>
-                <a:ea typeface="+mn-lt"/>
-                <a:cs typeface="+mn-lt"/>
-              </a:rPr>
-              <a:t>Modality </a:t>
-            </a:r>
-            <a:r>
-              <a:rPr lang="en-US" dirty="0">
-                <a:ea typeface="+mn-lt"/>
-                <a:cs typeface="+mn-lt"/>
-              </a:rPr>
-              <a:t>Defined by the type of data the model is trained on (e.g. text or images).</a:t>
-            </a:r>
-          </a:p>
-          <a:p>
-            <a:pPr marL="0" indent="0">
-              <a:buNone/>
-            </a:pPr>
-            <a:r>
-              <a:rPr lang="en-US" b="1" dirty="0">
-                <a:solidFill>
-                  <a:srgbClr val="7030A0"/>
-                </a:solidFill>
-                <a:ea typeface="+mn-lt"/>
-                <a:cs typeface="+mn-lt"/>
-              </a:rPr>
-              <a:t>API </a:t>
-            </a:r>
-            <a:r>
-              <a:rPr lang="en-US" dirty="0">
-                <a:ea typeface="+mn-lt"/>
-                <a:cs typeface="+mn-lt"/>
+                <a:latin typeface="CMU Serif Roman" panose="02000603000000000000" pitchFamily="2" charset="0"/>
+                <a:ea typeface="CMU Serif Roman" panose="02000603000000000000" pitchFamily="2" charset="0"/>
+                <a:cs typeface="CMU Serif Roman" panose="02000603000000000000" pitchFamily="2" charset="0"/>
               </a:rPr>
               <a:t>(Application Programming Interface) The means by which you can interact with a model.</a:t>
             </a:r>
-            <a:endParaRPr lang="en-US" dirty="0"/>
           </a:p>
         </p:txBody>
       </p:sp>
@@ -15095,142 +15627,6 @@
     <p:extLst>
       <p:ext uri="{BB962C8B-B14F-4D97-AF65-F5344CB8AC3E}">
         <p14:creationId xmlns:p14="http://schemas.microsoft.com/office/powerpoint/2010/main" val="2828243406"/>
-      </p:ext>
-    </p:extLst>
-  </p:cSld>
-  <p:clrMapOvr>
-    <a:masterClrMapping/>
-  </p:clrMapOvr>
-</p:sld>
-</file>
-
-<file path=ppt/slides/slide9.xml><?xml version="1.0" encoding="utf-8"?>
-<p:sld xmlns:a="http://schemas.openxmlformats.org/drawingml/2006/main" xmlns:r="http://schemas.openxmlformats.org/officeDocument/2006/relationships" xmlns:p="http://schemas.openxmlformats.org/presentationml/2006/main">
-  <p:cSld>
-    <p:spTree>
-      <p:nvGrpSpPr>
-        <p:cNvPr id="1" name=""/>
-        <p:cNvGrpSpPr/>
-        <p:nvPr/>
-      </p:nvGrpSpPr>
-      <p:grpSpPr>
-        <a:xfrm>
-          <a:off x="0" y="0"/>
-          <a:ext cx="0" cy="0"/>
-          <a:chOff x="0" y="0"/>
-          <a:chExt cx="0" cy="0"/>
-        </a:xfrm>
-      </p:grpSpPr>
-      <p:sp>
-        <p:nvSpPr>
-          <p:cNvPr id="2" name="Title 1">
-            <a:extLst>
-              <a:ext uri="{FF2B5EF4-FFF2-40B4-BE49-F238E27FC236}">
-                <a16:creationId xmlns:a16="http://schemas.microsoft.com/office/drawing/2014/main" id="{7C33511F-8565-6D41-02BF-6E9296DCF3B4}"/>
-              </a:ext>
-            </a:extLst>
-          </p:cNvPr>
-          <p:cNvSpPr>
-            <a:spLocks noGrp="1"/>
-          </p:cNvSpPr>
-          <p:nvPr>
-            <p:ph type="title"/>
-          </p:nvPr>
-        </p:nvSpPr>
-        <p:spPr/>
-        <p:txBody>
-          <a:bodyPr/>
-          <a:lstStyle/>
-          <a:p>
-            <a:r>
-              <a:rPr lang="en-US" dirty="0"/>
-              <a:t>EU AI Act </a:t>
-            </a:r>
-            <a:r>
-              <a:rPr lang="en-US" i="1" dirty="0">
-                <a:solidFill>
-                  <a:schemeClr val="bg2">
-                    <a:lumMod val="50000"/>
-                  </a:schemeClr>
-                </a:solidFill>
-              </a:rPr>
-              <a:t>(</a:t>
-            </a:r>
-            <a:r>
-              <a:rPr lang="en-GB" i="1" dirty="0">
-                <a:solidFill>
-                  <a:schemeClr val="bg2">
-                    <a:lumMod val="50000"/>
-                  </a:schemeClr>
-                </a:solidFill>
-              </a:rPr>
-              <a:t>August 2024</a:t>
-            </a:r>
-            <a:r>
-              <a:rPr lang="en-US" i="1" dirty="0">
-                <a:solidFill>
-                  <a:schemeClr val="bg2">
-                    <a:lumMod val="50000"/>
-                  </a:schemeClr>
-                </a:solidFill>
-              </a:rPr>
-              <a:t>)</a:t>
-            </a:r>
-          </a:p>
-        </p:txBody>
-      </p:sp>
-      <p:sp>
-        <p:nvSpPr>
-          <p:cNvPr id="3" name="Content Placeholder 2">
-            <a:extLst>
-              <a:ext uri="{FF2B5EF4-FFF2-40B4-BE49-F238E27FC236}">
-                <a16:creationId xmlns:a16="http://schemas.microsoft.com/office/drawing/2014/main" id="{C10ABB8D-3273-0866-F725-70CD2E52915C}"/>
-              </a:ext>
-            </a:extLst>
-          </p:cNvPr>
-          <p:cNvSpPr>
-            <a:spLocks noGrp="1"/>
-          </p:cNvSpPr>
-          <p:nvPr>
-            <p:ph idx="1"/>
-          </p:nvPr>
-        </p:nvSpPr>
-        <p:spPr/>
-        <p:txBody>
-          <a:bodyPr vert="horz" lIns="91440" tIns="45720" rIns="91440" bIns="45720" rtlCol="0" anchor="t">
-            <a:normAutofit/>
-          </a:bodyPr>
-          <a:lstStyle/>
-          <a:p>
-            <a:pPr marL="0" indent="0">
-              <a:buNone/>
-            </a:pPr>
-            <a:r>
-              <a:rPr lang="en-US" dirty="0"/>
-              <a:t>How does the AI Act define things...?</a:t>
-            </a:r>
-          </a:p>
-          <a:p>
-            <a:pPr marL="0" indent="0">
-              <a:buNone/>
-            </a:pPr>
-            <a:endParaRPr lang="en-US" dirty="0"/>
-          </a:p>
-          <a:p>
-            <a:pPr marL="0" indent="0">
-              <a:buNone/>
-            </a:pPr>
-            <a:endParaRPr lang="en-US" dirty="0">
-              <a:ea typeface="+mn-lt"/>
-              <a:cs typeface="+mn-lt"/>
-            </a:endParaRPr>
-          </a:p>
-        </p:txBody>
-      </p:sp>
-    </p:spTree>
-    <p:extLst>
-      <p:ext uri="{BB962C8B-B14F-4D97-AF65-F5344CB8AC3E}">
-        <p14:creationId xmlns:p14="http://schemas.microsoft.com/office/powerpoint/2010/main" val="1865729139"/>
       </p:ext>
     </p:extLst>
   </p:cSld>

--- a/slides/flsg/1-intro-flsg.pptx
+++ b/slides/flsg/1-intro-flsg.pptx
@@ -315,7 +315,7 @@
           </a:lstStyle>
           <a:p>
             <a:fld id="{2DE082D9-00CE-4FDC-82D3-FDE16CD37225}" type="datetimeFigureOut">
-              <a:t>5/14/26</a:t>
+              <a:t>6/22/26</a:t>
             </a:fld>
             <a:endParaRPr lang="en-US"/>
           </a:p>
@@ -1044,7 +1044,7 @@
           <a:p>
             <a:r>
               <a:rPr lang="en-US" dirty="0"/>
-              <a:t>Workshops (see in a second) and  AI Clinic</a:t>
+              <a:t>Workshops (see in a second) and  AI Clinic (see in a second)</a:t>
             </a:r>
           </a:p>
           <a:p>
@@ -1974,7 +1974,7 @@
           <a:p>
             <a:fld id="{C764DE79-268F-4C1A-8933-263129D2AF90}" type="datetimeFigureOut">
               <a:rPr lang="en-US" dirty="0"/>
-              <a:t>5/14/26</a:t>
+              <a:t>6/22/26</a:t>
             </a:fld>
             <a:endParaRPr lang="en-US" dirty="0"/>
           </a:p>
@@ -2142,7 +2142,7 @@
           <a:p>
             <a:fld id="{C764DE79-268F-4C1A-8933-263129D2AF90}" type="datetimeFigureOut">
               <a:rPr lang="en-US" dirty="0"/>
-              <a:t>5/14/26</a:t>
+              <a:t>6/22/26</a:t>
             </a:fld>
             <a:endParaRPr lang="en-US" dirty="0"/>
           </a:p>
@@ -2320,7 +2320,7 @@
           <a:p>
             <a:fld id="{C764DE79-268F-4C1A-8933-263129D2AF90}" type="datetimeFigureOut">
               <a:rPr lang="en-US" dirty="0"/>
-              <a:t>5/14/26</a:t>
+              <a:t>6/22/26</a:t>
             </a:fld>
             <a:endParaRPr lang="en-US" dirty="0"/>
           </a:p>
@@ -2488,7 +2488,7 @@
           <a:p>
             <a:fld id="{C764DE79-268F-4C1A-8933-263129D2AF90}" type="datetimeFigureOut">
               <a:rPr lang="en-US" dirty="0"/>
-              <a:t>5/14/26</a:t>
+              <a:t>6/22/26</a:t>
             </a:fld>
             <a:endParaRPr lang="en-US" dirty="0"/>
           </a:p>
@@ -2733,7 +2733,7 @@
           <a:p>
             <a:fld id="{C764DE79-268F-4C1A-8933-263129D2AF90}" type="datetimeFigureOut">
               <a:rPr lang="en-US" dirty="0"/>
-              <a:t>5/14/26</a:t>
+              <a:t>6/22/26</a:t>
             </a:fld>
             <a:endParaRPr lang="en-US" dirty="0"/>
           </a:p>
@@ -2962,7 +2962,7 @@
           <a:p>
             <a:fld id="{C764DE79-268F-4C1A-8933-263129D2AF90}" type="datetimeFigureOut">
               <a:rPr lang="en-US" dirty="0"/>
-              <a:t>5/14/26</a:t>
+              <a:t>6/22/26</a:t>
             </a:fld>
             <a:endParaRPr lang="en-US" dirty="0"/>
           </a:p>
@@ -3326,7 +3326,7 @@
           <a:p>
             <a:fld id="{C764DE79-268F-4C1A-8933-263129D2AF90}" type="datetimeFigureOut">
               <a:rPr lang="en-US" dirty="0"/>
-              <a:t>5/14/26</a:t>
+              <a:t>6/22/26</a:t>
             </a:fld>
             <a:endParaRPr lang="en-US" dirty="0"/>
           </a:p>
@@ -3443,7 +3443,7 @@
           <a:p>
             <a:fld id="{C764DE79-268F-4C1A-8933-263129D2AF90}" type="datetimeFigureOut">
               <a:rPr lang="en-US" dirty="0"/>
-              <a:t>5/14/26</a:t>
+              <a:t>6/22/26</a:t>
             </a:fld>
             <a:endParaRPr lang="en-US" dirty="0"/>
           </a:p>
@@ -3538,7 +3538,7 @@
           <a:p>
             <a:fld id="{C764DE79-268F-4C1A-8933-263129D2AF90}" type="datetimeFigureOut">
               <a:rPr lang="en-US" dirty="0"/>
-              <a:t>5/14/26</a:t>
+              <a:t>6/22/26</a:t>
             </a:fld>
             <a:endParaRPr lang="en-US" dirty="0"/>
           </a:p>
@@ -3813,7 +3813,7 @@
           <a:p>
             <a:fld id="{C764DE79-268F-4C1A-8933-263129D2AF90}" type="datetimeFigureOut">
               <a:rPr lang="en-US" dirty="0"/>
-              <a:t>5/14/26</a:t>
+              <a:t>6/22/26</a:t>
             </a:fld>
             <a:endParaRPr lang="en-US" dirty="0"/>
           </a:p>
@@ -4065,7 +4065,7 @@
           <a:p>
             <a:fld id="{C764DE79-268F-4C1A-8933-263129D2AF90}" type="datetimeFigureOut">
               <a:rPr lang="en-US" dirty="0"/>
-              <a:t>5/14/26</a:t>
+              <a:t>6/22/26</a:t>
             </a:fld>
             <a:endParaRPr lang="en-US" dirty="0"/>
           </a:p>
@@ -4285,7 +4285,7 @@
           <a:p>
             <a:fld id="{C764DE79-268F-4C1A-8933-263129D2AF90}" type="datetimeFigureOut">
               <a:rPr lang="en-US" dirty="0"/>
-              <a:t>5/14/26</a:t>
+              <a:t>6/22/26</a:t>
             </a:fld>
             <a:endParaRPr lang="en-US" dirty="0"/>
           </a:p>
